--- a/dataTypes/PythonVariablesAndDataTypes.pptx
+++ b/dataTypes/PythonVariablesAndDataTypes.pptx
@@ -5,7 +5,7 @@
     <p:sldMasterId id="2147483648" r:id="rId1"/>
   </p:sldMasterIdLst>
   <p:notesMasterIdLst>
-    <p:notesMasterId r:id="rId15"/>
+    <p:notesMasterId r:id="rId17"/>
   </p:notesMasterIdLst>
   <p:sldIdLst>
     <p:sldId id="260" r:id="rId2"/>
@@ -21,6 +21,8 @@
     <p:sldId id="266" r:id="rId12"/>
     <p:sldId id="267" r:id="rId13"/>
     <p:sldId id="268" r:id="rId14"/>
+    <p:sldId id="269" r:id="rId15"/>
+    <p:sldId id="270" r:id="rId16"/>
   </p:sldIdLst>
   <p:sldSz cx="9144000" cy="5143500" type="screen16x9"/>
   <p:notesSz cx="5143500" cy="9144000"/>
@@ -651,6 +653,174 @@
             <a:fld id="{F7021451-1387-4CA6-816F-3879F97B5CBC}" type="slidenum">
               <a:rPr lang="en-US"/>
               <a:t>13</a:t>
+            </a:fld>
+            <a:endParaRPr lang="en-US"/>
+          </a:p>
+        </p:txBody>
+      </p:sp>
+    </p:spTree>
+    <p:extLst>
+      <p:ext uri="{BB962C8B-B14F-4D97-AF65-F5344CB8AC3E}">
+        <p14:creationId xmlns:p14="http://schemas.microsoft.com/office/powerpoint/2010/main" val="1024086991"/>
+      </p:ext>
+    </p:extLst>
+  </p:cSld>
+  <p:clrMapOvr>
+    <a:masterClrMapping/>
+  </p:clrMapOvr>
+</p:notes>
+</file>
+
+<file path=ppt/notesSlides/notesSlide14.xml><?xml version="1.0" encoding="utf-8"?>
+<p:notes xmlns:a="http://schemas.openxmlformats.org/drawingml/2006/main" xmlns:r="http://schemas.openxmlformats.org/officeDocument/2006/relationships" xmlns:p="http://schemas.openxmlformats.org/presentationml/2006/main">
+  <p:cSld>
+    <p:spTree>
+      <p:nvGrpSpPr>
+        <p:cNvPr id="1" name=""/>
+        <p:cNvGrpSpPr/>
+        <p:nvPr/>
+      </p:nvGrpSpPr>
+      <p:grpSpPr>
+        <a:xfrm>
+          <a:off x="0" y="0"/>
+          <a:ext cx="0" cy="0"/>
+          <a:chOff x="0" y="0"/>
+          <a:chExt cx="0" cy="0"/>
+        </a:xfrm>
+      </p:grpSpPr>
+      <p:sp>
+        <p:nvSpPr>
+          <p:cNvPr id="2" name="Slide Image Placeholder 1"/>
+          <p:cNvSpPr>
+            <a:spLocks noGrp="1" noRot="1" noChangeAspect="1"/>
+          </p:cNvSpPr>
+          <p:nvPr>
+            <p:ph type="sldImg"/>
+          </p:nvPr>
+        </p:nvSpPr>
+        <p:spPr/>
+      </p:sp>
+      <p:sp>
+        <p:nvSpPr>
+          <p:cNvPr id="3" name="Notes Placeholder 2"/>
+          <p:cNvSpPr>
+            <a:spLocks noGrp="1"/>
+          </p:cNvSpPr>
+          <p:nvPr>
+            <p:ph type="body" idx="1"/>
+          </p:nvPr>
+        </p:nvSpPr>
+        <p:spPr/>
+        <p:txBody>
+          <a:bodyPr/>
+          <a:lstStyle/>
+          <a:p>
+            <a:endParaRPr lang="en-US" dirty="0"/>
+          </a:p>
+        </p:txBody>
+      </p:sp>
+      <p:sp>
+        <p:nvSpPr>
+          <p:cNvPr id="4" name="Slide Number Placeholder 3"/>
+          <p:cNvSpPr>
+            <a:spLocks noGrp="1"/>
+          </p:cNvSpPr>
+          <p:nvPr>
+            <p:ph type="sldNum" sz="quarter" idx="10"/>
+          </p:nvPr>
+        </p:nvSpPr>
+        <p:spPr/>
+        <p:txBody>
+          <a:bodyPr/>
+          <a:lstStyle/>
+          <a:p>
+            <a:fld id="{F7021451-1387-4CA6-816F-3879F97B5CBC}" type="slidenum">
+              <a:rPr lang="en-US"/>
+              <a:t>14</a:t>
+            </a:fld>
+            <a:endParaRPr lang="en-US"/>
+          </a:p>
+        </p:txBody>
+      </p:sp>
+    </p:spTree>
+    <p:extLst>
+      <p:ext uri="{BB962C8B-B14F-4D97-AF65-F5344CB8AC3E}">
+        <p14:creationId xmlns:p14="http://schemas.microsoft.com/office/powerpoint/2010/main" val="1024086991"/>
+      </p:ext>
+    </p:extLst>
+  </p:cSld>
+  <p:clrMapOvr>
+    <a:masterClrMapping/>
+  </p:clrMapOvr>
+</p:notes>
+</file>
+
+<file path=ppt/notesSlides/notesSlide15.xml><?xml version="1.0" encoding="utf-8"?>
+<p:notes xmlns:a="http://schemas.openxmlformats.org/drawingml/2006/main" xmlns:r="http://schemas.openxmlformats.org/officeDocument/2006/relationships" xmlns:p="http://schemas.openxmlformats.org/presentationml/2006/main">
+  <p:cSld>
+    <p:spTree>
+      <p:nvGrpSpPr>
+        <p:cNvPr id="1" name=""/>
+        <p:cNvGrpSpPr/>
+        <p:nvPr/>
+      </p:nvGrpSpPr>
+      <p:grpSpPr>
+        <a:xfrm>
+          <a:off x="0" y="0"/>
+          <a:ext cx="0" cy="0"/>
+          <a:chOff x="0" y="0"/>
+          <a:chExt cx="0" cy="0"/>
+        </a:xfrm>
+      </p:grpSpPr>
+      <p:sp>
+        <p:nvSpPr>
+          <p:cNvPr id="2" name="Slide Image Placeholder 1"/>
+          <p:cNvSpPr>
+            <a:spLocks noGrp="1" noRot="1" noChangeAspect="1"/>
+          </p:cNvSpPr>
+          <p:nvPr>
+            <p:ph type="sldImg"/>
+          </p:nvPr>
+        </p:nvSpPr>
+        <p:spPr/>
+      </p:sp>
+      <p:sp>
+        <p:nvSpPr>
+          <p:cNvPr id="3" name="Notes Placeholder 2"/>
+          <p:cNvSpPr>
+            <a:spLocks noGrp="1"/>
+          </p:cNvSpPr>
+          <p:nvPr>
+            <p:ph type="body" idx="1"/>
+          </p:nvPr>
+        </p:nvSpPr>
+        <p:spPr/>
+        <p:txBody>
+          <a:bodyPr/>
+          <a:lstStyle/>
+          <a:p>
+            <a:endParaRPr lang="en-US" dirty="0"/>
+          </a:p>
+        </p:txBody>
+      </p:sp>
+      <p:sp>
+        <p:nvSpPr>
+          <p:cNvPr id="4" name="Slide Number Placeholder 3"/>
+          <p:cNvSpPr>
+            <a:spLocks noGrp="1"/>
+          </p:cNvSpPr>
+          <p:nvPr>
+            <p:ph type="sldNum" sz="quarter" idx="10"/>
+          </p:nvPr>
+        </p:nvSpPr>
+        <p:spPr/>
+        <p:txBody>
+          <a:bodyPr/>
+          <a:lstStyle/>
+          <a:p>
+            <a:fld id="{F7021451-1387-4CA6-816F-3879F97B5CBC}" type="slidenum">
+              <a:rPr lang="en-US"/>
+              <a:t>15</a:t>
             </a:fld>
             <a:endParaRPr lang="en-US"/>
           </a:p>
@@ -1769,45 +1939,6 @@
       </p:sp>
       <p:sp>
         <p:nvSpPr>
-          <p:cNvPr id="5" name="Text 3"/>
-          <p:cNvSpPr/>
-          <p:nvPr/>
-        </p:nvSpPr>
-        <p:spPr>
-          <a:xfrm>
-            <a:off x="8275320" y="0"/>
-            <a:ext cx="731520" cy="658368"/>
-          </a:xfrm>
-          <a:prstGeom prst="rect">
-            <a:avLst/>
-          </a:prstGeom>
-          <a:noFill/>
-          <a:ln/>
-        </p:spPr>
-        <p:txBody>
-          <a:bodyPr wrap="square" lIns="0" tIns="0" rIns="0" bIns="0" rtlCol="0" anchor="ctr"/>
-          <a:lstStyle/>
-          <a:p>
-            <a:pPr marL="0" indent="0" algn="r">
-              <a:buNone/>
-            </a:pPr>
-            <a:r>
-              <a:rPr lang="en-US" sz="1300" dirty="0">
-                <a:solidFill>
-                  <a:srgbClr val="FBBF24"/>
-                </a:solidFill>
-                <a:latin typeface="Calibri" pitchFamily="34" charset="0"/>
-                <a:ea typeface="Calibri" pitchFamily="34" charset="-122"/>
-                <a:cs typeface="Calibri" pitchFamily="34" charset="-120"/>
-              </a:rPr>
-              <a:t>1</a:t>
-            </a:r>
-            <a:endParaRPr lang="en-US" sz="1300" dirty="0"/>
-          </a:p>
-        </p:txBody>
-      </p:sp>
-      <p:sp>
-        <p:nvSpPr>
           <p:cNvPr id="6" name="Shape 4"/>
           <p:cNvSpPr/>
           <p:nvPr/>
@@ -4038,7 +4169,7 @@
                 <a:ea typeface="Calibri" pitchFamily="34" charset="-122"/>
                 <a:cs typeface="Calibri" pitchFamily="34" charset="-120"/>
               </a:rPr>
-              <a:t>🗂️  Dictionary  (dict)  — Part 1 of 2</a:t>
+              <a:t>Dictionary  (dict)  — Part 1 of 2</a:t>
             </a:r>
             <a:endParaRPr lang="en-US" sz="2100" dirty="0"/>
           </a:p>
@@ -7230,7 +7361,7 @@
                 <a:ea typeface="Calibri" pitchFamily="34" charset="-122"/>
                 <a:cs typeface="Calibri" pitchFamily="34" charset="-120"/>
               </a:rPr>
-              <a:t>🗂️  Dictionary  (dict)  — Part 2 of 2</a:t>
+              <a:t>Dictionary  (dict)  — Part 2 of 2</a:t>
             </a:r>
             <a:endParaRPr lang="en-US" sz="2100" dirty="0"/>
           </a:p>
@@ -10318,7 +10449,7 @@
                 <a:ea typeface="Calibri" pitchFamily="34" charset="-122"/>
                 <a:cs typeface="Calibri" pitchFamily="34" charset="-120"/>
               </a:rPr>
-              <a:t>📋  List  (list)  — Part 1 of 2</a:t>
+              <a:t>List  (list)  — Part 1 of 2</a:t>
             </a:r>
             <a:endParaRPr lang="en-US" sz="2100" dirty="0"/>
           </a:p>
@@ -13691,7 +13822,7 @@
                 <a:ea typeface="Calibri" pitchFamily="34" charset="-122"/>
                 <a:cs typeface="Calibri" pitchFamily="34" charset="-120"/>
               </a:rPr>
-              <a:t>📋  List  (list)  — Part 2 of 2</a:t>
+              <a:t>List  (list)  — Part 2 of 2</a:t>
             </a:r>
             <a:endParaRPr lang="en-US" sz="2100" dirty="0"/>
           </a:p>
@@ -16680,6 +16811,6975 @@
 </p:sld>
 </file>
 
+<file path=ppt/slides/slide14.xml><?xml version="1.0" encoding="utf-8"?>
+<p:sld xmlns:a="http://schemas.openxmlformats.org/drawingml/2006/main" xmlns:r="http://schemas.openxmlformats.org/officeDocument/2006/relationships" xmlns:p="http://schemas.openxmlformats.org/presentationml/2006/main">
+  <p:cSld>
+    <p:bg>
+      <p:bgPr>
+        <a:solidFill>
+          <a:srgbClr val="002060"/>
+        </a:solidFill>
+        <a:effectLst/>
+      </p:bgPr>
+    </p:bg>
+    <p:spTree>
+      <p:nvGrpSpPr>
+        <p:cNvPr id="1" name=""/>
+        <p:cNvGrpSpPr/>
+        <p:nvPr/>
+      </p:nvGrpSpPr>
+      <p:grpSpPr>
+        <a:xfrm>
+          <a:off x="0" y="0"/>
+          <a:ext cx="0" cy="0"/>
+          <a:chOff x="0" y="0"/>
+          <a:chExt cx="0" cy="0"/>
+        </a:xfrm>
+      </p:grpSpPr>
+      <p:sp>
+        <p:nvSpPr>
+          <p:cNvPr id="2" name="Shape 0"/>
+          <p:cNvSpPr/>
+          <p:nvPr/>
+        </p:nvSpPr>
+        <p:spPr>
+          <a:xfrm>
+            <a:off x="0" y="0"/>
+            <a:ext cx="9052560" cy="457200"/>
+          </a:xfrm>
+          <a:prstGeom prst="rect">
+            <a:avLst/>
+          </a:prstGeom>
+          <a:solidFill>
+            <a:srgbClr val="1E293B"/>
+          </a:solidFill>
+          <a:ln w="12700">
+            <a:solidFill>
+              <a:srgbClr val="1E293B"/>
+            </a:solidFill>
+            <a:prstDash val="solid"/>
+          </a:ln>
+        </p:spPr>
+      </p:sp>
+      <p:sp>
+        <p:nvSpPr>
+          <p:cNvPr id="3" name="Shape 1"/>
+          <p:cNvSpPr/>
+          <p:nvPr/>
+        </p:nvSpPr>
+        <p:spPr>
+          <a:xfrm>
+            <a:off x="0" y="0"/>
+            <a:ext cx="162946" cy="457200"/>
+          </a:xfrm>
+          <a:prstGeom prst="rect">
+            <a:avLst/>
+          </a:prstGeom>
+          <a:solidFill>
+            <a:srgbClr val="F87171"/>
+          </a:solidFill>
+          <a:ln w="12700">
+            <a:solidFill>
+              <a:srgbClr val="F87171"/>
+            </a:solidFill>
+            <a:prstDash val="solid"/>
+          </a:ln>
+        </p:spPr>
+      </p:sp>
+      <p:sp>
+        <p:nvSpPr>
+          <p:cNvPr id="4" name="Text 2"/>
+          <p:cNvSpPr/>
+          <p:nvPr/>
+        </p:nvSpPr>
+        <p:spPr>
+          <a:xfrm>
+            <a:off x="292608" y="0"/>
+            <a:ext cx="7966253" cy="457200"/>
+          </a:xfrm>
+          <a:prstGeom prst="rect">
+            <a:avLst/>
+          </a:prstGeom>
+          <a:noFill/>
+          <a:ln/>
+        </p:spPr>
+        <p:txBody>
+          <a:bodyPr wrap="square" lIns="0" tIns="0" rIns="0" bIns="0" rtlCol="0" anchor="ctr"/>
+          <a:lstStyle/>
+          <a:p>
+            <a:pPr marL="0" indent="0">
+              <a:buNone/>
+            </a:pPr>
+            <a:r>
+              <a:rPr lang="en-US" sz="2100" b="1" dirty="0">
+                <a:solidFill>
+                  <a:srgbClr val="F1F5F9"/>
+                </a:solidFill>
+                <a:latin typeface="Calibri" pitchFamily="34" charset="0"/>
+                <a:ea typeface="Calibri" pitchFamily="34" charset="-122"/>
+                <a:cs typeface="Calibri" pitchFamily="34" charset="-120"/>
+              </a:rPr>
+              <a:t>  Set  (set)  — Part 1 of 2</a:t>
+            </a:r>
+            <a:endParaRPr lang="en-US" sz="2100" dirty="0"/>
+          </a:p>
+        </p:txBody>
+      </p:sp>
+      <p:sp>
+        <p:nvSpPr>
+          <p:cNvPr id="6" name="Shape 4"/>
+          <p:cNvSpPr/>
+          <p:nvPr/>
+        </p:nvSpPr>
+        <p:spPr>
+          <a:xfrm>
+            <a:off x="0" y="4992624"/>
+            <a:ext cx="9144000" cy="27432"/>
+          </a:xfrm>
+          <a:prstGeom prst="rect">
+            <a:avLst/>
+          </a:prstGeom>
+          <a:solidFill>
+            <a:srgbClr val="334155"/>
+          </a:solidFill>
+          <a:ln w="12700">
+            <a:solidFill>
+              <a:srgbClr val="334155"/>
+            </a:solidFill>
+            <a:prstDash val="solid"/>
+          </a:ln>
+        </p:spPr>
+      </p:sp>
+      <p:sp>
+        <p:nvSpPr>
+          <p:cNvPr id="7" name="Text 5"/>
+          <p:cNvSpPr/>
+          <p:nvPr/>
+        </p:nvSpPr>
+        <p:spPr>
+          <a:xfrm>
+            <a:off x="274320" y="5029200"/>
+            <a:ext cx="8595360" cy="109728"/>
+          </a:xfrm>
+          <a:prstGeom prst="rect">
+            <a:avLst/>
+          </a:prstGeom>
+          <a:noFill/>
+          <a:ln/>
+        </p:spPr>
+        <p:txBody>
+          <a:bodyPr wrap="square" lIns="0" tIns="0" rIns="0" bIns="0" rtlCol="0" anchor="ctr"/>
+          <a:lstStyle/>
+          <a:p>
+            <a:pPr marL="0" indent="0">
+              <a:buNone/>
+            </a:pPr>
+            <a:r>
+              <a:rPr lang="en-US" sz="700" dirty="0">
+                <a:solidFill>
+                  <a:srgbClr val="64748B"/>
+                </a:solidFill>
+                <a:latin typeface="Calibri" pitchFamily="34" charset="0"/>
+                <a:ea typeface="Calibri" pitchFamily="34" charset="-122"/>
+                <a:cs typeface="Calibri" pitchFamily="34" charset="-120"/>
+              </a:rPr>
+              <a:t>Python Course  ·  Data Types  ·  github.com/reachsatyavs/python-tutorials</a:t>
+            </a:r>
+            <a:endParaRPr lang="en-US" sz="700" dirty="0"/>
+          </a:p>
+        </p:txBody>
+      </p:sp>
+      <p:sp>
+        <p:nvSpPr>
+          <p:cNvPr id="8" name="Shape 6"/>
+          <p:cNvSpPr/>
+          <p:nvPr/>
+        </p:nvSpPr>
+        <p:spPr>
+          <a:xfrm>
+            <a:off x="256032" y="630104"/>
+            <a:ext cx="1828800" cy="246888"/>
+          </a:xfrm>
+          <a:prstGeom prst="rect">
+            <a:avLst/>
+          </a:prstGeom>
+          <a:solidFill>
+            <a:srgbClr val="F87171"/>
+          </a:solidFill>
+          <a:ln w="12700">
+            <a:solidFill>
+              <a:srgbClr val="F87171"/>
+            </a:solidFill>
+            <a:prstDash val="solid"/>
+          </a:ln>
+        </p:spPr>
+      </p:sp>
+      <p:sp>
+        <p:nvSpPr>
+          <p:cNvPr id="9" name="Text 7"/>
+          <p:cNvSpPr/>
+          <p:nvPr/>
+        </p:nvSpPr>
+        <p:spPr>
+          <a:xfrm>
+            <a:off x="256032" y="630104"/>
+            <a:ext cx="1828800" cy="246888"/>
+          </a:xfrm>
+          <a:prstGeom prst="rect">
+            <a:avLst/>
+          </a:prstGeom>
+          <a:noFill/>
+          <a:ln/>
+        </p:spPr>
+        <p:txBody>
+          <a:bodyPr wrap="square" lIns="0" tIns="0" rIns="0" bIns="0" rtlCol="0" anchor="ctr"/>
+          <a:lstStyle/>
+          <a:p>
+            <a:pPr marL="0" indent="0" algn="ctr">
+              <a:buNone/>
+            </a:pPr>
+            <a:r>
+              <a:rPr lang="en-US" sz="850" b="1" dirty="0">
+                <a:solidFill>
+                  <a:srgbClr val="0F172A"/>
+                </a:solidFill>
+                <a:latin typeface="Calibri" pitchFamily="34" charset="0"/>
+                <a:ea typeface="Calibri" pitchFamily="34" charset="-122"/>
+                <a:cs typeface="Calibri" pitchFamily="34" charset="-120"/>
+              </a:rPr>
+              <a:t>WHEN TO USE</a:t>
+            </a:r>
+            <a:endParaRPr lang="en-US" sz="850" dirty="0"/>
+          </a:p>
+        </p:txBody>
+      </p:sp>
+      <p:sp>
+        <p:nvSpPr>
+          <p:cNvPr id="10" name="Text 8"/>
+          <p:cNvSpPr/>
+          <p:nvPr/>
+        </p:nvSpPr>
+        <p:spPr>
+          <a:xfrm>
+            <a:off x="256032" y="955963"/>
+            <a:ext cx="4078224" cy="694944"/>
+          </a:xfrm>
+          <a:prstGeom prst="rect">
+            <a:avLst/>
+          </a:prstGeom>
+          <a:noFill/>
+          <a:ln/>
+        </p:spPr>
+        <p:txBody>
+          <a:bodyPr wrap="square" lIns="0" tIns="0" rIns="0" bIns="0" rtlCol="0" anchor="ctr"/>
+          <a:lstStyle/>
+          <a:p>
+            <a:pPr marL="342900" indent="-342900">
+              <a:spcAft>
+                <a:spcPts val="300"/>
+              </a:spcAft>
+              <a:buSzPct val="100000"/>
+              <a:buChar char="•"/>
+            </a:pPr>
+            <a:r>
+              <a:rPr lang="en-US" sz="1100" dirty="0">
+                <a:solidFill>
+                  <a:srgbClr val="CBD5E1"/>
+                </a:solidFill>
+                <a:latin typeface="Calibri" pitchFamily="34" charset="0"/>
+                <a:ea typeface="Calibri" pitchFamily="34" charset="-122"/>
+                <a:cs typeface="Calibri" pitchFamily="34" charset="-120"/>
+              </a:rPr>
+              <a:t>Removing duplicates from any collection instantly</a:t>
+            </a:r>
+            <a:endParaRPr lang="en-US" sz="1100" dirty="0"/>
+          </a:p>
+          <a:p>
+            <a:pPr marL="342900" indent="-342900">
+              <a:spcAft>
+                <a:spcPts val="300"/>
+              </a:spcAft>
+              <a:buSzPct val="100000"/>
+              <a:buChar char="•"/>
+            </a:pPr>
+            <a:r>
+              <a:rPr lang="en-US" sz="1100" dirty="0">
+                <a:solidFill>
+                  <a:srgbClr val="CBD5E1"/>
+                </a:solidFill>
+                <a:latin typeface="Calibri" pitchFamily="34" charset="0"/>
+                <a:ea typeface="Calibri" pitchFamily="34" charset="-122"/>
+                <a:cs typeface="Calibri" pitchFamily="34" charset="-120"/>
+              </a:rPr>
+              <a:t>Fast O(1) membership testing — much faster than a list</a:t>
+            </a:r>
+            <a:endParaRPr lang="en-US" sz="1100" dirty="0"/>
+          </a:p>
+          <a:p>
+            <a:pPr marL="342900" indent="-342900">
+              <a:spcAft>
+                <a:spcPts val="300"/>
+              </a:spcAft>
+              <a:buSzPct val="100000"/>
+              <a:buChar char="•"/>
+            </a:pPr>
+            <a:r>
+              <a:rPr lang="en-US" sz="1100" dirty="0">
+                <a:solidFill>
+                  <a:srgbClr val="CBD5E1"/>
+                </a:solidFill>
+                <a:latin typeface="Calibri" pitchFamily="34" charset="0"/>
+                <a:ea typeface="Calibri" pitchFamily="34" charset="-122"/>
+                <a:cs typeface="Calibri" pitchFamily="34" charset="-120"/>
+              </a:rPr>
+              <a:t>Set operations — union, intersection, difference</a:t>
+            </a:r>
+            <a:endParaRPr lang="en-US" sz="1100" dirty="0"/>
+          </a:p>
+          <a:p>
+            <a:pPr marL="342900" indent="-342900">
+              <a:buSzPct val="100000"/>
+              <a:buChar char="•"/>
+            </a:pPr>
+            <a:r>
+              <a:rPr lang="en-US" sz="1100" dirty="0">
+                <a:solidFill>
+                  <a:srgbClr val="CBD5E1"/>
+                </a:solidFill>
+                <a:latin typeface="Calibri" pitchFamily="34" charset="0"/>
+                <a:ea typeface="Calibri" pitchFamily="34" charset="-122"/>
+                <a:cs typeface="Calibri" pitchFamily="34" charset="-120"/>
+              </a:rPr>
+              <a:t>Finding common or unique elements between two groups</a:t>
+            </a:r>
+            <a:endParaRPr lang="en-US" sz="1100" dirty="0"/>
+          </a:p>
+        </p:txBody>
+      </p:sp>
+      <p:sp>
+        <p:nvSpPr>
+          <p:cNvPr id="11" name="Shape 9"/>
+          <p:cNvSpPr/>
+          <p:nvPr/>
+        </p:nvSpPr>
+        <p:spPr>
+          <a:xfrm>
+            <a:off x="256032" y="1764791"/>
+            <a:ext cx="1371600" cy="246888"/>
+          </a:xfrm>
+          <a:prstGeom prst="rect">
+            <a:avLst/>
+          </a:prstGeom>
+          <a:solidFill>
+            <a:srgbClr val="F87171"/>
+          </a:solidFill>
+          <a:ln w="12700">
+            <a:solidFill>
+              <a:srgbClr val="F87171"/>
+            </a:solidFill>
+            <a:prstDash val="solid"/>
+          </a:ln>
+        </p:spPr>
+      </p:sp>
+      <p:sp>
+        <p:nvSpPr>
+          <p:cNvPr id="12" name="Text 10"/>
+          <p:cNvSpPr/>
+          <p:nvPr/>
+        </p:nvSpPr>
+        <p:spPr>
+          <a:xfrm>
+            <a:off x="256032" y="1764791"/>
+            <a:ext cx="1371600" cy="246888"/>
+          </a:xfrm>
+          <a:prstGeom prst="rect">
+            <a:avLst/>
+          </a:prstGeom>
+          <a:noFill/>
+          <a:ln/>
+        </p:spPr>
+        <p:txBody>
+          <a:bodyPr wrap="square" lIns="0" tIns="0" rIns="0" bIns="0" rtlCol="0" anchor="ctr"/>
+          <a:lstStyle/>
+          <a:p>
+            <a:pPr marL="0" indent="0" algn="ctr">
+              <a:buNone/>
+            </a:pPr>
+            <a:r>
+              <a:rPr lang="en-US" sz="850" b="1" dirty="0">
+                <a:solidFill>
+                  <a:srgbClr val="0F172A"/>
+                </a:solidFill>
+                <a:latin typeface="Calibri" pitchFamily="34" charset="0"/>
+                <a:ea typeface="Calibri" pitchFamily="34" charset="-122"/>
+                <a:cs typeface="Calibri" pitchFamily="34" charset="-120"/>
+              </a:rPr>
+              <a:t>SYNTAX</a:t>
+            </a:r>
+            <a:endParaRPr lang="en-US" sz="850" dirty="0"/>
+          </a:p>
+        </p:txBody>
+      </p:sp>
+      <p:sp>
+        <p:nvSpPr>
+          <p:cNvPr id="13" name="Shape 11"/>
+          <p:cNvSpPr/>
+          <p:nvPr/>
+        </p:nvSpPr>
+        <p:spPr>
+          <a:xfrm>
+            <a:off x="256032" y="2048255"/>
+            <a:ext cx="4078224" cy="950976"/>
+          </a:xfrm>
+          <a:prstGeom prst="rect">
+            <a:avLst/>
+          </a:prstGeom>
+          <a:solidFill>
+            <a:srgbClr val="0D1B2A"/>
+          </a:solidFill>
+          <a:ln w="12700">
+            <a:solidFill>
+              <a:srgbClr val="1E3A5F"/>
+            </a:solidFill>
+            <a:prstDash val="solid"/>
+          </a:ln>
+        </p:spPr>
+      </p:sp>
+      <p:sp>
+        <p:nvSpPr>
+          <p:cNvPr id="14" name="Text 12"/>
+          <p:cNvSpPr/>
+          <p:nvPr/>
+        </p:nvSpPr>
+        <p:spPr>
+          <a:xfrm>
+            <a:off x="384048" y="2139695"/>
+            <a:ext cx="3822192" cy="768096"/>
+          </a:xfrm>
+          <a:prstGeom prst="rect">
+            <a:avLst/>
+          </a:prstGeom>
+          <a:noFill/>
+          <a:ln/>
+        </p:spPr>
+        <p:txBody>
+          <a:bodyPr wrap="square" lIns="0" tIns="0" rIns="0" bIns="0" rtlCol="0" anchor="t"/>
+          <a:lstStyle/>
+          <a:p>
+            <a:pPr marL="0" indent="0">
+              <a:buNone/>
+            </a:pPr>
+            <a:r>
+              <a:rPr lang="en-US" sz="920" dirty="0">
+                <a:solidFill>
+                  <a:srgbClr val="7DD3FC"/>
+                </a:solidFill>
+                <a:latin typeface="Consolas" pitchFamily="34" charset="0"/>
+                <a:ea typeface="Consolas" pitchFamily="34" charset="-122"/>
+                <a:cs typeface="Consolas" pitchFamily="34" charset="-120"/>
+              </a:rPr>
+              <a:t>s = {1, 2, 3}            # literal</a:t>
+            </a:r>
+            <a:endParaRPr lang="en-US" sz="920" dirty="0"/>
+          </a:p>
+          <a:p>
+            <a:pPr marL="0" indent="0">
+              <a:buNone/>
+            </a:pPr>
+            <a:r>
+              <a:rPr lang="en-US" sz="920" dirty="0">
+                <a:solidFill>
+                  <a:srgbClr val="7DD3FC"/>
+                </a:solidFill>
+                <a:latin typeface="Consolas" pitchFamily="34" charset="0"/>
+                <a:ea typeface="Consolas" pitchFamily="34" charset="-122"/>
+                <a:cs typeface="Consolas" pitchFamily="34" charset="-120"/>
+              </a:rPr>
+              <a:t>s = set()                # empty — NOT {} (= dict!)</a:t>
+            </a:r>
+            <a:endParaRPr lang="en-US" sz="920" dirty="0"/>
+          </a:p>
+          <a:p>
+            <a:pPr marL="0" indent="0">
+              <a:buNone/>
+            </a:pPr>
+            <a:r>
+              <a:rPr lang="en-US" sz="920" dirty="0">
+                <a:solidFill>
+                  <a:srgbClr val="7DD3FC"/>
+                </a:solidFill>
+                <a:latin typeface="Consolas" pitchFamily="34" charset="0"/>
+                <a:ea typeface="Consolas" pitchFamily="34" charset="-122"/>
+                <a:cs typeface="Consolas" pitchFamily="34" charset="-120"/>
+              </a:rPr>
+              <a:t>s = set([1,2,2,3,3])     # from list  →  {1,2,3}</a:t>
+            </a:r>
+            <a:endParaRPr lang="en-US" sz="920" dirty="0"/>
+          </a:p>
+          <a:p>
+            <a:pPr marL="0" indent="0">
+              <a:buNone/>
+            </a:pPr>
+            <a:r>
+              <a:rPr lang="en-US" sz="920" dirty="0">
+                <a:solidFill>
+                  <a:srgbClr val="7DD3FC"/>
+                </a:solidFill>
+                <a:latin typeface="Consolas" pitchFamily="34" charset="0"/>
+                <a:ea typeface="Consolas" pitchFamily="34" charset="-122"/>
+                <a:cs typeface="Consolas" pitchFamily="34" charset="-120"/>
+              </a:rPr>
+              <a:t>s = set("hello")         # from str   →  {'h','e','l','o'}</a:t>
+            </a:r>
+            <a:endParaRPr lang="en-US" sz="920" dirty="0"/>
+          </a:p>
+          <a:p>
+            <a:pPr marL="0" indent="0">
+              <a:buNone/>
+            </a:pPr>
+            <a:r>
+              <a:rPr lang="en-US" sz="920" dirty="0">
+                <a:solidFill>
+                  <a:srgbClr val="7DD3FC"/>
+                </a:solidFill>
+                <a:latin typeface="Consolas" pitchFamily="34" charset="0"/>
+                <a:ea typeface="Consolas" pitchFamily="34" charset="-122"/>
+                <a:cs typeface="Consolas" pitchFamily="34" charset="-120"/>
+              </a:rPr>
+              <a:t>s = {x**2 for x in range(5)}  # comprehension</a:t>
+            </a:r>
+            <a:endParaRPr lang="en-US" sz="920" dirty="0"/>
+          </a:p>
+        </p:txBody>
+      </p:sp>
+      <p:sp>
+        <p:nvSpPr>
+          <p:cNvPr id="15" name="Shape 13"/>
+          <p:cNvSpPr/>
+          <p:nvPr/>
+        </p:nvSpPr>
+        <p:spPr>
+          <a:xfrm>
+            <a:off x="256032" y="3062408"/>
+            <a:ext cx="2194560" cy="246888"/>
+          </a:xfrm>
+          <a:prstGeom prst="rect">
+            <a:avLst/>
+          </a:prstGeom>
+          <a:solidFill>
+            <a:srgbClr val="F87171"/>
+          </a:solidFill>
+          <a:ln w="12700">
+            <a:solidFill>
+              <a:srgbClr val="F87171"/>
+            </a:solidFill>
+            <a:prstDash val="solid"/>
+          </a:ln>
+        </p:spPr>
+      </p:sp>
+      <p:sp>
+        <p:nvSpPr>
+          <p:cNvPr id="16" name="Text 14"/>
+          <p:cNvSpPr/>
+          <p:nvPr/>
+        </p:nvSpPr>
+        <p:spPr>
+          <a:xfrm>
+            <a:off x="256032" y="3062408"/>
+            <a:ext cx="2194560" cy="246888"/>
+          </a:xfrm>
+          <a:prstGeom prst="rect">
+            <a:avLst/>
+          </a:prstGeom>
+          <a:noFill/>
+          <a:ln/>
+        </p:spPr>
+        <p:txBody>
+          <a:bodyPr wrap="square" lIns="0" tIns="0" rIns="0" bIns="0" rtlCol="0" anchor="ctr"/>
+          <a:lstStyle/>
+          <a:p>
+            <a:pPr marL="0" indent="0" algn="ctr">
+              <a:buNone/>
+            </a:pPr>
+            <a:r>
+              <a:rPr lang="en-US" sz="850" b="1" dirty="0">
+                <a:solidFill>
+                  <a:srgbClr val="0F172A"/>
+                </a:solidFill>
+                <a:latin typeface="Calibri" pitchFamily="34" charset="0"/>
+                <a:ea typeface="Calibri" pitchFamily="34" charset="-122"/>
+                <a:cs typeface="Calibri" pitchFamily="34" charset="-120"/>
+              </a:rPr>
+              <a:t>CHARACTERISTICS</a:t>
+            </a:r>
+            <a:endParaRPr lang="en-US" sz="850" dirty="0"/>
+          </a:p>
+        </p:txBody>
+      </p:sp>
+      <p:sp>
+        <p:nvSpPr>
+          <p:cNvPr id="17" name="Shape 15"/>
+          <p:cNvSpPr/>
+          <p:nvPr/>
+        </p:nvSpPr>
+        <p:spPr>
+          <a:xfrm>
+            <a:off x="256032" y="3355016"/>
+            <a:ext cx="751637" cy="246888"/>
+          </a:xfrm>
+          <a:prstGeom prst="rect">
+            <a:avLst/>
+          </a:prstGeom>
+          <a:solidFill>
+            <a:srgbClr val="1E293B"/>
+          </a:solidFill>
+          <a:ln w="12700">
+            <a:solidFill>
+              <a:srgbClr val="F87171"/>
+            </a:solidFill>
+            <a:prstDash val="solid"/>
+          </a:ln>
+        </p:spPr>
+      </p:sp>
+      <p:sp>
+        <p:nvSpPr>
+          <p:cNvPr id="18" name="Text 16"/>
+          <p:cNvSpPr/>
+          <p:nvPr/>
+        </p:nvSpPr>
+        <p:spPr>
+          <a:xfrm>
+            <a:off x="256032" y="3355016"/>
+            <a:ext cx="751637" cy="246888"/>
+          </a:xfrm>
+          <a:prstGeom prst="rect">
+            <a:avLst/>
+          </a:prstGeom>
+          <a:noFill/>
+          <a:ln/>
+        </p:spPr>
+        <p:txBody>
+          <a:bodyPr wrap="square" lIns="0" tIns="0" rIns="0" bIns="0" rtlCol="0" anchor="ctr"/>
+          <a:lstStyle/>
+          <a:p>
+            <a:pPr marL="0" indent="0" algn="ctr">
+              <a:buNone/>
+            </a:pPr>
+            <a:r>
+              <a:rPr lang="en-US" sz="900" dirty="0">
+                <a:solidFill>
+                  <a:srgbClr val="F87171"/>
+                </a:solidFill>
+                <a:latin typeface="Calibri" pitchFamily="34" charset="0"/>
+                <a:ea typeface="Calibri" pitchFamily="34" charset="-122"/>
+                <a:cs typeface="Calibri" pitchFamily="34" charset="-120"/>
+              </a:rPr>
+              <a:t>Mutable</a:t>
+            </a:r>
+            <a:endParaRPr lang="en-US" sz="900" dirty="0"/>
+          </a:p>
+        </p:txBody>
+      </p:sp>
+      <p:sp>
+        <p:nvSpPr>
+          <p:cNvPr id="19" name="Shape 17"/>
+          <p:cNvSpPr/>
+          <p:nvPr/>
+        </p:nvSpPr>
+        <p:spPr>
+          <a:xfrm>
+            <a:off x="1071677" y="3355016"/>
+            <a:ext cx="751637" cy="246888"/>
+          </a:xfrm>
+          <a:prstGeom prst="rect">
+            <a:avLst/>
+          </a:prstGeom>
+          <a:solidFill>
+            <a:srgbClr val="1E293B"/>
+          </a:solidFill>
+          <a:ln w="12700">
+            <a:solidFill>
+              <a:srgbClr val="F87171"/>
+            </a:solidFill>
+            <a:prstDash val="solid"/>
+          </a:ln>
+        </p:spPr>
+      </p:sp>
+      <p:sp>
+        <p:nvSpPr>
+          <p:cNvPr id="20" name="Text 18"/>
+          <p:cNvSpPr/>
+          <p:nvPr/>
+        </p:nvSpPr>
+        <p:spPr>
+          <a:xfrm>
+            <a:off x="1071677" y="3355016"/>
+            <a:ext cx="751637" cy="246888"/>
+          </a:xfrm>
+          <a:prstGeom prst="rect">
+            <a:avLst/>
+          </a:prstGeom>
+          <a:noFill/>
+          <a:ln/>
+        </p:spPr>
+        <p:txBody>
+          <a:bodyPr wrap="square" lIns="0" tIns="0" rIns="0" bIns="0" rtlCol="0" anchor="ctr"/>
+          <a:lstStyle/>
+          <a:p>
+            <a:pPr marL="0" indent="0" algn="ctr">
+              <a:buNone/>
+            </a:pPr>
+            <a:r>
+              <a:rPr lang="en-US" sz="900" dirty="0">
+                <a:solidFill>
+                  <a:srgbClr val="F87171"/>
+                </a:solidFill>
+                <a:latin typeface="Calibri" pitchFamily="34" charset="0"/>
+                <a:ea typeface="Calibri" pitchFamily="34" charset="-122"/>
+                <a:cs typeface="Calibri" pitchFamily="34" charset="-120"/>
+              </a:rPr>
+              <a:t>Unordered</a:t>
+            </a:r>
+            <a:endParaRPr lang="en-US" sz="900" dirty="0"/>
+          </a:p>
+        </p:txBody>
+      </p:sp>
+      <p:sp>
+        <p:nvSpPr>
+          <p:cNvPr id="21" name="Shape 19"/>
+          <p:cNvSpPr/>
+          <p:nvPr/>
+        </p:nvSpPr>
+        <p:spPr>
+          <a:xfrm>
+            <a:off x="1887322" y="3355016"/>
+            <a:ext cx="751637" cy="246888"/>
+          </a:xfrm>
+          <a:prstGeom prst="rect">
+            <a:avLst/>
+          </a:prstGeom>
+          <a:solidFill>
+            <a:srgbClr val="1E293B"/>
+          </a:solidFill>
+          <a:ln w="12700">
+            <a:solidFill>
+              <a:srgbClr val="F87171"/>
+            </a:solidFill>
+            <a:prstDash val="solid"/>
+          </a:ln>
+        </p:spPr>
+      </p:sp>
+      <p:sp>
+        <p:nvSpPr>
+          <p:cNvPr id="22" name="Text 20"/>
+          <p:cNvSpPr/>
+          <p:nvPr/>
+        </p:nvSpPr>
+        <p:spPr>
+          <a:xfrm>
+            <a:off x="1887322" y="3355016"/>
+            <a:ext cx="751637" cy="246888"/>
+          </a:xfrm>
+          <a:prstGeom prst="rect">
+            <a:avLst/>
+          </a:prstGeom>
+          <a:noFill/>
+          <a:ln/>
+        </p:spPr>
+        <p:txBody>
+          <a:bodyPr wrap="square" lIns="0" tIns="0" rIns="0" bIns="0" rtlCol="0" anchor="ctr"/>
+          <a:lstStyle/>
+          <a:p>
+            <a:pPr marL="0" indent="0" algn="ctr">
+              <a:buNone/>
+            </a:pPr>
+            <a:r>
+              <a:rPr lang="en-US" sz="900" dirty="0">
+                <a:solidFill>
+                  <a:srgbClr val="F87171"/>
+                </a:solidFill>
+                <a:latin typeface="Calibri" pitchFamily="34" charset="0"/>
+                <a:ea typeface="Calibri" pitchFamily="34" charset="-122"/>
+                <a:cs typeface="Calibri" pitchFamily="34" charset="-120"/>
+              </a:rPr>
+              <a:t>No Indexing</a:t>
+            </a:r>
+            <a:endParaRPr lang="en-US" sz="900" dirty="0"/>
+          </a:p>
+        </p:txBody>
+      </p:sp>
+      <p:sp>
+        <p:nvSpPr>
+          <p:cNvPr id="23" name="Shape 21"/>
+          <p:cNvSpPr/>
+          <p:nvPr/>
+        </p:nvSpPr>
+        <p:spPr>
+          <a:xfrm>
+            <a:off x="2702966" y="3355016"/>
+            <a:ext cx="751637" cy="246888"/>
+          </a:xfrm>
+          <a:prstGeom prst="rect">
+            <a:avLst/>
+          </a:prstGeom>
+          <a:solidFill>
+            <a:srgbClr val="1E293B"/>
+          </a:solidFill>
+          <a:ln w="12700">
+            <a:solidFill>
+              <a:srgbClr val="F87171"/>
+            </a:solidFill>
+            <a:prstDash val="solid"/>
+          </a:ln>
+        </p:spPr>
+      </p:sp>
+      <p:sp>
+        <p:nvSpPr>
+          <p:cNvPr id="24" name="Text 22"/>
+          <p:cNvSpPr/>
+          <p:nvPr/>
+        </p:nvSpPr>
+        <p:spPr>
+          <a:xfrm>
+            <a:off x="2702966" y="3355016"/>
+            <a:ext cx="751637" cy="246888"/>
+          </a:xfrm>
+          <a:prstGeom prst="rect">
+            <a:avLst/>
+          </a:prstGeom>
+          <a:noFill/>
+          <a:ln/>
+        </p:spPr>
+        <p:txBody>
+          <a:bodyPr wrap="square" lIns="0" tIns="0" rIns="0" bIns="0" rtlCol="0" anchor="ctr"/>
+          <a:lstStyle/>
+          <a:p>
+            <a:pPr marL="0" indent="0" algn="ctr">
+              <a:buNone/>
+            </a:pPr>
+            <a:r>
+              <a:rPr lang="en-US" sz="900" dirty="0">
+                <a:solidFill>
+                  <a:srgbClr val="F87171"/>
+                </a:solidFill>
+                <a:latin typeface="Calibri" pitchFamily="34" charset="0"/>
+                <a:ea typeface="Calibri" pitchFamily="34" charset="-122"/>
+                <a:cs typeface="Calibri" pitchFamily="34" charset="-120"/>
+              </a:rPr>
+              <a:t>Unique Elements</a:t>
+            </a:r>
+            <a:endParaRPr lang="en-US" sz="900" dirty="0"/>
+          </a:p>
+        </p:txBody>
+      </p:sp>
+      <p:sp>
+        <p:nvSpPr>
+          <p:cNvPr id="25" name="Shape 23"/>
+          <p:cNvSpPr/>
+          <p:nvPr/>
+        </p:nvSpPr>
+        <p:spPr>
+          <a:xfrm>
+            <a:off x="3518611" y="3355016"/>
+            <a:ext cx="751637" cy="246888"/>
+          </a:xfrm>
+          <a:prstGeom prst="rect">
+            <a:avLst/>
+          </a:prstGeom>
+          <a:solidFill>
+            <a:srgbClr val="1E293B"/>
+          </a:solidFill>
+          <a:ln w="12700">
+            <a:solidFill>
+              <a:srgbClr val="F87171"/>
+            </a:solidFill>
+            <a:prstDash val="solid"/>
+          </a:ln>
+        </p:spPr>
+      </p:sp>
+      <p:sp>
+        <p:nvSpPr>
+          <p:cNvPr id="26" name="Text 24"/>
+          <p:cNvSpPr/>
+          <p:nvPr/>
+        </p:nvSpPr>
+        <p:spPr>
+          <a:xfrm>
+            <a:off x="3518611" y="3355016"/>
+            <a:ext cx="751637" cy="246888"/>
+          </a:xfrm>
+          <a:prstGeom prst="rect">
+            <a:avLst/>
+          </a:prstGeom>
+          <a:noFill/>
+          <a:ln/>
+        </p:spPr>
+        <p:txBody>
+          <a:bodyPr wrap="square" lIns="0" tIns="0" rIns="0" bIns="0" rtlCol="0" anchor="ctr"/>
+          <a:lstStyle/>
+          <a:p>
+            <a:pPr marL="0" indent="0" algn="ctr">
+              <a:buNone/>
+            </a:pPr>
+            <a:r>
+              <a:rPr lang="en-US" sz="900" dirty="0">
+                <a:solidFill>
+                  <a:srgbClr val="F87171"/>
+                </a:solidFill>
+                <a:latin typeface="Calibri" pitchFamily="34" charset="0"/>
+                <a:ea typeface="Calibri" pitchFamily="34" charset="-122"/>
+                <a:cs typeface="Calibri" pitchFamily="34" charset="-120"/>
+              </a:rPr>
+              <a:t>Hashable Items</a:t>
+            </a:r>
+            <a:endParaRPr lang="en-US" sz="900" dirty="0"/>
+          </a:p>
+        </p:txBody>
+      </p:sp>
+      <p:sp>
+        <p:nvSpPr>
+          <p:cNvPr id="27" name="Shape 25"/>
+          <p:cNvSpPr/>
+          <p:nvPr/>
+        </p:nvSpPr>
+        <p:spPr>
+          <a:xfrm>
+            <a:off x="256032" y="3647624"/>
+            <a:ext cx="1828800" cy="246888"/>
+          </a:xfrm>
+          <a:prstGeom prst="rect">
+            <a:avLst/>
+          </a:prstGeom>
+          <a:solidFill>
+            <a:srgbClr val="F87171"/>
+          </a:solidFill>
+          <a:ln w="12700">
+            <a:solidFill>
+              <a:srgbClr val="F87171"/>
+            </a:solidFill>
+            <a:prstDash val="solid"/>
+          </a:ln>
+        </p:spPr>
+      </p:sp>
+      <p:sp>
+        <p:nvSpPr>
+          <p:cNvPr id="28" name="Text 26"/>
+          <p:cNvSpPr/>
+          <p:nvPr/>
+        </p:nvSpPr>
+        <p:spPr>
+          <a:xfrm>
+            <a:off x="256032" y="3647624"/>
+            <a:ext cx="1828800" cy="246888"/>
+          </a:xfrm>
+          <a:prstGeom prst="rect">
+            <a:avLst/>
+          </a:prstGeom>
+          <a:noFill/>
+          <a:ln/>
+        </p:spPr>
+        <p:txBody>
+          <a:bodyPr wrap="square" lIns="0" tIns="0" rIns="0" bIns="0" rtlCol="0" anchor="ctr"/>
+          <a:lstStyle/>
+          <a:p>
+            <a:pPr marL="0" indent="0" algn="ctr">
+              <a:buNone/>
+            </a:pPr>
+            <a:r>
+              <a:rPr lang="en-US" sz="850" b="1" dirty="0">
+                <a:solidFill>
+                  <a:srgbClr val="0F172A"/>
+                </a:solidFill>
+                <a:latin typeface="Calibri" pitchFamily="34" charset="0"/>
+                <a:ea typeface="Calibri" pitchFamily="34" charset="-122"/>
+                <a:cs typeface="Calibri" pitchFamily="34" charset="-120"/>
+              </a:rPr>
+              <a:t>CODE EXAMPLE</a:t>
+            </a:r>
+            <a:endParaRPr lang="en-US" sz="850" dirty="0"/>
+          </a:p>
+        </p:txBody>
+      </p:sp>
+      <p:sp>
+        <p:nvSpPr>
+          <p:cNvPr id="29" name="Shape 27"/>
+          <p:cNvSpPr/>
+          <p:nvPr/>
+        </p:nvSpPr>
+        <p:spPr>
+          <a:xfrm>
+            <a:off x="256032" y="3971820"/>
+            <a:ext cx="4078224" cy="965940"/>
+          </a:xfrm>
+          <a:prstGeom prst="rect">
+            <a:avLst/>
+          </a:prstGeom>
+          <a:solidFill>
+            <a:srgbClr val="0D1B2A"/>
+          </a:solidFill>
+          <a:ln w="12700">
+            <a:solidFill>
+              <a:srgbClr val="1E3A5F"/>
+            </a:solidFill>
+            <a:prstDash val="solid"/>
+          </a:ln>
+        </p:spPr>
+      </p:sp>
+      <p:sp>
+        <p:nvSpPr>
+          <p:cNvPr id="30" name="Text 28"/>
+          <p:cNvSpPr/>
+          <p:nvPr/>
+        </p:nvSpPr>
+        <p:spPr>
+          <a:xfrm>
+            <a:off x="367422" y="3988443"/>
+            <a:ext cx="3822192" cy="694944"/>
+          </a:xfrm>
+          <a:prstGeom prst="rect">
+            <a:avLst/>
+          </a:prstGeom>
+          <a:noFill/>
+          <a:ln/>
+        </p:spPr>
+        <p:txBody>
+          <a:bodyPr wrap="square" lIns="0" tIns="0" rIns="0" bIns="0" rtlCol="0" anchor="t"/>
+          <a:lstStyle/>
+          <a:p>
+            <a:pPr marL="0" indent="0">
+              <a:buNone/>
+            </a:pPr>
+            <a:r>
+              <a:rPr lang="en-US" sz="980" dirty="0">
+                <a:solidFill>
+                  <a:srgbClr val="7DD3FC"/>
+                </a:solidFill>
+                <a:latin typeface="Consolas" pitchFamily="34" charset="0"/>
+                <a:ea typeface="Consolas" pitchFamily="34" charset="-122"/>
+                <a:cs typeface="Consolas" pitchFamily="34" charset="-120"/>
+              </a:rPr>
+              <a:t>s = {1, 2, 3, 4}</a:t>
+            </a:r>
+            <a:endParaRPr lang="en-US" sz="980" dirty="0"/>
+          </a:p>
+          <a:p>
+            <a:pPr marL="0" indent="0">
+              <a:buNone/>
+            </a:pPr>
+            <a:r>
+              <a:rPr lang="en-US" sz="980" dirty="0">
+                <a:solidFill>
+                  <a:srgbClr val="7DD3FC"/>
+                </a:solidFill>
+                <a:latin typeface="Consolas" pitchFamily="34" charset="0"/>
+                <a:ea typeface="Consolas" pitchFamily="34" charset="-122"/>
+                <a:cs typeface="Consolas" pitchFamily="34" charset="-120"/>
+              </a:rPr>
+              <a:t>s.add(5)             # {1,2,3,4,5}</a:t>
+            </a:r>
+            <a:endParaRPr lang="en-US" sz="980" dirty="0"/>
+          </a:p>
+          <a:p>
+            <a:pPr marL="0" indent="0">
+              <a:buNone/>
+            </a:pPr>
+            <a:r>
+              <a:rPr lang="en-US" sz="980" dirty="0">
+                <a:solidFill>
+                  <a:srgbClr val="7DD3FC"/>
+                </a:solidFill>
+                <a:latin typeface="Consolas" pitchFamily="34" charset="0"/>
+                <a:ea typeface="Consolas" pitchFamily="34" charset="-122"/>
+                <a:cs typeface="Consolas" pitchFamily="34" charset="-120"/>
+              </a:rPr>
+              <a:t>s.discard(10)        # no error if absent</a:t>
+            </a:r>
+            <a:endParaRPr lang="en-US" sz="980" dirty="0"/>
+          </a:p>
+          <a:p>
+            <a:pPr marL="0" indent="0">
+              <a:buNone/>
+            </a:pPr>
+            <a:r>
+              <a:rPr lang="en-US" sz="980" dirty="0">
+                <a:solidFill>
+                  <a:srgbClr val="7DD3FC"/>
+                </a:solidFill>
+                <a:latin typeface="Consolas" pitchFamily="34" charset="0"/>
+                <a:ea typeface="Consolas" pitchFamily="34" charset="-122"/>
+                <a:cs typeface="Consolas" pitchFamily="34" charset="-120"/>
+              </a:rPr>
+              <a:t>print(3 in s)        # True — O(1)!</a:t>
+            </a:r>
+            <a:endParaRPr lang="en-US" sz="980" dirty="0"/>
+          </a:p>
+          <a:p>
+            <a:pPr marL="0" indent="0">
+              <a:buNone/>
+            </a:pPr>
+            <a:r>
+              <a:rPr lang="en-US" sz="980" dirty="0">
+                <a:solidFill>
+                  <a:srgbClr val="7DD3FC"/>
+                </a:solidFill>
+                <a:latin typeface="Consolas" pitchFamily="34" charset="0"/>
+                <a:ea typeface="Consolas" pitchFamily="34" charset="-122"/>
+                <a:cs typeface="Consolas" pitchFamily="34" charset="-120"/>
+              </a:rPr>
+              <a:t>lst = [1,2,2,3,3,4]</a:t>
+            </a:r>
+            <a:endParaRPr lang="en-US" sz="980" dirty="0"/>
+          </a:p>
+          <a:p>
+            <a:pPr marL="0" indent="0">
+              <a:buNone/>
+            </a:pPr>
+            <a:r>
+              <a:rPr lang="en-US" sz="980" dirty="0">
+                <a:solidFill>
+                  <a:srgbClr val="7DD3FC"/>
+                </a:solidFill>
+                <a:latin typeface="Consolas" pitchFamily="34" charset="0"/>
+                <a:ea typeface="Consolas" pitchFamily="34" charset="-122"/>
+                <a:cs typeface="Consolas" pitchFamily="34" charset="-120"/>
+              </a:rPr>
+              <a:t>print(list(set(lst)))# [1,2,3,4] dedup</a:t>
+            </a:r>
+            <a:endParaRPr lang="en-US" sz="980" dirty="0"/>
+          </a:p>
+        </p:txBody>
+      </p:sp>
+      <p:sp>
+        <p:nvSpPr>
+          <p:cNvPr id="31" name="Shape 29"/>
+          <p:cNvSpPr/>
+          <p:nvPr/>
+        </p:nvSpPr>
+        <p:spPr>
+          <a:xfrm>
+            <a:off x="4462272" y="804672"/>
+            <a:ext cx="27432" cy="4133088"/>
+          </a:xfrm>
+          <a:prstGeom prst="rect">
+            <a:avLst/>
+          </a:prstGeom>
+          <a:solidFill>
+            <a:srgbClr val="334155"/>
+          </a:solidFill>
+          <a:ln w="12700">
+            <a:solidFill>
+              <a:srgbClr val="334155"/>
+            </a:solidFill>
+            <a:prstDash val="solid"/>
+          </a:ln>
+        </p:spPr>
+      </p:sp>
+      <p:sp>
+        <p:nvSpPr>
+          <p:cNvPr id="32" name="Shape 30"/>
+          <p:cNvSpPr/>
+          <p:nvPr/>
+        </p:nvSpPr>
+        <p:spPr>
+          <a:xfrm>
+            <a:off x="4663440" y="630105"/>
+            <a:ext cx="2926080" cy="246888"/>
+          </a:xfrm>
+          <a:prstGeom prst="rect">
+            <a:avLst/>
+          </a:prstGeom>
+          <a:solidFill>
+            <a:srgbClr val="F87171"/>
+          </a:solidFill>
+          <a:ln w="12700">
+            <a:solidFill>
+              <a:srgbClr val="F87171"/>
+            </a:solidFill>
+            <a:prstDash val="solid"/>
+          </a:ln>
+        </p:spPr>
+      </p:sp>
+      <p:sp>
+        <p:nvSpPr>
+          <p:cNvPr id="33" name="Text 31"/>
+          <p:cNvSpPr/>
+          <p:nvPr/>
+        </p:nvSpPr>
+        <p:spPr>
+          <a:xfrm>
+            <a:off x="4663440" y="630105"/>
+            <a:ext cx="2926080" cy="246888"/>
+          </a:xfrm>
+          <a:prstGeom prst="rect">
+            <a:avLst/>
+          </a:prstGeom>
+          <a:noFill/>
+          <a:ln/>
+        </p:spPr>
+        <p:txBody>
+          <a:bodyPr wrap="square" lIns="0" tIns="0" rIns="0" bIns="0" rtlCol="0" anchor="ctr"/>
+          <a:lstStyle/>
+          <a:p>
+            <a:pPr marL="0" indent="0" algn="ctr">
+              <a:buNone/>
+            </a:pPr>
+            <a:r>
+              <a:rPr lang="en-US" sz="850" b="1" dirty="0">
+                <a:solidFill>
+                  <a:srgbClr val="0F172A"/>
+                </a:solidFill>
+                <a:latin typeface="Calibri" pitchFamily="34" charset="0"/>
+                <a:ea typeface="Calibri" pitchFamily="34" charset="-122"/>
+                <a:cs typeface="Calibri" pitchFamily="34" charset="-120"/>
+              </a:rPr>
+              <a:t>ADDING  ·  REMOVING  ·  TESTING</a:t>
+            </a:r>
+            <a:endParaRPr lang="en-US" sz="850" dirty="0"/>
+          </a:p>
+        </p:txBody>
+      </p:sp>
+      <p:graphicFrame>
+        <p:nvGraphicFramePr>
+          <p:cNvPr id="34" name="Table 0"/>
+          <p:cNvGraphicFramePr>
+            <a:graphicFrameLocks noGrp="1"/>
+          </p:cNvGraphicFramePr>
+          <p:nvPr>
+            <p:extLst>
+              <p:ext uri="{D42A27DB-BD31-4B8C-83A1-F6EECF244321}">
+                <p14:modId xmlns:p14="http://schemas.microsoft.com/office/powerpoint/2010/main" val="1893872006"/>
+              </p:ext>
+            </p:extLst>
+          </p:nvPr>
+        </p:nvGraphicFramePr>
+        <p:xfrm>
+          <a:off x="4663440" y="931857"/>
+          <a:ext cx="4224528" cy="3275945"/>
+        </p:xfrm>
+        <a:graphic>
+          <a:graphicData uri="http://schemas.openxmlformats.org/drawingml/2006/table">
+            <a:tbl>
+              <a:tblPr/>
+              <a:tblGrid>
+                <a:gridCol w="1828800">
+                  <a:extLst>
+                    <a:ext uri="{9D8B030D-6E8A-4147-A177-3AD203B41FA5}">
+                      <a16:colId xmlns:a16="http://schemas.microsoft.com/office/drawing/2014/main" val="20000"/>
+                    </a:ext>
+                  </a:extLst>
+                </a:gridCol>
+                <a:gridCol w="2395728">
+                  <a:extLst>
+                    <a:ext uri="{9D8B030D-6E8A-4147-A177-3AD203B41FA5}">
+                      <a16:colId xmlns:a16="http://schemas.microsoft.com/office/drawing/2014/main" val="20001"/>
+                    </a:ext>
+                  </a:extLst>
+                </a:gridCol>
+              </a:tblGrid>
+              <a:tr h="233825">
+                <a:tc>
+                  <a:txBody>
+                    <a:bodyPr/>
+                    <a:lstStyle/>
+                    <a:p>
+                      <a:pPr marL="0" indent="0">
+                        <a:buNone/>
+                      </a:pPr>
+                      <a:r>
+                        <a:rPr lang="en-US" sz="950" b="1" dirty="0">
+                          <a:solidFill>
+                            <a:srgbClr val="F1F5F9"/>
+                          </a:solidFill>
+                        </a:rPr>
+                        <a:t>Method / Operation</a:t>
+                      </a:r>
+                      <a:endParaRPr lang="en-US" sz="950" dirty="0"/>
+                    </a:p>
+                  </a:txBody>
+                  <a:tcPr>
+                    <a:lnL w="12700" cap="flat" cmpd="sng" algn="ctr">
+                      <a:solidFill>
+                        <a:srgbClr val="334155"/>
+                      </a:solidFill>
+                      <a:prstDash val="solid"/>
+                      <a:round/>
+                      <a:headEnd type="none" w="med" len="med"/>
+                      <a:tailEnd type="none" w="med" len="med"/>
+                    </a:lnL>
+                    <a:lnR w="12700" cap="flat" cmpd="sng" algn="ctr">
+                      <a:solidFill>
+                        <a:srgbClr val="334155"/>
+                      </a:solidFill>
+                      <a:prstDash val="solid"/>
+                      <a:round/>
+                      <a:headEnd type="none" w="med" len="med"/>
+                      <a:tailEnd type="none" w="med" len="med"/>
+                    </a:lnR>
+                    <a:lnT w="12700" cap="flat" cmpd="sng" algn="ctr">
+                      <a:solidFill>
+                        <a:srgbClr val="334155"/>
+                      </a:solidFill>
+                      <a:prstDash val="solid"/>
+                      <a:round/>
+                      <a:headEnd type="none" w="med" len="med"/>
+                      <a:tailEnd type="none" w="med" len="med"/>
+                    </a:lnT>
+                    <a:lnB w="12700" cap="flat" cmpd="sng" algn="ctr">
+                      <a:solidFill>
+                        <a:srgbClr val="334155"/>
+                      </a:solidFill>
+                      <a:prstDash val="solid"/>
+                      <a:round/>
+                      <a:headEnd type="none" w="med" len="med"/>
+                      <a:tailEnd type="none" w="med" len="med"/>
+                    </a:lnB>
+                    <a:solidFill>
+                      <a:srgbClr val="0A1628"/>
+                    </a:solidFill>
+                  </a:tcPr>
+                </a:tc>
+                <a:tc>
+                  <a:txBody>
+                    <a:bodyPr/>
+                    <a:lstStyle/>
+                    <a:p>
+                      <a:pPr marL="0" indent="0">
+                        <a:buNone/>
+                      </a:pPr>
+                      <a:r>
+                        <a:rPr lang="en-US" sz="950" b="1" dirty="0">
+                          <a:solidFill>
+                            <a:srgbClr val="F1F5F9"/>
+                          </a:solidFill>
+                        </a:rPr>
+                        <a:t>What it does</a:t>
+                      </a:r>
+                      <a:endParaRPr lang="en-US" sz="950" dirty="0"/>
+                    </a:p>
+                  </a:txBody>
+                  <a:tcPr>
+                    <a:lnL w="12700" cap="flat" cmpd="sng" algn="ctr">
+                      <a:solidFill>
+                        <a:srgbClr val="334155"/>
+                      </a:solidFill>
+                      <a:prstDash val="solid"/>
+                      <a:round/>
+                      <a:headEnd type="none" w="med" len="med"/>
+                      <a:tailEnd type="none" w="med" len="med"/>
+                    </a:lnL>
+                    <a:lnR w="12700" cap="flat" cmpd="sng" algn="ctr">
+                      <a:solidFill>
+                        <a:srgbClr val="334155"/>
+                      </a:solidFill>
+                      <a:prstDash val="solid"/>
+                      <a:round/>
+                      <a:headEnd type="none" w="med" len="med"/>
+                      <a:tailEnd type="none" w="med" len="med"/>
+                    </a:lnR>
+                    <a:lnT w="12700" cap="flat" cmpd="sng" algn="ctr">
+                      <a:solidFill>
+                        <a:srgbClr val="334155"/>
+                      </a:solidFill>
+                      <a:prstDash val="solid"/>
+                      <a:round/>
+                      <a:headEnd type="none" w="med" len="med"/>
+                      <a:tailEnd type="none" w="med" len="med"/>
+                    </a:lnT>
+                    <a:lnB w="12700" cap="flat" cmpd="sng" algn="ctr">
+                      <a:solidFill>
+                        <a:srgbClr val="334155"/>
+                      </a:solidFill>
+                      <a:prstDash val="solid"/>
+                      <a:round/>
+                      <a:headEnd type="none" w="med" len="med"/>
+                      <a:tailEnd type="none" w="med" len="med"/>
+                    </a:lnB>
+                    <a:solidFill>
+                      <a:srgbClr val="0A1628"/>
+                    </a:solidFill>
+                  </a:tcPr>
+                </a:tc>
+                <a:extLst>
+                  <a:ext uri="{0D108BD9-81ED-4DB2-BD59-A6C34878D82A}">
+                    <a16:rowId xmlns:a16="http://schemas.microsoft.com/office/drawing/2014/main" val="10000"/>
+                  </a:ext>
+                </a:extLst>
+              </a:tr>
+              <a:tr h="233825">
+                <a:tc>
+                  <a:txBody>
+                    <a:bodyPr/>
+                    <a:lstStyle/>
+                    <a:p>
+                      <a:pPr marL="0" indent="0">
+                        <a:buNone/>
+                      </a:pPr>
+                      <a:r>
+                        <a:rPr lang="en-US" sz="900" dirty="0">
+                          <a:solidFill>
+                            <a:srgbClr val="F87171"/>
+                          </a:solidFill>
+                          <a:latin typeface="Consolas" pitchFamily="34" charset="0"/>
+                          <a:ea typeface="Consolas" pitchFamily="34" charset="-122"/>
+                          <a:cs typeface="Consolas" pitchFamily="34" charset="-120"/>
+                        </a:rPr>
+                        <a:t>add(x)</a:t>
+                      </a:r>
+                      <a:endParaRPr lang="en-US" sz="900" dirty="0">
+                        <a:latin typeface="Consolas" charset="0"/>
+                        <a:ea typeface="Consolas" charset="0"/>
+                        <a:cs typeface="Consolas" charset="0"/>
+                      </a:endParaRPr>
+                    </a:p>
+                  </a:txBody>
+                  <a:tcPr>
+                    <a:lnL w="12700" cap="flat" cmpd="sng" algn="ctr">
+                      <a:solidFill>
+                        <a:srgbClr val="334155"/>
+                      </a:solidFill>
+                      <a:prstDash val="solid"/>
+                      <a:round/>
+                      <a:headEnd type="none" w="med" len="med"/>
+                      <a:tailEnd type="none" w="med" len="med"/>
+                    </a:lnL>
+                    <a:lnR w="12700" cap="flat" cmpd="sng" algn="ctr">
+                      <a:solidFill>
+                        <a:srgbClr val="334155"/>
+                      </a:solidFill>
+                      <a:prstDash val="solid"/>
+                      <a:round/>
+                      <a:headEnd type="none" w="med" len="med"/>
+                      <a:tailEnd type="none" w="med" len="med"/>
+                    </a:lnR>
+                    <a:lnT w="12700" cap="flat" cmpd="sng" algn="ctr">
+                      <a:solidFill>
+                        <a:srgbClr val="334155"/>
+                      </a:solidFill>
+                      <a:prstDash val="solid"/>
+                      <a:round/>
+                      <a:headEnd type="none" w="med" len="med"/>
+                      <a:tailEnd type="none" w="med" len="med"/>
+                    </a:lnT>
+                    <a:lnB w="12700" cap="flat" cmpd="sng" algn="ctr">
+                      <a:solidFill>
+                        <a:srgbClr val="334155"/>
+                      </a:solidFill>
+                      <a:prstDash val="solid"/>
+                      <a:round/>
+                      <a:headEnd type="none" w="med" len="med"/>
+                      <a:tailEnd type="none" w="med" len="med"/>
+                    </a:lnB>
+                    <a:solidFill>
+                      <a:srgbClr val="1E293B"/>
+                    </a:solidFill>
+                  </a:tcPr>
+                </a:tc>
+                <a:tc>
+                  <a:txBody>
+                    <a:bodyPr/>
+                    <a:lstStyle/>
+                    <a:p>
+                      <a:pPr marL="0" indent="0">
+                        <a:buNone/>
+                      </a:pPr>
+                      <a:r>
+                        <a:rPr lang="en-US" sz="900" dirty="0">
+                          <a:solidFill>
+                            <a:srgbClr val="CBD5E1"/>
+                          </a:solidFill>
+                        </a:rPr>
+                        <a:t>Add element x; ignored if already present</a:t>
+                      </a:r>
+                      <a:endParaRPr lang="en-US" sz="900" dirty="0"/>
+                    </a:p>
+                  </a:txBody>
+                  <a:tcPr>
+                    <a:lnL w="12700" cap="flat" cmpd="sng" algn="ctr">
+                      <a:solidFill>
+                        <a:srgbClr val="334155"/>
+                      </a:solidFill>
+                      <a:prstDash val="solid"/>
+                      <a:round/>
+                      <a:headEnd type="none" w="med" len="med"/>
+                      <a:tailEnd type="none" w="med" len="med"/>
+                    </a:lnL>
+                    <a:lnR w="12700" cap="flat" cmpd="sng" algn="ctr">
+                      <a:solidFill>
+                        <a:srgbClr val="334155"/>
+                      </a:solidFill>
+                      <a:prstDash val="solid"/>
+                      <a:round/>
+                      <a:headEnd type="none" w="med" len="med"/>
+                      <a:tailEnd type="none" w="med" len="med"/>
+                    </a:lnR>
+                    <a:lnT w="12700" cap="flat" cmpd="sng" algn="ctr">
+                      <a:solidFill>
+                        <a:srgbClr val="334155"/>
+                      </a:solidFill>
+                      <a:prstDash val="solid"/>
+                      <a:round/>
+                      <a:headEnd type="none" w="med" len="med"/>
+                      <a:tailEnd type="none" w="med" len="med"/>
+                    </a:lnT>
+                    <a:lnB w="12700" cap="flat" cmpd="sng" algn="ctr">
+                      <a:solidFill>
+                        <a:srgbClr val="334155"/>
+                      </a:solidFill>
+                      <a:prstDash val="solid"/>
+                      <a:round/>
+                      <a:headEnd type="none" w="med" len="med"/>
+                      <a:tailEnd type="none" w="med" len="med"/>
+                    </a:lnB>
+                    <a:solidFill>
+                      <a:srgbClr val="1E293B"/>
+                    </a:solidFill>
+                  </a:tcPr>
+                </a:tc>
+                <a:extLst>
+                  <a:ext uri="{0D108BD9-81ED-4DB2-BD59-A6C34878D82A}">
+                    <a16:rowId xmlns:a16="http://schemas.microsoft.com/office/drawing/2014/main" val="10001"/>
+                  </a:ext>
+                </a:extLst>
+              </a:tr>
+              <a:tr h="233825">
+                <a:tc>
+                  <a:txBody>
+                    <a:bodyPr/>
+                    <a:lstStyle/>
+                    <a:p>
+                      <a:pPr marL="0" indent="0">
+                        <a:buNone/>
+                      </a:pPr>
+                      <a:r>
+                        <a:rPr lang="en-US" sz="900" dirty="0">
+                          <a:solidFill>
+                            <a:srgbClr val="F87171"/>
+                          </a:solidFill>
+                          <a:latin typeface="Consolas" pitchFamily="34" charset="0"/>
+                          <a:ea typeface="Consolas" pitchFamily="34" charset="-122"/>
+                          <a:cs typeface="Consolas" pitchFamily="34" charset="-120"/>
+                        </a:rPr>
+                        <a:t>remove(x)</a:t>
+                      </a:r>
+                      <a:endParaRPr lang="en-US" sz="900" dirty="0">
+                        <a:latin typeface="Consolas" charset="0"/>
+                        <a:ea typeface="Consolas" charset="0"/>
+                        <a:cs typeface="Consolas" charset="0"/>
+                      </a:endParaRPr>
+                    </a:p>
+                  </a:txBody>
+                  <a:tcPr>
+                    <a:lnL w="12700" cap="flat" cmpd="sng" algn="ctr">
+                      <a:solidFill>
+                        <a:srgbClr val="334155"/>
+                      </a:solidFill>
+                      <a:prstDash val="solid"/>
+                      <a:round/>
+                      <a:headEnd type="none" w="med" len="med"/>
+                      <a:tailEnd type="none" w="med" len="med"/>
+                    </a:lnL>
+                    <a:lnR w="12700" cap="flat" cmpd="sng" algn="ctr">
+                      <a:solidFill>
+                        <a:srgbClr val="334155"/>
+                      </a:solidFill>
+                      <a:prstDash val="solid"/>
+                      <a:round/>
+                      <a:headEnd type="none" w="med" len="med"/>
+                      <a:tailEnd type="none" w="med" len="med"/>
+                    </a:lnR>
+                    <a:lnT w="12700" cap="flat" cmpd="sng" algn="ctr">
+                      <a:solidFill>
+                        <a:srgbClr val="334155"/>
+                      </a:solidFill>
+                      <a:prstDash val="solid"/>
+                      <a:round/>
+                      <a:headEnd type="none" w="med" len="med"/>
+                      <a:tailEnd type="none" w="med" len="med"/>
+                    </a:lnT>
+                    <a:lnB w="12700" cap="flat" cmpd="sng" algn="ctr">
+                      <a:solidFill>
+                        <a:srgbClr val="334155"/>
+                      </a:solidFill>
+                      <a:prstDash val="solid"/>
+                      <a:round/>
+                      <a:headEnd type="none" w="med" len="med"/>
+                      <a:tailEnd type="none" w="med" len="med"/>
+                    </a:lnB>
+                    <a:solidFill>
+                      <a:srgbClr val="162032"/>
+                    </a:solidFill>
+                  </a:tcPr>
+                </a:tc>
+                <a:tc>
+                  <a:txBody>
+                    <a:bodyPr/>
+                    <a:lstStyle/>
+                    <a:p>
+                      <a:pPr marL="0" indent="0">
+                        <a:buNone/>
+                      </a:pPr>
+                      <a:r>
+                        <a:rPr lang="en-US" sz="900" dirty="0">
+                          <a:solidFill>
+                            <a:srgbClr val="CBD5E1"/>
+                          </a:solidFill>
+                        </a:rPr>
+                        <a:t>Remove x; raises KeyError if not found</a:t>
+                      </a:r>
+                      <a:endParaRPr lang="en-US" sz="900" dirty="0"/>
+                    </a:p>
+                  </a:txBody>
+                  <a:tcPr>
+                    <a:lnL w="12700" cap="flat" cmpd="sng" algn="ctr">
+                      <a:solidFill>
+                        <a:srgbClr val="334155"/>
+                      </a:solidFill>
+                      <a:prstDash val="solid"/>
+                      <a:round/>
+                      <a:headEnd type="none" w="med" len="med"/>
+                      <a:tailEnd type="none" w="med" len="med"/>
+                    </a:lnL>
+                    <a:lnR w="12700" cap="flat" cmpd="sng" algn="ctr">
+                      <a:solidFill>
+                        <a:srgbClr val="334155"/>
+                      </a:solidFill>
+                      <a:prstDash val="solid"/>
+                      <a:round/>
+                      <a:headEnd type="none" w="med" len="med"/>
+                      <a:tailEnd type="none" w="med" len="med"/>
+                    </a:lnR>
+                    <a:lnT w="12700" cap="flat" cmpd="sng" algn="ctr">
+                      <a:solidFill>
+                        <a:srgbClr val="334155"/>
+                      </a:solidFill>
+                      <a:prstDash val="solid"/>
+                      <a:round/>
+                      <a:headEnd type="none" w="med" len="med"/>
+                      <a:tailEnd type="none" w="med" len="med"/>
+                    </a:lnT>
+                    <a:lnB w="12700" cap="flat" cmpd="sng" algn="ctr">
+                      <a:solidFill>
+                        <a:srgbClr val="334155"/>
+                      </a:solidFill>
+                      <a:prstDash val="solid"/>
+                      <a:round/>
+                      <a:headEnd type="none" w="med" len="med"/>
+                      <a:tailEnd type="none" w="med" len="med"/>
+                    </a:lnB>
+                    <a:solidFill>
+                      <a:srgbClr val="162032"/>
+                    </a:solidFill>
+                  </a:tcPr>
+                </a:tc>
+                <a:extLst>
+                  <a:ext uri="{0D108BD9-81ED-4DB2-BD59-A6C34878D82A}">
+                    <a16:rowId xmlns:a16="http://schemas.microsoft.com/office/drawing/2014/main" val="10002"/>
+                  </a:ext>
+                </a:extLst>
+              </a:tr>
+              <a:tr h="233825">
+                <a:tc>
+                  <a:txBody>
+                    <a:bodyPr/>
+                    <a:lstStyle/>
+                    <a:p>
+                      <a:pPr marL="0" indent="0">
+                        <a:buNone/>
+                      </a:pPr>
+                      <a:r>
+                        <a:rPr lang="en-US" sz="900" dirty="0">
+                          <a:solidFill>
+                            <a:srgbClr val="F87171"/>
+                          </a:solidFill>
+                          <a:latin typeface="Consolas" pitchFamily="34" charset="0"/>
+                          <a:ea typeface="Consolas" pitchFamily="34" charset="-122"/>
+                          <a:cs typeface="Consolas" pitchFamily="34" charset="-120"/>
+                        </a:rPr>
+                        <a:t>discard(x)</a:t>
+                      </a:r>
+                      <a:endParaRPr lang="en-US" sz="900" dirty="0">
+                        <a:latin typeface="Consolas" charset="0"/>
+                        <a:ea typeface="Consolas" charset="0"/>
+                        <a:cs typeface="Consolas" charset="0"/>
+                      </a:endParaRPr>
+                    </a:p>
+                  </a:txBody>
+                  <a:tcPr>
+                    <a:lnL w="12700" cap="flat" cmpd="sng" algn="ctr">
+                      <a:solidFill>
+                        <a:srgbClr val="334155"/>
+                      </a:solidFill>
+                      <a:prstDash val="solid"/>
+                      <a:round/>
+                      <a:headEnd type="none" w="med" len="med"/>
+                      <a:tailEnd type="none" w="med" len="med"/>
+                    </a:lnL>
+                    <a:lnR w="12700" cap="flat" cmpd="sng" algn="ctr">
+                      <a:solidFill>
+                        <a:srgbClr val="334155"/>
+                      </a:solidFill>
+                      <a:prstDash val="solid"/>
+                      <a:round/>
+                      <a:headEnd type="none" w="med" len="med"/>
+                      <a:tailEnd type="none" w="med" len="med"/>
+                    </a:lnR>
+                    <a:lnT w="12700" cap="flat" cmpd="sng" algn="ctr">
+                      <a:solidFill>
+                        <a:srgbClr val="334155"/>
+                      </a:solidFill>
+                      <a:prstDash val="solid"/>
+                      <a:round/>
+                      <a:headEnd type="none" w="med" len="med"/>
+                      <a:tailEnd type="none" w="med" len="med"/>
+                    </a:lnT>
+                    <a:lnB w="12700" cap="flat" cmpd="sng" algn="ctr">
+                      <a:solidFill>
+                        <a:srgbClr val="334155"/>
+                      </a:solidFill>
+                      <a:prstDash val="solid"/>
+                      <a:round/>
+                      <a:headEnd type="none" w="med" len="med"/>
+                      <a:tailEnd type="none" w="med" len="med"/>
+                    </a:lnB>
+                    <a:solidFill>
+                      <a:srgbClr val="1E293B"/>
+                    </a:solidFill>
+                  </a:tcPr>
+                </a:tc>
+                <a:tc>
+                  <a:txBody>
+                    <a:bodyPr/>
+                    <a:lstStyle/>
+                    <a:p>
+                      <a:pPr marL="0" indent="0">
+                        <a:buNone/>
+                      </a:pPr>
+                      <a:r>
+                        <a:rPr lang="en-US" sz="900" dirty="0">
+                          <a:solidFill>
+                            <a:srgbClr val="CBD5E1"/>
+                          </a:solidFill>
+                        </a:rPr>
+                        <a:t>Remove x safely; NO error if x is absent</a:t>
+                      </a:r>
+                      <a:endParaRPr lang="en-US" sz="900" dirty="0"/>
+                    </a:p>
+                  </a:txBody>
+                  <a:tcPr>
+                    <a:lnL w="12700" cap="flat" cmpd="sng" algn="ctr">
+                      <a:solidFill>
+                        <a:srgbClr val="334155"/>
+                      </a:solidFill>
+                      <a:prstDash val="solid"/>
+                      <a:round/>
+                      <a:headEnd type="none" w="med" len="med"/>
+                      <a:tailEnd type="none" w="med" len="med"/>
+                    </a:lnL>
+                    <a:lnR w="12700" cap="flat" cmpd="sng" algn="ctr">
+                      <a:solidFill>
+                        <a:srgbClr val="334155"/>
+                      </a:solidFill>
+                      <a:prstDash val="solid"/>
+                      <a:round/>
+                      <a:headEnd type="none" w="med" len="med"/>
+                      <a:tailEnd type="none" w="med" len="med"/>
+                    </a:lnR>
+                    <a:lnT w="12700" cap="flat" cmpd="sng" algn="ctr">
+                      <a:solidFill>
+                        <a:srgbClr val="334155"/>
+                      </a:solidFill>
+                      <a:prstDash val="solid"/>
+                      <a:round/>
+                      <a:headEnd type="none" w="med" len="med"/>
+                      <a:tailEnd type="none" w="med" len="med"/>
+                    </a:lnT>
+                    <a:lnB w="12700" cap="flat" cmpd="sng" algn="ctr">
+                      <a:solidFill>
+                        <a:srgbClr val="334155"/>
+                      </a:solidFill>
+                      <a:prstDash val="solid"/>
+                      <a:round/>
+                      <a:headEnd type="none" w="med" len="med"/>
+                      <a:tailEnd type="none" w="med" len="med"/>
+                    </a:lnB>
+                    <a:solidFill>
+                      <a:srgbClr val="1E293B"/>
+                    </a:solidFill>
+                  </a:tcPr>
+                </a:tc>
+                <a:extLst>
+                  <a:ext uri="{0D108BD9-81ED-4DB2-BD59-A6C34878D82A}">
+                    <a16:rowId xmlns:a16="http://schemas.microsoft.com/office/drawing/2014/main" val="10003"/>
+                  </a:ext>
+                </a:extLst>
+              </a:tr>
+              <a:tr h="233825">
+                <a:tc>
+                  <a:txBody>
+                    <a:bodyPr/>
+                    <a:lstStyle/>
+                    <a:p>
+                      <a:pPr marL="0" indent="0">
+                        <a:buNone/>
+                      </a:pPr>
+                      <a:r>
+                        <a:rPr lang="en-US" sz="900" dirty="0">
+                          <a:solidFill>
+                            <a:srgbClr val="F87171"/>
+                          </a:solidFill>
+                          <a:latin typeface="Consolas" pitchFamily="34" charset="0"/>
+                          <a:ea typeface="Consolas" pitchFamily="34" charset="-122"/>
+                          <a:cs typeface="Consolas" pitchFamily="34" charset="-120"/>
+                        </a:rPr>
+                        <a:t>pop()</a:t>
+                      </a:r>
+                      <a:endParaRPr lang="en-US" sz="900" dirty="0">
+                        <a:latin typeface="Consolas" charset="0"/>
+                        <a:ea typeface="Consolas" charset="0"/>
+                        <a:cs typeface="Consolas" charset="0"/>
+                      </a:endParaRPr>
+                    </a:p>
+                  </a:txBody>
+                  <a:tcPr>
+                    <a:lnL w="12700" cap="flat" cmpd="sng" algn="ctr">
+                      <a:solidFill>
+                        <a:srgbClr val="334155"/>
+                      </a:solidFill>
+                      <a:prstDash val="solid"/>
+                      <a:round/>
+                      <a:headEnd type="none" w="med" len="med"/>
+                      <a:tailEnd type="none" w="med" len="med"/>
+                    </a:lnL>
+                    <a:lnR w="12700" cap="flat" cmpd="sng" algn="ctr">
+                      <a:solidFill>
+                        <a:srgbClr val="334155"/>
+                      </a:solidFill>
+                      <a:prstDash val="solid"/>
+                      <a:round/>
+                      <a:headEnd type="none" w="med" len="med"/>
+                      <a:tailEnd type="none" w="med" len="med"/>
+                    </a:lnR>
+                    <a:lnT w="12700" cap="flat" cmpd="sng" algn="ctr">
+                      <a:solidFill>
+                        <a:srgbClr val="334155"/>
+                      </a:solidFill>
+                      <a:prstDash val="solid"/>
+                      <a:round/>
+                      <a:headEnd type="none" w="med" len="med"/>
+                      <a:tailEnd type="none" w="med" len="med"/>
+                    </a:lnT>
+                    <a:lnB w="12700" cap="flat" cmpd="sng" algn="ctr">
+                      <a:solidFill>
+                        <a:srgbClr val="334155"/>
+                      </a:solidFill>
+                      <a:prstDash val="solid"/>
+                      <a:round/>
+                      <a:headEnd type="none" w="med" len="med"/>
+                      <a:tailEnd type="none" w="med" len="med"/>
+                    </a:lnB>
+                    <a:solidFill>
+                      <a:srgbClr val="162032"/>
+                    </a:solidFill>
+                  </a:tcPr>
+                </a:tc>
+                <a:tc>
+                  <a:txBody>
+                    <a:bodyPr/>
+                    <a:lstStyle/>
+                    <a:p>
+                      <a:pPr marL="0" indent="0">
+                        <a:buNone/>
+                      </a:pPr>
+                      <a:r>
+                        <a:rPr lang="en-US" sz="900" dirty="0">
+                          <a:solidFill>
+                            <a:srgbClr val="CBD5E1"/>
+                          </a:solidFill>
+                        </a:rPr>
+                        <a:t>Remove &amp; return an arbitrary element</a:t>
+                      </a:r>
+                      <a:endParaRPr lang="en-US" sz="900" dirty="0"/>
+                    </a:p>
+                  </a:txBody>
+                  <a:tcPr>
+                    <a:lnL w="12700" cap="flat" cmpd="sng" algn="ctr">
+                      <a:solidFill>
+                        <a:srgbClr val="334155"/>
+                      </a:solidFill>
+                      <a:prstDash val="solid"/>
+                      <a:round/>
+                      <a:headEnd type="none" w="med" len="med"/>
+                      <a:tailEnd type="none" w="med" len="med"/>
+                    </a:lnL>
+                    <a:lnR w="12700" cap="flat" cmpd="sng" algn="ctr">
+                      <a:solidFill>
+                        <a:srgbClr val="334155"/>
+                      </a:solidFill>
+                      <a:prstDash val="solid"/>
+                      <a:round/>
+                      <a:headEnd type="none" w="med" len="med"/>
+                      <a:tailEnd type="none" w="med" len="med"/>
+                    </a:lnR>
+                    <a:lnT w="12700" cap="flat" cmpd="sng" algn="ctr">
+                      <a:solidFill>
+                        <a:srgbClr val="334155"/>
+                      </a:solidFill>
+                      <a:prstDash val="solid"/>
+                      <a:round/>
+                      <a:headEnd type="none" w="med" len="med"/>
+                      <a:tailEnd type="none" w="med" len="med"/>
+                    </a:lnT>
+                    <a:lnB w="12700" cap="flat" cmpd="sng" algn="ctr">
+                      <a:solidFill>
+                        <a:srgbClr val="334155"/>
+                      </a:solidFill>
+                      <a:prstDash val="solid"/>
+                      <a:round/>
+                      <a:headEnd type="none" w="med" len="med"/>
+                      <a:tailEnd type="none" w="med" len="med"/>
+                    </a:lnB>
+                    <a:solidFill>
+                      <a:srgbClr val="162032"/>
+                    </a:solidFill>
+                  </a:tcPr>
+                </a:tc>
+                <a:extLst>
+                  <a:ext uri="{0D108BD9-81ED-4DB2-BD59-A6C34878D82A}">
+                    <a16:rowId xmlns:a16="http://schemas.microsoft.com/office/drawing/2014/main" val="10004"/>
+                  </a:ext>
+                </a:extLst>
+              </a:tr>
+              <a:tr h="233825">
+                <a:tc>
+                  <a:txBody>
+                    <a:bodyPr/>
+                    <a:lstStyle/>
+                    <a:p>
+                      <a:pPr marL="0" indent="0">
+                        <a:buNone/>
+                      </a:pPr>
+                      <a:r>
+                        <a:rPr lang="en-US" sz="900" dirty="0">
+                          <a:solidFill>
+                            <a:srgbClr val="F87171"/>
+                          </a:solidFill>
+                          <a:latin typeface="Consolas" pitchFamily="34" charset="0"/>
+                          <a:ea typeface="Consolas" pitchFamily="34" charset="-122"/>
+                          <a:cs typeface="Consolas" pitchFamily="34" charset="-120"/>
+                        </a:rPr>
+                        <a:t>clear()</a:t>
+                      </a:r>
+                      <a:endParaRPr lang="en-US" sz="900" dirty="0">
+                        <a:latin typeface="Consolas" charset="0"/>
+                        <a:ea typeface="Consolas" charset="0"/>
+                        <a:cs typeface="Consolas" charset="0"/>
+                      </a:endParaRPr>
+                    </a:p>
+                  </a:txBody>
+                  <a:tcPr>
+                    <a:lnL w="12700" cap="flat" cmpd="sng" algn="ctr">
+                      <a:solidFill>
+                        <a:srgbClr val="334155"/>
+                      </a:solidFill>
+                      <a:prstDash val="solid"/>
+                      <a:round/>
+                      <a:headEnd type="none" w="med" len="med"/>
+                      <a:tailEnd type="none" w="med" len="med"/>
+                    </a:lnL>
+                    <a:lnR w="12700" cap="flat" cmpd="sng" algn="ctr">
+                      <a:solidFill>
+                        <a:srgbClr val="334155"/>
+                      </a:solidFill>
+                      <a:prstDash val="solid"/>
+                      <a:round/>
+                      <a:headEnd type="none" w="med" len="med"/>
+                      <a:tailEnd type="none" w="med" len="med"/>
+                    </a:lnR>
+                    <a:lnT w="12700" cap="flat" cmpd="sng" algn="ctr">
+                      <a:solidFill>
+                        <a:srgbClr val="334155"/>
+                      </a:solidFill>
+                      <a:prstDash val="solid"/>
+                      <a:round/>
+                      <a:headEnd type="none" w="med" len="med"/>
+                      <a:tailEnd type="none" w="med" len="med"/>
+                    </a:lnT>
+                    <a:lnB w="12700" cap="flat" cmpd="sng" algn="ctr">
+                      <a:solidFill>
+                        <a:srgbClr val="334155"/>
+                      </a:solidFill>
+                      <a:prstDash val="solid"/>
+                      <a:round/>
+                      <a:headEnd type="none" w="med" len="med"/>
+                      <a:tailEnd type="none" w="med" len="med"/>
+                    </a:lnB>
+                    <a:solidFill>
+                      <a:srgbClr val="1E293B"/>
+                    </a:solidFill>
+                  </a:tcPr>
+                </a:tc>
+                <a:tc>
+                  <a:txBody>
+                    <a:bodyPr/>
+                    <a:lstStyle/>
+                    <a:p>
+                      <a:pPr marL="0" indent="0">
+                        <a:buNone/>
+                      </a:pPr>
+                      <a:r>
+                        <a:rPr lang="en-US" sz="900" dirty="0">
+                          <a:solidFill>
+                            <a:srgbClr val="CBD5E1"/>
+                          </a:solidFill>
+                        </a:rPr>
+                        <a:t>Remove ALL elements — set becomes empty</a:t>
+                      </a:r>
+                      <a:endParaRPr lang="en-US" sz="900" dirty="0"/>
+                    </a:p>
+                  </a:txBody>
+                  <a:tcPr>
+                    <a:lnL w="12700" cap="flat" cmpd="sng" algn="ctr">
+                      <a:solidFill>
+                        <a:srgbClr val="334155"/>
+                      </a:solidFill>
+                      <a:prstDash val="solid"/>
+                      <a:round/>
+                      <a:headEnd type="none" w="med" len="med"/>
+                      <a:tailEnd type="none" w="med" len="med"/>
+                    </a:lnL>
+                    <a:lnR w="12700" cap="flat" cmpd="sng" algn="ctr">
+                      <a:solidFill>
+                        <a:srgbClr val="334155"/>
+                      </a:solidFill>
+                      <a:prstDash val="solid"/>
+                      <a:round/>
+                      <a:headEnd type="none" w="med" len="med"/>
+                      <a:tailEnd type="none" w="med" len="med"/>
+                    </a:lnR>
+                    <a:lnT w="12700" cap="flat" cmpd="sng" algn="ctr">
+                      <a:solidFill>
+                        <a:srgbClr val="334155"/>
+                      </a:solidFill>
+                      <a:prstDash val="solid"/>
+                      <a:round/>
+                      <a:headEnd type="none" w="med" len="med"/>
+                      <a:tailEnd type="none" w="med" len="med"/>
+                    </a:lnT>
+                    <a:lnB w="12700" cap="flat" cmpd="sng" algn="ctr">
+                      <a:solidFill>
+                        <a:srgbClr val="334155"/>
+                      </a:solidFill>
+                      <a:prstDash val="solid"/>
+                      <a:round/>
+                      <a:headEnd type="none" w="med" len="med"/>
+                      <a:tailEnd type="none" w="med" len="med"/>
+                    </a:lnB>
+                    <a:solidFill>
+                      <a:srgbClr val="1E293B"/>
+                    </a:solidFill>
+                  </a:tcPr>
+                </a:tc>
+                <a:extLst>
+                  <a:ext uri="{0D108BD9-81ED-4DB2-BD59-A6C34878D82A}">
+                    <a16:rowId xmlns:a16="http://schemas.microsoft.com/office/drawing/2014/main" val="10005"/>
+                  </a:ext>
+                </a:extLst>
+              </a:tr>
+              <a:tr h="233825">
+                <a:tc>
+                  <a:txBody>
+                    <a:bodyPr/>
+                    <a:lstStyle/>
+                    <a:p>
+                      <a:pPr marL="0" indent="0">
+                        <a:buNone/>
+                      </a:pPr>
+                      <a:r>
+                        <a:rPr lang="en-US" sz="900" dirty="0">
+                          <a:solidFill>
+                            <a:srgbClr val="F87171"/>
+                          </a:solidFill>
+                          <a:latin typeface="Consolas" pitchFamily="34" charset="0"/>
+                          <a:ea typeface="Consolas" pitchFamily="34" charset="-122"/>
+                          <a:cs typeface="Consolas" pitchFamily="34" charset="-120"/>
+                        </a:rPr>
+                        <a:t>x in s</a:t>
+                      </a:r>
+                      <a:endParaRPr lang="en-US" sz="900" dirty="0">
+                        <a:latin typeface="Consolas" charset="0"/>
+                        <a:ea typeface="Consolas" charset="0"/>
+                        <a:cs typeface="Consolas" charset="0"/>
+                      </a:endParaRPr>
+                    </a:p>
+                  </a:txBody>
+                  <a:tcPr>
+                    <a:lnL w="12700" cap="flat" cmpd="sng" algn="ctr">
+                      <a:solidFill>
+                        <a:srgbClr val="334155"/>
+                      </a:solidFill>
+                      <a:prstDash val="solid"/>
+                      <a:round/>
+                      <a:headEnd type="none" w="med" len="med"/>
+                      <a:tailEnd type="none" w="med" len="med"/>
+                    </a:lnL>
+                    <a:lnR w="12700" cap="flat" cmpd="sng" algn="ctr">
+                      <a:solidFill>
+                        <a:srgbClr val="334155"/>
+                      </a:solidFill>
+                      <a:prstDash val="solid"/>
+                      <a:round/>
+                      <a:headEnd type="none" w="med" len="med"/>
+                      <a:tailEnd type="none" w="med" len="med"/>
+                    </a:lnR>
+                    <a:lnT w="12700" cap="flat" cmpd="sng" algn="ctr">
+                      <a:solidFill>
+                        <a:srgbClr val="334155"/>
+                      </a:solidFill>
+                      <a:prstDash val="solid"/>
+                      <a:round/>
+                      <a:headEnd type="none" w="med" len="med"/>
+                      <a:tailEnd type="none" w="med" len="med"/>
+                    </a:lnT>
+                    <a:lnB w="12700" cap="flat" cmpd="sng" algn="ctr">
+                      <a:solidFill>
+                        <a:srgbClr val="334155"/>
+                      </a:solidFill>
+                      <a:prstDash val="solid"/>
+                      <a:round/>
+                      <a:headEnd type="none" w="med" len="med"/>
+                      <a:tailEnd type="none" w="med" len="med"/>
+                    </a:lnB>
+                    <a:solidFill>
+                      <a:srgbClr val="162032"/>
+                    </a:solidFill>
+                  </a:tcPr>
+                </a:tc>
+                <a:tc>
+                  <a:txBody>
+                    <a:bodyPr/>
+                    <a:lstStyle/>
+                    <a:p>
+                      <a:pPr marL="0" indent="0">
+                        <a:buNone/>
+                      </a:pPr>
+                      <a:r>
+                        <a:rPr lang="en-US" sz="900" dirty="0">
+                          <a:solidFill>
+                            <a:srgbClr val="CBD5E1"/>
+                          </a:solidFill>
+                        </a:rPr>
+                        <a:t>True/False membership test — O(1) average</a:t>
+                      </a:r>
+                      <a:endParaRPr lang="en-US" sz="900" dirty="0"/>
+                    </a:p>
+                  </a:txBody>
+                  <a:tcPr>
+                    <a:lnL w="12700" cap="flat" cmpd="sng" algn="ctr">
+                      <a:solidFill>
+                        <a:srgbClr val="334155"/>
+                      </a:solidFill>
+                      <a:prstDash val="solid"/>
+                      <a:round/>
+                      <a:headEnd type="none" w="med" len="med"/>
+                      <a:tailEnd type="none" w="med" len="med"/>
+                    </a:lnL>
+                    <a:lnR w="12700" cap="flat" cmpd="sng" algn="ctr">
+                      <a:solidFill>
+                        <a:srgbClr val="334155"/>
+                      </a:solidFill>
+                      <a:prstDash val="solid"/>
+                      <a:round/>
+                      <a:headEnd type="none" w="med" len="med"/>
+                      <a:tailEnd type="none" w="med" len="med"/>
+                    </a:lnR>
+                    <a:lnT w="12700" cap="flat" cmpd="sng" algn="ctr">
+                      <a:solidFill>
+                        <a:srgbClr val="334155"/>
+                      </a:solidFill>
+                      <a:prstDash val="solid"/>
+                      <a:round/>
+                      <a:headEnd type="none" w="med" len="med"/>
+                      <a:tailEnd type="none" w="med" len="med"/>
+                    </a:lnT>
+                    <a:lnB w="12700" cap="flat" cmpd="sng" algn="ctr">
+                      <a:solidFill>
+                        <a:srgbClr val="334155"/>
+                      </a:solidFill>
+                      <a:prstDash val="solid"/>
+                      <a:round/>
+                      <a:headEnd type="none" w="med" len="med"/>
+                      <a:tailEnd type="none" w="med" len="med"/>
+                    </a:lnB>
+                    <a:solidFill>
+                      <a:srgbClr val="162032"/>
+                    </a:solidFill>
+                  </a:tcPr>
+                </a:tc>
+                <a:extLst>
+                  <a:ext uri="{0D108BD9-81ED-4DB2-BD59-A6C34878D82A}">
+                    <a16:rowId xmlns:a16="http://schemas.microsoft.com/office/drawing/2014/main" val="10006"/>
+                  </a:ext>
+                </a:extLst>
+              </a:tr>
+              <a:tr h="233825">
+                <a:tc>
+                  <a:txBody>
+                    <a:bodyPr/>
+                    <a:lstStyle/>
+                    <a:p>
+                      <a:pPr marL="0" indent="0">
+                        <a:buNone/>
+                      </a:pPr>
+                      <a:r>
+                        <a:rPr lang="en-US" sz="900" dirty="0">
+                          <a:solidFill>
+                            <a:srgbClr val="F87171"/>
+                          </a:solidFill>
+                          <a:latin typeface="Consolas" pitchFamily="34" charset="0"/>
+                          <a:ea typeface="Consolas" pitchFamily="34" charset="-122"/>
+                          <a:cs typeface="Consolas" pitchFamily="34" charset="-120"/>
+                        </a:rPr>
+                        <a:t>x not in s</a:t>
+                      </a:r>
+                      <a:endParaRPr lang="en-US" sz="900" dirty="0">
+                        <a:latin typeface="Consolas" charset="0"/>
+                        <a:ea typeface="Consolas" charset="0"/>
+                        <a:cs typeface="Consolas" charset="0"/>
+                      </a:endParaRPr>
+                    </a:p>
+                  </a:txBody>
+                  <a:tcPr>
+                    <a:lnL w="12700" cap="flat" cmpd="sng" algn="ctr">
+                      <a:solidFill>
+                        <a:srgbClr val="334155"/>
+                      </a:solidFill>
+                      <a:prstDash val="solid"/>
+                      <a:round/>
+                      <a:headEnd type="none" w="med" len="med"/>
+                      <a:tailEnd type="none" w="med" len="med"/>
+                    </a:lnL>
+                    <a:lnR w="12700" cap="flat" cmpd="sng" algn="ctr">
+                      <a:solidFill>
+                        <a:srgbClr val="334155"/>
+                      </a:solidFill>
+                      <a:prstDash val="solid"/>
+                      <a:round/>
+                      <a:headEnd type="none" w="med" len="med"/>
+                      <a:tailEnd type="none" w="med" len="med"/>
+                    </a:lnR>
+                    <a:lnT w="12700" cap="flat" cmpd="sng" algn="ctr">
+                      <a:solidFill>
+                        <a:srgbClr val="334155"/>
+                      </a:solidFill>
+                      <a:prstDash val="solid"/>
+                      <a:round/>
+                      <a:headEnd type="none" w="med" len="med"/>
+                      <a:tailEnd type="none" w="med" len="med"/>
+                    </a:lnT>
+                    <a:lnB w="12700" cap="flat" cmpd="sng" algn="ctr">
+                      <a:solidFill>
+                        <a:srgbClr val="334155"/>
+                      </a:solidFill>
+                      <a:prstDash val="solid"/>
+                      <a:round/>
+                      <a:headEnd type="none" w="med" len="med"/>
+                      <a:tailEnd type="none" w="med" len="med"/>
+                    </a:lnB>
+                    <a:solidFill>
+                      <a:srgbClr val="1E293B"/>
+                    </a:solidFill>
+                  </a:tcPr>
+                </a:tc>
+                <a:tc>
+                  <a:txBody>
+                    <a:bodyPr/>
+                    <a:lstStyle/>
+                    <a:p>
+                      <a:pPr marL="0" indent="0">
+                        <a:buNone/>
+                      </a:pPr>
+                      <a:r>
+                        <a:rPr lang="en-US" sz="900" dirty="0">
+                          <a:solidFill>
+                            <a:srgbClr val="CBD5E1"/>
+                          </a:solidFill>
+                        </a:rPr>
+                        <a:t>True if x is NOT a member of the set</a:t>
+                      </a:r>
+                      <a:endParaRPr lang="en-US" sz="900" dirty="0"/>
+                    </a:p>
+                  </a:txBody>
+                  <a:tcPr>
+                    <a:lnL w="12700" cap="flat" cmpd="sng" algn="ctr">
+                      <a:solidFill>
+                        <a:srgbClr val="334155"/>
+                      </a:solidFill>
+                      <a:prstDash val="solid"/>
+                      <a:round/>
+                      <a:headEnd type="none" w="med" len="med"/>
+                      <a:tailEnd type="none" w="med" len="med"/>
+                    </a:lnL>
+                    <a:lnR w="12700" cap="flat" cmpd="sng" algn="ctr">
+                      <a:solidFill>
+                        <a:srgbClr val="334155"/>
+                      </a:solidFill>
+                      <a:prstDash val="solid"/>
+                      <a:round/>
+                      <a:headEnd type="none" w="med" len="med"/>
+                      <a:tailEnd type="none" w="med" len="med"/>
+                    </a:lnR>
+                    <a:lnT w="12700" cap="flat" cmpd="sng" algn="ctr">
+                      <a:solidFill>
+                        <a:srgbClr val="334155"/>
+                      </a:solidFill>
+                      <a:prstDash val="solid"/>
+                      <a:round/>
+                      <a:headEnd type="none" w="med" len="med"/>
+                      <a:tailEnd type="none" w="med" len="med"/>
+                    </a:lnT>
+                    <a:lnB w="12700" cap="flat" cmpd="sng" algn="ctr">
+                      <a:solidFill>
+                        <a:srgbClr val="334155"/>
+                      </a:solidFill>
+                      <a:prstDash val="solid"/>
+                      <a:round/>
+                      <a:headEnd type="none" w="med" len="med"/>
+                      <a:tailEnd type="none" w="med" len="med"/>
+                    </a:lnB>
+                    <a:solidFill>
+                      <a:srgbClr val="1E293B"/>
+                    </a:solidFill>
+                  </a:tcPr>
+                </a:tc>
+                <a:extLst>
+                  <a:ext uri="{0D108BD9-81ED-4DB2-BD59-A6C34878D82A}">
+                    <a16:rowId xmlns:a16="http://schemas.microsoft.com/office/drawing/2014/main" val="10007"/>
+                  </a:ext>
+                </a:extLst>
+              </a:tr>
+              <a:tr h="233825">
+                <a:tc>
+                  <a:txBody>
+                    <a:bodyPr/>
+                    <a:lstStyle/>
+                    <a:p>
+                      <a:pPr marL="0" indent="0">
+                        <a:buNone/>
+                      </a:pPr>
+                      <a:r>
+                        <a:rPr lang="en-US" sz="900" dirty="0">
+                          <a:solidFill>
+                            <a:srgbClr val="F87171"/>
+                          </a:solidFill>
+                          <a:latin typeface="Consolas" pitchFamily="34" charset="0"/>
+                          <a:ea typeface="Consolas" pitchFamily="34" charset="-122"/>
+                          <a:cs typeface="Consolas" pitchFamily="34" charset="-120"/>
+                        </a:rPr>
+                        <a:t>len(s)</a:t>
+                      </a:r>
+                      <a:endParaRPr lang="en-US" sz="900" dirty="0">
+                        <a:latin typeface="Consolas" charset="0"/>
+                        <a:ea typeface="Consolas" charset="0"/>
+                        <a:cs typeface="Consolas" charset="0"/>
+                      </a:endParaRPr>
+                    </a:p>
+                  </a:txBody>
+                  <a:tcPr>
+                    <a:lnL w="12700" cap="flat" cmpd="sng" algn="ctr">
+                      <a:solidFill>
+                        <a:srgbClr val="334155"/>
+                      </a:solidFill>
+                      <a:prstDash val="solid"/>
+                      <a:round/>
+                      <a:headEnd type="none" w="med" len="med"/>
+                      <a:tailEnd type="none" w="med" len="med"/>
+                    </a:lnL>
+                    <a:lnR w="12700" cap="flat" cmpd="sng" algn="ctr">
+                      <a:solidFill>
+                        <a:srgbClr val="334155"/>
+                      </a:solidFill>
+                      <a:prstDash val="solid"/>
+                      <a:round/>
+                      <a:headEnd type="none" w="med" len="med"/>
+                      <a:tailEnd type="none" w="med" len="med"/>
+                    </a:lnR>
+                    <a:lnT w="12700" cap="flat" cmpd="sng" algn="ctr">
+                      <a:solidFill>
+                        <a:srgbClr val="334155"/>
+                      </a:solidFill>
+                      <a:prstDash val="solid"/>
+                      <a:round/>
+                      <a:headEnd type="none" w="med" len="med"/>
+                      <a:tailEnd type="none" w="med" len="med"/>
+                    </a:lnT>
+                    <a:lnB w="12700" cap="flat" cmpd="sng" algn="ctr">
+                      <a:solidFill>
+                        <a:srgbClr val="334155"/>
+                      </a:solidFill>
+                      <a:prstDash val="solid"/>
+                      <a:round/>
+                      <a:headEnd type="none" w="med" len="med"/>
+                      <a:tailEnd type="none" w="med" len="med"/>
+                    </a:lnB>
+                    <a:solidFill>
+                      <a:srgbClr val="162032"/>
+                    </a:solidFill>
+                  </a:tcPr>
+                </a:tc>
+                <a:tc>
+                  <a:txBody>
+                    <a:bodyPr/>
+                    <a:lstStyle/>
+                    <a:p>
+                      <a:pPr marL="0" indent="0">
+                        <a:buNone/>
+                      </a:pPr>
+                      <a:r>
+                        <a:rPr lang="en-US" sz="900" dirty="0">
+                          <a:solidFill>
+                            <a:srgbClr val="CBD5E1"/>
+                          </a:solidFill>
+                        </a:rPr>
+                        <a:t>Number of elements in the set</a:t>
+                      </a:r>
+                      <a:endParaRPr lang="en-US" sz="900" dirty="0"/>
+                    </a:p>
+                  </a:txBody>
+                  <a:tcPr>
+                    <a:lnL w="12700" cap="flat" cmpd="sng" algn="ctr">
+                      <a:solidFill>
+                        <a:srgbClr val="334155"/>
+                      </a:solidFill>
+                      <a:prstDash val="solid"/>
+                      <a:round/>
+                      <a:headEnd type="none" w="med" len="med"/>
+                      <a:tailEnd type="none" w="med" len="med"/>
+                    </a:lnL>
+                    <a:lnR w="12700" cap="flat" cmpd="sng" algn="ctr">
+                      <a:solidFill>
+                        <a:srgbClr val="334155"/>
+                      </a:solidFill>
+                      <a:prstDash val="solid"/>
+                      <a:round/>
+                      <a:headEnd type="none" w="med" len="med"/>
+                      <a:tailEnd type="none" w="med" len="med"/>
+                    </a:lnR>
+                    <a:lnT w="12700" cap="flat" cmpd="sng" algn="ctr">
+                      <a:solidFill>
+                        <a:srgbClr val="334155"/>
+                      </a:solidFill>
+                      <a:prstDash val="solid"/>
+                      <a:round/>
+                      <a:headEnd type="none" w="med" len="med"/>
+                      <a:tailEnd type="none" w="med" len="med"/>
+                    </a:lnT>
+                    <a:lnB w="12700" cap="flat" cmpd="sng" algn="ctr">
+                      <a:solidFill>
+                        <a:srgbClr val="334155"/>
+                      </a:solidFill>
+                      <a:prstDash val="solid"/>
+                      <a:round/>
+                      <a:headEnd type="none" w="med" len="med"/>
+                      <a:tailEnd type="none" w="med" len="med"/>
+                    </a:lnB>
+                    <a:solidFill>
+                      <a:srgbClr val="162032"/>
+                    </a:solidFill>
+                  </a:tcPr>
+                </a:tc>
+                <a:extLst>
+                  <a:ext uri="{0D108BD9-81ED-4DB2-BD59-A6C34878D82A}">
+                    <a16:rowId xmlns:a16="http://schemas.microsoft.com/office/drawing/2014/main" val="10008"/>
+                  </a:ext>
+                </a:extLst>
+              </a:tr>
+              <a:tr h="233825">
+                <a:tc>
+                  <a:txBody>
+                    <a:bodyPr/>
+                    <a:lstStyle/>
+                    <a:p>
+                      <a:pPr marL="0" indent="0">
+                        <a:buNone/>
+                      </a:pPr>
+                      <a:r>
+                        <a:rPr lang="en-US" sz="900" dirty="0">
+                          <a:solidFill>
+                            <a:srgbClr val="F87171"/>
+                          </a:solidFill>
+                          <a:latin typeface="Consolas" pitchFamily="34" charset="0"/>
+                          <a:ea typeface="Consolas" pitchFamily="34" charset="-122"/>
+                          <a:cs typeface="Consolas" pitchFamily="34" charset="-120"/>
+                        </a:rPr>
+                        <a:t>copy()</a:t>
+                      </a:r>
+                      <a:endParaRPr lang="en-US" sz="900" dirty="0">
+                        <a:latin typeface="Consolas" charset="0"/>
+                        <a:ea typeface="Consolas" charset="0"/>
+                        <a:cs typeface="Consolas" charset="0"/>
+                      </a:endParaRPr>
+                    </a:p>
+                  </a:txBody>
+                  <a:tcPr>
+                    <a:lnL w="12700" cap="flat" cmpd="sng" algn="ctr">
+                      <a:solidFill>
+                        <a:srgbClr val="334155"/>
+                      </a:solidFill>
+                      <a:prstDash val="solid"/>
+                      <a:round/>
+                      <a:headEnd type="none" w="med" len="med"/>
+                      <a:tailEnd type="none" w="med" len="med"/>
+                    </a:lnL>
+                    <a:lnR w="12700" cap="flat" cmpd="sng" algn="ctr">
+                      <a:solidFill>
+                        <a:srgbClr val="334155"/>
+                      </a:solidFill>
+                      <a:prstDash val="solid"/>
+                      <a:round/>
+                      <a:headEnd type="none" w="med" len="med"/>
+                      <a:tailEnd type="none" w="med" len="med"/>
+                    </a:lnR>
+                    <a:lnT w="12700" cap="flat" cmpd="sng" algn="ctr">
+                      <a:solidFill>
+                        <a:srgbClr val="334155"/>
+                      </a:solidFill>
+                      <a:prstDash val="solid"/>
+                      <a:round/>
+                      <a:headEnd type="none" w="med" len="med"/>
+                      <a:tailEnd type="none" w="med" len="med"/>
+                    </a:lnT>
+                    <a:lnB w="12700" cap="flat" cmpd="sng" algn="ctr">
+                      <a:solidFill>
+                        <a:srgbClr val="334155"/>
+                      </a:solidFill>
+                      <a:prstDash val="solid"/>
+                      <a:round/>
+                      <a:headEnd type="none" w="med" len="med"/>
+                      <a:tailEnd type="none" w="med" len="med"/>
+                    </a:lnB>
+                    <a:solidFill>
+                      <a:srgbClr val="1E293B"/>
+                    </a:solidFill>
+                  </a:tcPr>
+                </a:tc>
+                <a:tc>
+                  <a:txBody>
+                    <a:bodyPr/>
+                    <a:lstStyle/>
+                    <a:p>
+                      <a:pPr marL="0" indent="0">
+                        <a:buNone/>
+                      </a:pPr>
+                      <a:r>
+                        <a:rPr lang="en-US" sz="900" dirty="0">
+                          <a:solidFill>
+                            <a:srgbClr val="CBD5E1"/>
+                          </a:solidFill>
+                        </a:rPr>
+                        <a:t>Return a shallow copy of the set</a:t>
+                      </a:r>
+                      <a:endParaRPr lang="en-US" sz="900" dirty="0"/>
+                    </a:p>
+                  </a:txBody>
+                  <a:tcPr>
+                    <a:lnL w="12700" cap="flat" cmpd="sng" algn="ctr">
+                      <a:solidFill>
+                        <a:srgbClr val="334155"/>
+                      </a:solidFill>
+                      <a:prstDash val="solid"/>
+                      <a:round/>
+                      <a:headEnd type="none" w="med" len="med"/>
+                      <a:tailEnd type="none" w="med" len="med"/>
+                    </a:lnL>
+                    <a:lnR w="12700" cap="flat" cmpd="sng" algn="ctr">
+                      <a:solidFill>
+                        <a:srgbClr val="334155"/>
+                      </a:solidFill>
+                      <a:prstDash val="solid"/>
+                      <a:round/>
+                      <a:headEnd type="none" w="med" len="med"/>
+                      <a:tailEnd type="none" w="med" len="med"/>
+                    </a:lnR>
+                    <a:lnT w="12700" cap="flat" cmpd="sng" algn="ctr">
+                      <a:solidFill>
+                        <a:srgbClr val="334155"/>
+                      </a:solidFill>
+                      <a:prstDash val="solid"/>
+                      <a:round/>
+                      <a:headEnd type="none" w="med" len="med"/>
+                      <a:tailEnd type="none" w="med" len="med"/>
+                    </a:lnT>
+                    <a:lnB w="12700" cap="flat" cmpd="sng" algn="ctr">
+                      <a:solidFill>
+                        <a:srgbClr val="334155"/>
+                      </a:solidFill>
+                      <a:prstDash val="solid"/>
+                      <a:round/>
+                      <a:headEnd type="none" w="med" len="med"/>
+                      <a:tailEnd type="none" w="med" len="med"/>
+                    </a:lnB>
+                    <a:solidFill>
+                      <a:srgbClr val="1E293B"/>
+                    </a:solidFill>
+                  </a:tcPr>
+                </a:tc>
+                <a:extLst>
+                  <a:ext uri="{0D108BD9-81ED-4DB2-BD59-A6C34878D82A}">
+                    <a16:rowId xmlns:a16="http://schemas.microsoft.com/office/drawing/2014/main" val="10009"/>
+                  </a:ext>
+                </a:extLst>
+              </a:tr>
+              <a:tr h="233825">
+                <a:tc>
+                  <a:txBody>
+                    <a:bodyPr/>
+                    <a:lstStyle/>
+                    <a:p>
+                      <a:pPr marL="0" indent="0">
+                        <a:buNone/>
+                      </a:pPr>
+                      <a:r>
+                        <a:rPr lang="en-US" sz="900" dirty="0">
+                          <a:solidFill>
+                            <a:srgbClr val="F87171"/>
+                          </a:solidFill>
+                          <a:latin typeface="Consolas" pitchFamily="34" charset="0"/>
+                          <a:ea typeface="Consolas" pitchFamily="34" charset="-122"/>
+                          <a:cs typeface="Consolas" pitchFamily="34" charset="-120"/>
+                        </a:rPr>
+                        <a:t>update(iterable)</a:t>
+                      </a:r>
+                      <a:endParaRPr lang="en-US" sz="900" dirty="0">
+                        <a:latin typeface="Consolas" charset="0"/>
+                        <a:ea typeface="Consolas" charset="0"/>
+                        <a:cs typeface="Consolas" charset="0"/>
+                      </a:endParaRPr>
+                    </a:p>
+                  </a:txBody>
+                  <a:tcPr>
+                    <a:lnL w="12700" cap="flat" cmpd="sng" algn="ctr">
+                      <a:solidFill>
+                        <a:srgbClr val="334155"/>
+                      </a:solidFill>
+                      <a:prstDash val="solid"/>
+                      <a:round/>
+                      <a:headEnd type="none" w="med" len="med"/>
+                      <a:tailEnd type="none" w="med" len="med"/>
+                    </a:lnL>
+                    <a:lnR w="12700" cap="flat" cmpd="sng" algn="ctr">
+                      <a:solidFill>
+                        <a:srgbClr val="334155"/>
+                      </a:solidFill>
+                      <a:prstDash val="solid"/>
+                      <a:round/>
+                      <a:headEnd type="none" w="med" len="med"/>
+                      <a:tailEnd type="none" w="med" len="med"/>
+                    </a:lnR>
+                    <a:lnT w="12700" cap="flat" cmpd="sng" algn="ctr">
+                      <a:solidFill>
+                        <a:srgbClr val="334155"/>
+                      </a:solidFill>
+                      <a:prstDash val="solid"/>
+                      <a:round/>
+                      <a:headEnd type="none" w="med" len="med"/>
+                      <a:tailEnd type="none" w="med" len="med"/>
+                    </a:lnT>
+                    <a:lnB w="12700" cap="flat" cmpd="sng" algn="ctr">
+                      <a:solidFill>
+                        <a:srgbClr val="334155"/>
+                      </a:solidFill>
+                      <a:prstDash val="solid"/>
+                      <a:round/>
+                      <a:headEnd type="none" w="med" len="med"/>
+                      <a:tailEnd type="none" w="med" len="med"/>
+                    </a:lnB>
+                    <a:solidFill>
+                      <a:srgbClr val="162032"/>
+                    </a:solidFill>
+                  </a:tcPr>
+                </a:tc>
+                <a:tc>
+                  <a:txBody>
+                    <a:bodyPr/>
+                    <a:lstStyle/>
+                    <a:p>
+                      <a:pPr marL="0" indent="0">
+                        <a:buNone/>
+                      </a:pPr>
+                      <a:r>
+                        <a:rPr lang="en-US" sz="900" dirty="0">
+                          <a:solidFill>
+                            <a:srgbClr val="CBD5E1"/>
+                          </a:solidFill>
+                        </a:rPr>
+                        <a:t>Add all items from iterable to set</a:t>
+                      </a:r>
+                      <a:endParaRPr lang="en-US" sz="900" dirty="0"/>
+                    </a:p>
+                  </a:txBody>
+                  <a:tcPr>
+                    <a:lnL w="12700" cap="flat" cmpd="sng" algn="ctr">
+                      <a:solidFill>
+                        <a:srgbClr val="334155"/>
+                      </a:solidFill>
+                      <a:prstDash val="solid"/>
+                      <a:round/>
+                      <a:headEnd type="none" w="med" len="med"/>
+                      <a:tailEnd type="none" w="med" len="med"/>
+                    </a:lnL>
+                    <a:lnR w="12700" cap="flat" cmpd="sng" algn="ctr">
+                      <a:solidFill>
+                        <a:srgbClr val="334155"/>
+                      </a:solidFill>
+                      <a:prstDash val="solid"/>
+                      <a:round/>
+                      <a:headEnd type="none" w="med" len="med"/>
+                      <a:tailEnd type="none" w="med" len="med"/>
+                    </a:lnR>
+                    <a:lnT w="12700" cap="flat" cmpd="sng" algn="ctr">
+                      <a:solidFill>
+                        <a:srgbClr val="334155"/>
+                      </a:solidFill>
+                      <a:prstDash val="solid"/>
+                      <a:round/>
+                      <a:headEnd type="none" w="med" len="med"/>
+                      <a:tailEnd type="none" w="med" len="med"/>
+                    </a:lnT>
+                    <a:lnB w="12700" cap="flat" cmpd="sng" algn="ctr">
+                      <a:solidFill>
+                        <a:srgbClr val="334155"/>
+                      </a:solidFill>
+                      <a:prstDash val="solid"/>
+                      <a:round/>
+                      <a:headEnd type="none" w="med" len="med"/>
+                      <a:tailEnd type="none" w="med" len="med"/>
+                    </a:lnB>
+                    <a:solidFill>
+                      <a:srgbClr val="162032"/>
+                    </a:solidFill>
+                  </a:tcPr>
+                </a:tc>
+                <a:extLst>
+                  <a:ext uri="{0D108BD9-81ED-4DB2-BD59-A6C34878D82A}">
+                    <a16:rowId xmlns:a16="http://schemas.microsoft.com/office/drawing/2014/main" val="10010"/>
+                  </a:ext>
+                </a:extLst>
+              </a:tr>
+              <a:tr h="233825">
+                <a:tc>
+                  <a:txBody>
+                    <a:bodyPr/>
+                    <a:lstStyle/>
+                    <a:p>
+                      <a:pPr marL="0" indent="0">
+                        <a:buNone/>
+                      </a:pPr>
+                      <a:r>
+                        <a:rPr lang="en-US" sz="900" dirty="0">
+                          <a:solidFill>
+                            <a:srgbClr val="F87171"/>
+                          </a:solidFill>
+                          <a:latin typeface="Consolas" pitchFamily="34" charset="0"/>
+                          <a:ea typeface="Consolas" pitchFamily="34" charset="-122"/>
+                          <a:cs typeface="Consolas" pitchFamily="34" charset="-120"/>
+                        </a:rPr>
+                        <a:t>s |= other</a:t>
+                      </a:r>
+                      <a:endParaRPr lang="en-US" sz="900" dirty="0">
+                        <a:latin typeface="Consolas" charset="0"/>
+                        <a:ea typeface="Consolas" charset="0"/>
+                        <a:cs typeface="Consolas" charset="0"/>
+                      </a:endParaRPr>
+                    </a:p>
+                  </a:txBody>
+                  <a:tcPr>
+                    <a:lnL w="12700" cap="flat" cmpd="sng" algn="ctr">
+                      <a:solidFill>
+                        <a:srgbClr val="334155"/>
+                      </a:solidFill>
+                      <a:prstDash val="solid"/>
+                      <a:round/>
+                      <a:headEnd type="none" w="med" len="med"/>
+                      <a:tailEnd type="none" w="med" len="med"/>
+                    </a:lnL>
+                    <a:lnR w="12700" cap="flat" cmpd="sng" algn="ctr">
+                      <a:solidFill>
+                        <a:srgbClr val="334155"/>
+                      </a:solidFill>
+                      <a:prstDash val="solid"/>
+                      <a:round/>
+                      <a:headEnd type="none" w="med" len="med"/>
+                      <a:tailEnd type="none" w="med" len="med"/>
+                    </a:lnR>
+                    <a:lnT w="12700" cap="flat" cmpd="sng" algn="ctr">
+                      <a:solidFill>
+                        <a:srgbClr val="334155"/>
+                      </a:solidFill>
+                      <a:prstDash val="solid"/>
+                      <a:round/>
+                      <a:headEnd type="none" w="med" len="med"/>
+                      <a:tailEnd type="none" w="med" len="med"/>
+                    </a:lnT>
+                    <a:lnB w="12700" cap="flat" cmpd="sng" algn="ctr">
+                      <a:solidFill>
+                        <a:srgbClr val="334155"/>
+                      </a:solidFill>
+                      <a:prstDash val="solid"/>
+                      <a:round/>
+                      <a:headEnd type="none" w="med" len="med"/>
+                      <a:tailEnd type="none" w="med" len="med"/>
+                    </a:lnB>
+                    <a:solidFill>
+                      <a:srgbClr val="1E293B"/>
+                    </a:solidFill>
+                  </a:tcPr>
+                </a:tc>
+                <a:tc>
+                  <a:txBody>
+                    <a:bodyPr/>
+                    <a:lstStyle/>
+                    <a:p>
+                      <a:pPr marL="0" indent="0">
+                        <a:buNone/>
+                      </a:pPr>
+                      <a:r>
+                        <a:rPr lang="en-US" sz="900" dirty="0">
+                          <a:solidFill>
+                            <a:srgbClr val="CBD5E1"/>
+                          </a:solidFill>
+                        </a:rPr>
+                        <a:t>In-place union — add all from other</a:t>
+                      </a:r>
+                      <a:endParaRPr lang="en-US" sz="900" dirty="0"/>
+                    </a:p>
+                  </a:txBody>
+                  <a:tcPr>
+                    <a:lnL w="12700" cap="flat" cmpd="sng" algn="ctr">
+                      <a:solidFill>
+                        <a:srgbClr val="334155"/>
+                      </a:solidFill>
+                      <a:prstDash val="solid"/>
+                      <a:round/>
+                      <a:headEnd type="none" w="med" len="med"/>
+                      <a:tailEnd type="none" w="med" len="med"/>
+                    </a:lnL>
+                    <a:lnR w="12700" cap="flat" cmpd="sng" algn="ctr">
+                      <a:solidFill>
+                        <a:srgbClr val="334155"/>
+                      </a:solidFill>
+                      <a:prstDash val="solid"/>
+                      <a:round/>
+                      <a:headEnd type="none" w="med" len="med"/>
+                      <a:tailEnd type="none" w="med" len="med"/>
+                    </a:lnR>
+                    <a:lnT w="12700" cap="flat" cmpd="sng" algn="ctr">
+                      <a:solidFill>
+                        <a:srgbClr val="334155"/>
+                      </a:solidFill>
+                      <a:prstDash val="solid"/>
+                      <a:round/>
+                      <a:headEnd type="none" w="med" len="med"/>
+                      <a:tailEnd type="none" w="med" len="med"/>
+                    </a:lnT>
+                    <a:lnB w="12700" cap="flat" cmpd="sng" algn="ctr">
+                      <a:solidFill>
+                        <a:srgbClr val="334155"/>
+                      </a:solidFill>
+                      <a:prstDash val="solid"/>
+                      <a:round/>
+                      <a:headEnd type="none" w="med" len="med"/>
+                      <a:tailEnd type="none" w="med" len="med"/>
+                    </a:lnB>
+                    <a:solidFill>
+                      <a:srgbClr val="1E293B"/>
+                    </a:solidFill>
+                  </a:tcPr>
+                </a:tc>
+                <a:extLst>
+                  <a:ext uri="{0D108BD9-81ED-4DB2-BD59-A6C34878D82A}">
+                    <a16:rowId xmlns:a16="http://schemas.microsoft.com/office/drawing/2014/main" val="10011"/>
+                  </a:ext>
+                </a:extLst>
+              </a:tr>
+              <a:tr h="233825">
+                <a:tc>
+                  <a:txBody>
+                    <a:bodyPr/>
+                    <a:lstStyle/>
+                    <a:p>
+                      <a:pPr marL="0" indent="0">
+                        <a:buNone/>
+                      </a:pPr>
+                      <a:r>
+                        <a:rPr lang="en-US" sz="900" dirty="0">
+                          <a:solidFill>
+                            <a:srgbClr val="F87171"/>
+                          </a:solidFill>
+                          <a:latin typeface="Consolas" pitchFamily="34" charset="0"/>
+                          <a:ea typeface="Consolas" pitchFamily="34" charset="-122"/>
+                          <a:cs typeface="Consolas" pitchFamily="34" charset="-120"/>
+                        </a:rPr>
+                        <a:t>s -= other</a:t>
+                      </a:r>
+                      <a:endParaRPr lang="en-US" sz="900" dirty="0">
+                        <a:latin typeface="Consolas" charset="0"/>
+                        <a:ea typeface="Consolas" charset="0"/>
+                        <a:cs typeface="Consolas" charset="0"/>
+                      </a:endParaRPr>
+                    </a:p>
+                  </a:txBody>
+                  <a:tcPr>
+                    <a:lnL w="12700" cap="flat" cmpd="sng" algn="ctr">
+                      <a:solidFill>
+                        <a:srgbClr val="334155"/>
+                      </a:solidFill>
+                      <a:prstDash val="solid"/>
+                      <a:round/>
+                      <a:headEnd type="none" w="med" len="med"/>
+                      <a:tailEnd type="none" w="med" len="med"/>
+                    </a:lnL>
+                    <a:lnR w="12700" cap="flat" cmpd="sng" algn="ctr">
+                      <a:solidFill>
+                        <a:srgbClr val="334155"/>
+                      </a:solidFill>
+                      <a:prstDash val="solid"/>
+                      <a:round/>
+                      <a:headEnd type="none" w="med" len="med"/>
+                      <a:tailEnd type="none" w="med" len="med"/>
+                    </a:lnR>
+                    <a:lnT w="12700" cap="flat" cmpd="sng" algn="ctr">
+                      <a:solidFill>
+                        <a:srgbClr val="334155"/>
+                      </a:solidFill>
+                      <a:prstDash val="solid"/>
+                      <a:round/>
+                      <a:headEnd type="none" w="med" len="med"/>
+                      <a:tailEnd type="none" w="med" len="med"/>
+                    </a:lnT>
+                    <a:lnB w="12700" cap="flat" cmpd="sng" algn="ctr">
+                      <a:solidFill>
+                        <a:srgbClr val="334155"/>
+                      </a:solidFill>
+                      <a:prstDash val="solid"/>
+                      <a:round/>
+                      <a:headEnd type="none" w="med" len="med"/>
+                      <a:tailEnd type="none" w="med" len="med"/>
+                    </a:lnB>
+                    <a:solidFill>
+                      <a:srgbClr val="162032"/>
+                    </a:solidFill>
+                  </a:tcPr>
+                </a:tc>
+                <a:tc>
+                  <a:txBody>
+                    <a:bodyPr/>
+                    <a:lstStyle/>
+                    <a:p>
+                      <a:pPr marL="0" indent="0">
+                        <a:buNone/>
+                      </a:pPr>
+                      <a:r>
+                        <a:rPr lang="en-US" sz="900" dirty="0">
+                          <a:solidFill>
+                            <a:srgbClr val="CBD5E1"/>
+                          </a:solidFill>
+                        </a:rPr>
+                        <a:t>In-place difference — remove items in other</a:t>
+                      </a:r>
+                      <a:endParaRPr lang="en-US" sz="900" dirty="0"/>
+                    </a:p>
+                  </a:txBody>
+                  <a:tcPr>
+                    <a:lnL w="12700" cap="flat" cmpd="sng" algn="ctr">
+                      <a:solidFill>
+                        <a:srgbClr val="334155"/>
+                      </a:solidFill>
+                      <a:prstDash val="solid"/>
+                      <a:round/>
+                      <a:headEnd type="none" w="med" len="med"/>
+                      <a:tailEnd type="none" w="med" len="med"/>
+                    </a:lnL>
+                    <a:lnR w="12700" cap="flat" cmpd="sng" algn="ctr">
+                      <a:solidFill>
+                        <a:srgbClr val="334155"/>
+                      </a:solidFill>
+                      <a:prstDash val="solid"/>
+                      <a:round/>
+                      <a:headEnd type="none" w="med" len="med"/>
+                      <a:tailEnd type="none" w="med" len="med"/>
+                    </a:lnR>
+                    <a:lnT w="12700" cap="flat" cmpd="sng" algn="ctr">
+                      <a:solidFill>
+                        <a:srgbClr val="334155"/>
+                      </a:solidFill>
+                      <a:prstDash val="solid"/>
+                      <a:round/>
+                      <a:headEnd type="none" w="med" len="med"/>
+                      <a:tailEnd type="none" w="med" len="med"/>
+                    </a:lnT>
+                    <a:lnB w="12700" cap="flat" cmpd="sng" algn="ctr">
+                      <a:solidFill>
+                        <a:srgbClr val="334155"/>
+                      </a:solidFill>
+                      <a:prstDash val="solid"/>
+                      <a:round/>
+                      <a:headEnd type="none" w="med" len="med"/>
+                      <a:tailEnd type="none" w="med" len="med"/>
+                    </a:lnB>
+                    <a:solidFill>
+                      <a:srgbClr val="162032"/>
+                    </a:solidFill>
+                  </a:tcPr>
+                </a:tc>
+                <a:extLst>
+                  <a:ext uri="{0D108BD9-81ED-4DB2-BD59-A6C34878D82A}">
+                    <a16:rowId xmlns:a16="http://schemas.microsoft.com/office/drawing/2014/main" val="10012"/>
+                  </a:ext>
+                </a:extLst>
+              </a:tr>
+              <a:tr h="233825">
+                <a:tc>
+                  <a:txBody>
+                    <a:bodyPr/>
+                    <a:lstStyle/>
+                    <a:p>
+                      <a:pPr marL="0" indent="0">
+                        <a:buNone/>
+                      </a:pPr>
+                      <a:r>
+                        <a:rPr lang="en-US" sz="900" dirty="0">
+                          <a:solidFill>
+                            <a:srgbClr val="F87171"/>
+                          </a:solidFill>
+                          <a:latin typeface="Consolas" pitchFamily="34" charset="0"/>
+                          <a:ea typeface="Consolas" pitchFamily="34" charset="-122"/>
+                          <a:cs typeface="Consolas" pitchFamily="34" charset="-120"/>
+                        </a:rPr>
+                        <a:t>s &amp;= other</a:t>
+                      </a:r>
+                      <a:endParaRPr lang="en-US" sz="900" dirty="0">
+                        <a:latin typeface="Consolas" charset="0"/>
+                        <a:ea typeface="Consolas" charset="0"/>
+                        <a:cs typeface="Consolas" charset="0"/>
+                      </a:endParaRPr>
+                    </a:p>
+                  </a:txBody>
+                  <a:tcPr>
+                    <a:lnL w="12700" cap="flat" cmpd="sng" algn="ctr">
+                      <a:solidFill>
+                        <a:srgbClr val="334155"/>
+                      </a:solidFill>
+                      <a:prstDash val="solid"/>
+                      <a:round/>
+                      <a:headEnd type="none" w="med" len="med"/>
+                      <a:tailEnd type="none" w="med" len="med"/>
+                    </a:lnL>
+                    <a:lnR w="12700" cap="flat" cmpd="sng" algn="ctr">
+                      <a:solidFill>
+                        <a:srgbClr val="334155"/>
+                      </a:solidFill>
+                      <a:prstDash val="solid"/>
+                      <a:round/>
+                      <a:headEnd type="none" w="med" len="med"/>
+                      <a:tailEnd type="none" w="med" len="med"/>
+                    </a:lnR>
+                    <a:lnT w="12700" cap="flat" cmpd="sng" algn="ctr">
+                      <a:solidFill>
+                        <a:srgbClr val="334155"/>
+                      </a:solidFill>
+                      <a:prstDash val="solid"/>
+                      <a:round/>
+                      <a:headEnd type="none" w="med" len="med"/>
+                      <a:tailEnd type="none" w="med" len="med"/>
+                    </a:lnT>
+                    <a:lnB w="12700" cap="flat" cmpd="sng" algn="ctr">
+                      <a:solidFill>
+                        <a:srgbClr val="334155"/>
+                      </a:solidFill>
+                      <a:prstDash val="solid"/>
+                      <a:round/>
+                      <a:headEnd type="none" w="med" len="med"/>
+                      <a:tailEnd type="none" w="med" len="med"/>
+                    </a:lnB>
+                    <a:solidFill>
+                      <a:srgbClr val="1E293B"/>
+                    </a:solidFill>
+                  </a:tcPr>
+                </a:tc>
+                <a:tc>
+                  <a:txBody>
+                    <a:bodyPr/>
+                    <a:lstStyle/>
+                    <a:p>
+                      <a:pPr marL="0" indent="0">
+                        <a:buNone/>
+                      </a:pPr>
+                      <a:r>
+                        <a:rPr lang="en-US" sz="900" dirty="0">
+                          <a:solidFill>
+                            <a:srgbClr val="CBD5E1"/>
+                          </a:solidFill>
+                        </a:rPr>
+                        <a:t>In-place intersection — keep shared only</a:t>
+                      </a:r>
+                      <a:endParaRPr lang="en-US" sz="900" dirty="0"/>
+                    </a:p>
+                  </a:txBody>
+                  <a:tcPr>
+                    <a:lnL w="12700" cap="flat" cmpd="sng" algn="ctr">
+                      <a:solidFill>
+                        <a:srgbClr val="334155"/>
+                      </a:solidFill>
+                      <a:prstDash val="solid"/>
+                      <a:round/>
+                      <a:headEnd type="none" w="med" len="med"/>
+                      <a:tailEnd type="none" w="med" len="med"/>
+                    </a:lnL>
+                    <a:lnR w="12700" cap="flat" cmpd="sng" algn="ctr">
+                      <a:solidFill>
+                        <a:srgbClr val="334155"/>
+                      </a:solidFill>
+                      <a:prstDash val="solid"/>
+                      <a:round/>
+                      <a:headEnd type="none" w="med" len="med"/>
+                      <a:tailEnd type="none" w="med" len="med"/>
+                    </a:lnR>
+                    <a:lnT w="12700" cap="flat" cmpd="sng" algn="ctr">
+                      <a:solidFill>
+                        <a:srgbClr val="334155"/>
+                      </a:solidFill>
+                      <a:prstDash val="solid"/>
+                      <a:round/>
+                      <a:headEnd type="none" w="med" len="med"/>
+                      <a:tailEnd type="none" w="med" len="med"/>
+                    </a:lnT>
+                    <a:lnB w="12700" cap="flat" cmpd="sng" algn="ctr">
+                      <a:solidFill>
+                        <a:srgbClr val="334155"/>
+                      </a:solidFill>
+                      <a:prstDash val="solid"/>
+                      <a:round/>
+                      <a:headEnd type="none" w="med" len="med"/>
+                      <a:tailEnd type="none" w="med" len="med"/>
+                    </a:lnB>
+                    <a:solidFill>
+                      <a:srgbClr val="1E293B"/>
+                    </a:solidFill>
+                  </a:tcPr>
+                </a:tc>
+                <a:extLst>
+                  <a:ext uri="{0D108BD9-81ED-4DB2-BD59-A6C34878D82A}">
+                    <a16:rowId xmlns:a16="http://schemas.microsoft.com/office/drawing/2014/main" val="10013"/>
+                  </a:ext>
+                </a:extLst>
+              </a:tr>
+            </a:tbl>
+          </a:graphicData>
+        </a:graphic>
+      </p:graphicFrame>
+      <p:sp>
+        <p:nvSpPr>
+          <p:cNvPr id="35" name="Shape 32"/>
+          <p:cNvSpPr/>
+          <p:nvPr/>
+        </p:nvSpPr>
+        <p:spPr>
+          <a:xfrm>
+            <a:off x="4663440" y="4359192"/>
+            <a:ext cx="4224528" cy="475488"/>
+          </a:xfrm>
+          <a:prstGeom prst="rect">
+            <a:avLst/>
+          </a:prstGeom>
+          <a:solidFill>
+            <a:srgbClr val="0D1B2A"/>
+          </a:solidFill>
+          <a:ln w="12700">
+            <a:solidFill>
+              <a:srgbClr val="F87171"/>
+            </a:solidFill>
+            <a:prstDash val="solid"/>
+          </a:ln>
+        </p:spPr>
+      </p:sp>
+      <p:sp>
+        <p:nvSpPr>
+          <p:cNvPr id="36" name="Shape 33"/>
+          <p:cNvSpPr/>
+          <p:nvPr/>
+        </p:nvSpPr>
+        <p:spPr>
+          <a:xfrm>
+            <a:off x="4663440" y="4359192"/>
+            <a:ext cx="64008" cy="475488"/>
+          </a:xfrm>
+          <a:prstGeom prst="rect">
+            <a:avLst/>
+          </a:prstGeom>
+          <a:solidFill>
+            <a:srgbClr val="F87171"/>
+          </a:solidFill>
+          <a:ln w="12700">
+            <a:solidFill>
+              <a:srgbClr val="F87171"/>
+            </a:solidFill>
+            <a:prstDash val="solid"/>
+          </a:ln>
+        </p:spPr>
+      </p:sp>
+      <p:sp>
+        <p:nvSpPr>
+          <p:cNvPr id="37" name="Text 34"/>
+          <p:cNvSpPr/>
+          <p:nvPr/>
+        </p:nvSpPr>
+        <p:spPr>
+          <a:xfrm>
+            <a:off x="4809744" y="4386624"/>
+            <a:ext cx="2926080" cy="219456"/>
+          </a:xfrm>
+          <a:prstGeom prst="rect">
+            <a:avLst/>
+          </a:prstGeom>
+          <a:noFill/>
+          <a:ln/>
+        </p:spPr>
+        <p:txBody>
+          <a:bodyPr wrap="square" lIns="0" tIns="0" rIns="0" bIns="0" rtlCol="0" anchor="ctr"/>
+          <a:lstStyle/>
+          <a:p>
+            <a:pPr marL="0" indent="0">
+              <a:buNone/>
+            </a:pPr>
+            <a:r>
+              <a:rPr lang="en-US" sz="1100" b="1" dirty="0">
+                <a:solidFill>
+                  <a:srgbClr val="F87171"/>
+                </a:solidFill>
+                <a:latin typeface="Calibri" pitchFamily="34" charset="0"/>
+                <a:ea typeface="Calibri" pitchFamily="34" charset="-122"/>
+                <a:cs typeface="Calibri" pitchFamily="34" charset="-120"/>
+              </a:rPr>
+              <a:t>🔗  set-examples.py</a:t>
+            </a:r>
+            <a:endParaRPr lang="en-US" sz="1100" dirty="0"/>
+          </a:p>
+        </p:txBody>
+      </p:sp>
+      <p:sp>
+        <p:nvSpPr>
+          <p:cNvPr id="38" name="Text 35">
+            <a:hlinkClick r:id="rId3"/>
+          </p:cNvPr>
+          <p:cNvSpPr/>
+          <p:nvPr/>
+        </p:nvSpPr>
+        <p:spPr>
+          <a:xfrm>
+            <a:off x="4809744" y="4596936"/>
+            <a:ext cx="4041648" cy="182880"/>
+          </a:xfrm>
+          <a:prstGeom prst="rect">
+            <a:avLst/>
+          </a:prstGeom>
+          <a:noFill/>
+          <a:ln/>
+        </p:spPr>
+        <p:txBody>
+          <a:bodyPr wrap="square" lIns="0" tIns="0" rIns="0" bIns="0" rtlCol="0" anchor="ctr"/>
+          <a:lstStyle/>
+          <a:p>
+            <a:pPr marL="0" indent="0">
+              <a:buNone/>
+            </a:pPr>
+            <a:r>
+              <a:rPr lang="en-US" sz="750" u="sng" dirty="0">
+                <a:solidFill>
+                  <a:srgbClr val="64748B"/>
+                </a:solidFill>
+                <a:latin typeface="Calibri" pitchFamily="34" charset="0"/>
+                <a:ea typeface="Calibri" pitchFamily="34" charset="-122"/>
+                <a:cs typeface="Calibri" pitchFamily="34" charset="-120"/>
+                <a:hlinkClick r:id="rId3">
+                  <a:extLst>
+                    <a:ext uri="{A12FA001-AC4F-418D-AE19-62706E023703}">
+                      <ahyp:hlinkClr xmlns:ahyp="http://schemas.microsoft.com/office/drawing/2018/hyperlinkcolor" val="tx"/>
+                    </a:ext>
+                  </a:extLst>
+                </a:hlinkClick>
+              </a:rPr>
+              <a:t>https://github.com/reachsatyavs/python-tutorials/blob/main/dataTypes/set-examples.py</a:t>
+            </a:r>
+            <a:endParaRPr lang="en-US" sz="750" dirty="0"/>
+          </a:p>
+        </p:txBody>
+      </p:sp>
+    </p:spTree>
+  </p:cSld>
+  <p:clrMapOvr>
+    <a:masterClrMapping/>
+  </p:clrMapOvr>
+</p:sld>
+</file>
+
+<file path=ppt/slides/slide15.xml><?xml version="1.0" encoding="utf-8"?>
+<p:sld xmlns:a="http://schemas.openxmlformats.org/drawingml/2006/main" xmlns:r="http://schemas.openxmlformats.org/officeDocument/2006/relationships" xmlns:p="http://schemas.openxmlformats.org/presentationml/2006/main">
+  <p:cSld>
+    <p:bg>
+      <p:bgPr>
+        <a:solidFill>
+          <a:srgbClr val="002060"/>
+        </a:solidFill>
+        <a:effectLst/>
+      </p:bgPr>
+    </p:bg>
+    <p:spTree>
+      <p:nvGrpSpPr>
+        <p:cNvPr id="1" name=""/>
+        <p:cNvGrpSpPr/>
+        <p:nvPr/>
+      </p:nvGrpSpPr>
+      <p:grpSpPr>
+        <a:xfrm>
+          <a:off x="0" y="0"/>
+          <a:ext cx="0" cy="0"/>
+          <a:chOff x="0" y="0"/>
+          <a:chExt cx="0" cy="0"/>
+        </a:xfrm>
+      </p:grpSpPr>
+      <p:sp>
+        <p:nvSpPr>
+          <p:cNvPr id="2" name="Shape 0"/>
+          <p:cNvSpPr/>
+          <p:nvPr/>
+        </p:nvSpPr>
+        <p:spPr>
+          <a:xfrm>
+            <a:off x="0" y="0"/>
+            <a:ext cx="9022634" cy="352044"/>
+          </a:xfrm>
+          <a:prstGeom prst="rect">
+            <a:avLst/>
+          </a:prstGeom>
+          <a:solidFill>
+            <a:srgbClr val="1E293B"/>
+          </a:solidFill>
+          <a:ln w="12700">
+            <a:solidFill>
+              <a:srgbClr val="1E293B"/>
+            </a:solidFill>
+            <a:prstDash val="solid"/>
+          </a:ln>
+        </p:spPr>
+      </p:sp>
+      <p:sp>
+        <p:nvSpPr>
+          <p:cNvPr id="3" name="Shape 1"/>
+          <p:cNvSpPr/>
+          <p:nvPr/>
+        </p:nvSpPr>
+        <p:spPr>
+          <a:xfrm>
+            <a:off x="0" y="0"/>
+            <a:ext cx="162407" cy="352044"/>
+          </a:xfrm>
+          <a:prstGeom prst="rect">
+            <a:avLst/>
+          </a:prstGeom>
+          <a:solidFill>
+            <a:srgbClr val="F87171"/>
+          </a:solidFill>
+          <a:ln w="12700">
+            <a:solidFill>
+              <a:srgbClr val="F87171"/>
+            </a:solidFill>
+            <a:prstDash val="solid"/>
+          </a:ln>
+        </p:spPr>
+      </p:sp>
+      <p:sp>
+        <p:nvSpPr>
+          <p:cNvPr id="4" name="Text 2"/>
+          <p:cNvSpPr/>
+          <p:nvPr/>
+        </p:nvSpPr>
+        <p:spPr>
+          <a:xfrm>
+            <a:off x="292608" y="0"/>
+            <a:ext cx="7939918" cy="352044"/>
+          </a:xfrm>
+          <a:prstGeom prst="rect">
+            <a:avLst/>
+          </a:prstGeom>
+          <a:noFill/>
+          <a:ln/>
+        </p:spPr>
+        <p:txBody>
+          <a:bodyPr wrap="square" lIns="0" tIns="0" rIns="0" bIns="0" rtlCol="0" anchor="ctr"/>
+          <a:lstStyle/>
+          <a:p>
+            <a:pPr marL="0" indent="0">
+              <a:buNone/>
+            </a:pPr>
+            <a:r>
+              <a:rPr lang="en-US" sz="2100" b="1" dirty="0">
+                <a:solidFill>
+                  <a:srgbClr val="F1F5F9"/>
+                </a:solidFill>
+                <a:latin typeface="Calibri" pitchFamily="34" charset="0"/>
+                <a:ea typeface="Calibri" pitchFamily="34" charset="-122"/>
+                <a:cs typeface="Calibri" pitchFamily="34" charset="-120"/>
+              </a:rPr>
+              <a:t>  Set  (set)  — Part 2 of 2</a:t>
+            </a:r>
+            <a:endParaRPr lang="en-US" sz="2100" dirty="0"/>
+          </a:p>
+        </p:txBody>
+      </p:sp>
+      <p:sp>
+        <p:nvSpPr>
+          <p:cNvPr id="6" name="Shape 4"/>
+          <p:cNvSpPr/>
+          <p:nvPr/>
+        </p:nvSpPr>
+        <p:spPr>
+          <a:xfrm>
+            <a:off x="0" y="5009250"/>
+            <a:ext cx="9144000" cy="27432"/>
+          </a:xfrm>
+          <a:prstGeom prst="rect">
+            <a:avLst/>
+          </a:prstGeom>
+          <a:solidFill>
+            <a:srgbClr val="334155"/>
+          </a:solidFill>
+          <a:ln w="12700">
+            <a:solidFill>
+              <a:srgbClr val="334155"/>
+            </a:solidFill>
+            <a:prstDash val="solid"/>
+          </a:ln>
+        </p:spPr>
+      </p:sp>
+      <p:sp>
+        <p:nvSpPr>
+          <p:cNvPr id="7" name="Text 5"/>
+          <p:cNvSpPr/>
+          <p:nvPr/>
+        </p:nvSpPr>
+        <p:spPr>
+          <a:xfrm>
+            <a:off x="274320" y="5029200"/>
+            <a:ext cx="8595360" cy="109728"/>
+          </a:xfrm>
+          <a:prstGeom prst="rect">
+            <a:avLst/>
+          </a:prstGeom>
+          <a:noFill/>
+          <a:ln/>
+        </p:spPr>
+        <p:txBody>
+          <a:bodyPr wrap="square" lIns="0" tIns="0" rIns="0" bIns="0" rtlCol="0" anchor="ctr"/>
+          <a:lstStyle/>
+          <a:p>
+            <a:pPr marL="0" indent="0">
+              <a:buNone/>
+            </a:pPr>
+            <a:r>
+              <a:rPr lang="en-US" sz="700" dirty="0">
+                <a:solidFill>
+                  <a:srgbClr val="64748B"/>
+                </a:solidFill>
+                <a:latin typeface="Calibri" pitchFamily="34" charset="0"/>
+                <a:ea typeface="Calibri" pitchFamily="34" charset="-122"/>
+                <a:cs typeface="Calibri" pitchFamily="34" charset="-120"/>
+              </a:rPr>
+              <a:t>Python Course  ·  Data Types  ·  github.com/reachsatyavs/python-tutorials</a:t>
+            </a:r>
+            <a:endParaRPr lang="en-US" sz="700" dirty="0"/>
+          </a:p>
+        </p:txBody>
+      </p:sp>
+      <p:sp>
+        <p:nvSpPr>
+          <p:cNvPr id="8" name="Shape 6"/>
+          <p:cNvSpPr/>
+          <p:nvPr/>
+        </p:nvSpPr>
+        <p:spPr>
+          <a:xfrm>
+            <a:off x="214467" y="563603"/>
+            <a:ext cx="4023360" cy="246888"/>
+          </a:xfrm>
+          <a:prstGeom prst="rect">
+            <a:avLst/>
+          </a:prstGeom>
+          <a:solidFill>
+            <a:srgbClr val="F87171"/>
+          </a:solidFill>
+          <a:ln w="12700">
+            <a:solidFill>
+              <a:srgbClr val="F87171"/>
+            </a:solidFill>
+            <a:prstDash val="solid"/>
+          </a:ln>
+        </p:spPr>
+      </p:sp>
+      <p:sp>
+        <p:nvSpPr>
+          <p:cNvPr id="9" name="Text 7"/>
+          <p:cNvSpPr/>
+          <p:nvPr/>
+        </p:nvSpPr>
+        <p:spPr>
+          <a:xfrm>
+            <a:off x="214467" y="563603"/>
+            <a:ext cx="4023360" cy="246888"/>
+          </a:xfrm>
+          <a:prstGeom prst="rect">
+            <a:avLst/>
+          </a:prstGeom>
+          <a:noFill/>
+          <a:ln/>
+        </p:spPr>
+        <p:txBody>
+          <a:bodyPr wrap="square" lIns="0" tIns="0" rIns="0" bIns="0" rtlCol="0" anchor="ctr"/>
+          <a:lstStyle/>
+          <a:p>
+            <a:pPr marL="0" indent="0" algn="ctr">
+              <a:buNone/>
+            </a:pPr>
+            <a:r>
+              <a:rPr lang="en-US" sz="850" b="1" dirty="0">
+                <a:solidFill>
+                  <a:srgbClr val="0F172A"/>
+                </a:solidFill>
+                <a:latin typeface="Calibri" pitchFamily="34" charset="0"/>
+                <a:ea typeface="Calibri" pitchFamily="34" charset="-122"/>
+                <a:cs typeface="Calibri" pitchFamily="34" charset="-120"/>
+              </a:rPr>
+              <a:t>SET OPERATIONS — operator  &amp;  method equivalents</a:t>
+            </a:r>
+            <a:endParaRPr lang="en-US" sz="850" dirty="0"/>
+          </a:p>
+        </p:txBody>
+      </p:sp>
+      <p:graphicFrame>
+        <p:nvGraphicFramePr>
+          <p:cNvPr id="10" name="Table 0"/>
+          <p:cNvGraphicFramePr>
+            <a:graphicFrameLocks noGrp="1"/>
+          </p:cNvGraphicFramePr>
+          <p:nvPr>
+            <p:extLst>
+              <p:ext uri="{D42A27DB-BD31-4B8C-83A1-F6EECF244321}">
+                <p14:modId xmlns:p14="http://schemas.microsoft.com/office/powerpoint/2010/main" val="3041852632"/>
+              </p:ext>
+            </p:extLst>
+          </p:nvPr>
+        </p:nvGraphicFramePr>
+        <p:xfrm>
+          <a:off x="214466" y="856211"/>
+          <a:ext cx="4119790" cy="2836192"/>
+        </p:xfrm>
+        <a:graphic>
+          <a:graphicData uri="http://schemas.openxmlformats.org/drawingml/2006/table">
+            <a:tbl>
+              <a:tblPr/>
+              <a:tblGrid>
+                <a:gridCol w="923720">
+                  <a:extLst>
+                    <a:ext uri="{9D8B030D-6E8A-4147-A177-3AD203B41FA5}">
+                      <a16:colId xmlns:a16="http://schemas.microsoft.com/office/drawing/2014/main" val="20000"/>
+                    </a:ext>
+                  </a:extLst>
+                </a:gridCol>
+                <a:gridCol w="665078">
+                  <a:extLst>
+                    <a:ext uri="{9D8B030D-6E8A-4147-A177-3AD203B41FA5}">
+                      <a16:colId xmlns:a16="http://schemas.microsoft.com/office/drawing/2014/main" val="20001"/>
+                    </a:ext>
+                  </a:extLst>
+                </a:gridCol>
+                <a:gridCol w="1459477">
+                  <a:extLst>
+                    <a:ext uri="{9D8B030D-6E8A-4147-A177-3AD203B41FA5}">
+                      <a16:colId xmlns:a16="http://schemas.microsoft.com/office/drawing/2014/main" val="20002"/>
+                    </a:ext>
+                  </a:extLst>
+                </a:gridCol>
+                <a:gridCol w="1071515">
+                  <a:extLst>
+                    <a:ext uri="{9D8B030D-6E8A-4147-A177-3AD203B41FA5}">
+                      <a16:colId xmlns:a16="http://schemas.microsoft.com/office/drawing/2014/main" val="20003"/>
+                    </a:ext>
+                  </a:extLst>
+                </a:gridCol>
+              </a:tblGrid>
+              <a:tr h="251848">
+                <a:tc>
+                  <a:txBody>
+                    <a:bodyPr/>
+                    <a:lstStyle/>
+                    <a:p>
+                      <a:pPr marL="0" indent="0">
+                        <a:buNone/>
+                      </a:pPr>
+                      <a:r>
+                        <a:rPr lang="en-US" sz="950" b="1" dirty="0">
+                          <a:solidFill>
+                            <a:srgbClr val="F1F5F9"/>
+                          </a:solidFill>
+                        </a:rPr>
+                        <a:t>Operation</a:t>
+                      </a:r>
+                      <a:endParaRPr lang="en-US" sz="950" dirty="0"/>
+                    </a:p>
+                  </a:txBody>
+                  <a:tcPr>
+                    <a:lnL w="12700" cap="flat" cmpd="sng" algn="ctr">
+                      <a:solidFill>
+                        <a:srgbClr val="334155"/>
+                      </a:solidFill>
+                      <a:prstDash val="solid"/>
+                      <a:round/>
+                      <a:headEnd type="none" w="med" len="med"/>
+                      <a:tailEnd type="none" w="med" len="med"/>
+                    </a:lnL>
+                    <a:lnR w="12700" cap="flat" cmpd="sng" algn="ctr">
+                      <a:solidFill>
+                        <a:srgbClr val="334155"/>
+                      </a:solidFill>
+                      <a:prstDash val="solid"/>
+                      <a:round/>
+                      <a:headEnd type="none" w="med" len="med"/>
+                      <a:tailEnd type="none" w="med" len="med"/>
+                    </a:lnR>
+                    <a:lnT w="12700" cap="flat" cmpd="sng" algn="ctr">
+                      <a:solidFill>
+                        <a:srgbClr val="334155"/>
+                      </a:solidFill>
+                      <a:prstDash val="solid"/>
+                      <a:round/>
+                      <a:headEnd type="none" w="med" len="med"/>
+                      <a:tailEnd type="none" w="med" len="med"/>
+                    </a:lnT>
+                    <a:lnB w="12700" cap="flat" cmpd="sng" algn="ctr">
+                      <a:solidFill>
+                        <a:srgbClr val="334155"/>
+                      </a:solidFill>
+                      <a:prstDash val="solid"/>
+                      <a:round/>
+                      <a:headEnd type="none" w="med" len="med"/>
+                      <a:tailEnd type="none" w="med" len="med"/>
+                    </a:lnB>
+                    <a:solidFill>
+                      <a:srgbClr val="0A1628"/>
+                    </a:solidFill>
+                  </a:tcPr>
+                </a:tc>
+                <a:tc>
+                  <a:txBody>
+                    <a:bodyPr/>
+                    <a:lstStyle/>
+                    <a:p>
+                      <a:pPr marL="0" indent="0" algn="ctr">
+                        <a:buNone/>
+                      </a:pPr>
+                      <a:r>
+                        <a:rPr lang="en-US" sz="950" b="1" dirty="0">
+                          <a:solidFill>
+                            <a:srgbClr val="F1F5F9"/>
+                          </a:solidFill>
+                        </a:rPr>
+                        <a:t>Operator</a:t>
+                      </a:r>
+                      <a:endParaRPr lang="en-US" sz="950" dirty="0"/>
+                    </a:p>
+                  </a:txBody>
+                  <a:tcPr>
+                    <a:lnL w="12700" cap="flat" cmpd="sng" algn="ctr">
+                      <a:solidFill>
+                        <a:srgbClr val="334155"/>
+                      </a:solidFill>
+                      <a:prstDash val="solid"/>
+                      <a:round/>
+                      <a:headEnd type="none" w="med" len="med"/>
+                      <a:tailEnd type="none" w="med" len="med"/>
+                    </a:lnL>
+                    <a:lnR w="12700" cap="flat" cmpd="sng" algn="ctr">
+                      <a:solidFill>
+                        <a:srgbClr val="334155"/>
+                      </a:solidFill>
+                      <a:prstDash val="solid"/>
+                      <a:round/>
+                      <a:headEnd type="none" w="med" len="med"/>
+                      <a:tailEnd type="none" w="med" len="med"/>
+                    </a:lnR>
+                    <a:lnT w="12700" cap="flat" cmpd="sng" algn="ctr">
+                      <a:solidFill>
+                        <a:srgbClr val="334155"/>
+                      </a:solidFill>
+                      <a:prstDash val="solid"/>
+                      <a:round/>
+                      <a:headEnd type="none" w="med" len="med"/>
+                      <a:tailEnd type="none" w="med" len="med"/>
+                    </a:lnT>
+                    <a:lnB w="12700" cap="flat" cmpd="sng" algn="ctr">
+                      <a:solidFill>
+                        <a:srgbClr val="334155"/>
+                      </a:solidFill>
+                      <a:prstDash val="solid"/>
+                      <a:round/>
+                      <a:headEnd type="none" w="med" len="med"/>
+                      <a:tailEnd type="none" w="med" len="med"/>
+                    </a:lnB>
+                    <a:solidFill>
+                      <a:srgbClr val="0A1628"/>
+                    </a:solidFill>
+                  </a:tcPr>
+                </a:tc>
+                <a:tc>
+                  <a:txBody>
+                    <a:bodyPr/>
+                    <a:lstStyle/>
+                    <a:p>
+                      <a:pPr marL="0" indent="0">
+                        <a:buNone/>
+                      </a:pPr>
+                      <a:r>
+                        <a:rPr lang="en-US" sz="950" b="1" dirty="0">
+                          <a:solidFill>
+                            <a:srgbClr val="F1F5F9"/>
+                          </a:solidFill>
+                        </a:rPr>
+                        <a:t>Method</a:t>
+                      </a:r>
+                      <a:endParaRPr lang="en-US" sz="950" dirty="0"/>
+                    </a:p>
+                  </a:txBody>
+                  <a:tcPr>
+                    <a:lnL w="12700" cap="flat" cmpd="sng" algn="ctr">
+                      <a:solidFill>
+                        <a:srgbClr val="334155"/>
+                      </a:solidFill>
+                      <a:prstDash val="solid"/>
+                      <a:round/>
+                      <a:headEnd type="none" w="med" len="med"/>
+                      <a:tailEnd type="none" w="med" len="med"/>
+                    </a:lnL>
+                    <a:lnR w="12700" cap="flat" cmpd="sng" algn="ctr">
+                      <a:solidFill>
+                        <a:srgbClr val="334155"/>
+                      </a:solidFill>
+                      <a:prstDash val="solid"/>
+                      <a:round/>
+                      <a:headEnd type="none" w="med" len="med"/>
+                      <a:tailEnd type="none" w="med" len="med"/>
+                    </a:lnR>
+                    <a:lnT w="12700" cap="flat" cmpd="sng" algn="ctr">
+                      <a:solidFill>
+                        <a:srgbClr val="334155"/>
+                      </a:solidFill>
+                      <a:prstDash val="solid"/>
+                      <a:round/>
+                      <a:headEnd type="none" w="med" len="med"/>
+                      <a:tailEnd type="none" w="med" len="med"/>
+                    </a:lnT>
+                    <a:lnB w="12700" cap="flat" cmpd="sng" algn="ctr">
+                      <a:solidFill>
+                        <a:srgbClr val="334155"/>
+                      </a:solidFill>
+                      <a:prstDash val="solid"/>
+                      <a:round/>
+                      <a:headEnd type="none" w="med" len="med"/>
+                      <a:tailEnd type="none" w="med" len="med"/>
+                    </a:lnB>
+                    <a:solidFill>
+                      <a:srgbClr val="0A1628"/>
+                    </a:solidFill>
+                  </a:tcPr>
+                </a:tc>
+                <a:tc>
+                  <a:txBody>
+                    <a:bodyPr/>
+                    <a:lstStyle/>
+                    <a:p>
+                      <a:pPr marL="0" indent="0">
+                        <a:buNone/>
+                      </a:pPr>
+                      <a:r>
+                        <a:rPr lang="en-US" sz="950" b="1" dirty="0">
+                          <a:solidFill>
+                            <a:srgbClr val="F1F5F9"/>
+                          </a:solidFill>
+                        </a:rPr>
+                        <a:t>Returns</a:t>
+                      </a:r>
+                      <a:endParaRPr lang="en-US" sz="950" dirty="0"/>
+                    </a:p>
+                  </a:txBody>
+                  <a:tcPr>
+                    <a:lnL w="12700" cap="flat" cmpd="sng" algn="ctr">
+                      <a:solidFill>
+                        <a:srgbClr val="334155"/>
+                      </a:solidFill>
+                      <a:prstDash val="solid"/>
+                      <a:round/>
+                      <a:headEnd type="none" w="med" len="med"/>
+                      <a:tailEnd type="none" w="med" len="med"/>
+                    </a:lnL>
+                    <a:lnR w="12700" cap="flat" cmpd="sng" algn="ctr">
+                      <a:solidFill>
+                        <a:srgbClr val="334155"/>
+                      </a:solidFill>
+                      <a:prstDash val="solid"/>
+                      <a:round/>
+                      <a:headEnd type="none" w="med" len="med"/>
+                      <a:tailEnd type="none" w="med" len="med"/>
+                    </a:lnR>
+                    <a:lnT w="12700" cap="flat" cmpd="sng" algn="ctr">
+                      <a:solidFill>
+                        <a:srgbClr val="334155"/>
+                      </a:solidFill>
+                      <a:prstDash val="solid"/>
+                      <a:round/>
+                      <a:headEnd type="none" w="med" len="med"/>
+                      <a:tailEnd type="none" w="med" len="med"/>
+                    </a:lnT>
+                    <a:lnB w="12700" cap="flat" cmpd="sng" algn="ctr">
+                      <a:solidFill>
+                        <a:srgbClr val="334155"/>
+                      </a:solidFill>
+                      <a:prstDash val="solid"/>
+                      <a:round/>
+                      <a:headEnd type="none" w="med" len="med"/>
+                      <a:tailEnd type="none" w="med" len="med"/>
+                    </a:lnB>
+                    <a:solidFill>
+                      <a:srgbClr val="0A1628"/>
+                    </a:solidFill>
+                  </a:tcPr>
+                </a:tc>
+                <a:extLst>
+                  <a:ext uri="{0D108BD9-81ED-4DB2-BD59-A6C34878D82A}">
+                    <a16:rowId xmlns:a16="http://schemas.microsoft.com/office/drawing/2014/main" val="10000"/>
+                  </a:ext>
+                </a:extLst>
+              </a:tr>
+              <a:tr h="336190">
+                <a:tc>
+                  <a:txBody>
+                    <a:bodyPr/>
+                    <a:lstStyle/>
+                    <a:p>
+                      <a:pPr marL="0" indent="0">
+                        <a:buNone/>
+                      </a:pPr>
+                      <a:r>
+                        <a:rPr lang="en-US" sz="900" b="1" dirty="0">
+                          <a:solidFill>
+                            <a:srgbClr val="CBD5E1"/>
+                          </a:solidFill>
+                        </a:rPr>
+                        <a:t>Union</a:t>
+                      </a:r>
+                      <a:endParaRPr lang="en-US" sz="900" dirty="0"/>
+                    </a:p>
+                  </a:txBody>
+                  <a:tcPr>
+                    <a:lnL w="12700" cap="flat" cmpd="sng" algn="ctr">
+                      <a:solidFill>
+                        <a:srgbClr val="334155"/>
+                      </a:solidFill>
+                      <a:prstDash val="solid"/>
+                      <a:round/>
+                      <a:headEnd type="none" w="med" len="med"/>
+                      <a:tailEnd type="none" w="med" len="med"/>
+                    </a:lnL>
+                    <a:lnR w="12700" cap="flat" cmpd="sng" algn="ctr">
+                      <a:solidFill>
+                        <a:srgbClr val="334155"/>
+                      </a:solidFill>
+                      <a:prstDash val="solid"/>
+                      <a:round/>
+                      <a:headEnd type="none" w="med" len="med"/>
+                      <a:tailEnd type="none" w="med" len="med"/>
+                    </a:lnR>
+                    <a:lnT w="12700" cap="flat" cmpd="sng" algn="ctr">
+                      <a:solidFill>
+                        <a:srgbClr val="334155"/>
+                      </a:solidFill>
+                      <a:prstDash val="solid"/>
+                      <a:round/>
+                      <a:headEnd type="none" w="med" len="med"/>
+                      <a:tailEnd type="none" w="med" len="med"/>
+                    </a:lnT>
+                    <a:lnB w="12700" cap="flat" cmpd="sng" algn="ctr">
+                      <a:solidFill>
+                        <a:srgbClr val="334155"/>
+                      </a:solidFill>
+                      <a:prstDash val="solid"/>
+                      <a:round/>
+                      <a:headEnd type="none" w="med" len="med"/>
+                      <a:tailEnd type="none" w="med" len="med"/>
+                    </a:lnB>
+                    <a:solidFill>
+                      <a:srgbClr val="1E293B"/>
+                    </a:solidFill>
+                  </a:tcPr>
+                </a:tc>
+                <a:tc>
+                  <a:txBody>
+                    <a:bodyPr/>
+                    <a:lstStyle/>
+                    <a:p>
+                      <a:pPr marL="0" indent="0" algn="ctr">
+                        <a:buNone/>
+                      </a:pPr>
+                      <a:r>
+                        <a:rPr lang="en-US" sz="900" dirty="0">
+                          <a:solidFill>
+                            <a:srgbClr val="F87171"/>
+                          </a:solidFill>
+                          <a:latin typeface="Consolas" pitchFamily="34" charset="0"/>
+                          <a:ea typeface="Consolas" pitchFamily="34" charset="-122"/>
+                          <a:cs typeface="Consolas" pitchFamily="34" charset="-120"/>
+                        </a:rPr>
+                        <a:t>a | b</a:t>
+                      </a:r>
+                      <a:endParaRPr lang="en-US" sz="900" dirty="0">
+                        <a:latin typeface="Consolas" charset="0"/>
+                        <a:ea typeface="Consolas" charset="0"/>
+                        <a:cs typeface="Consolas" charset="0"/>
+                      </a:endParaRPr>
+                    </a:p>
+                  </a:txBody>
+                  <a:tcPr>
+                    <a:lnL w="12700" cap="flat" cmpd="sng" algn="ctr">
+                      <a:solidFill>
+                        <a:srgbClr val="334155"/>
+                      </a:solidFill>
+                      <a:prstDash val="solid"/>
+                      <a:round/>
+                      <a:headEnd type="none" w="med" len="med"/>
+                      <a:tailEnd type="none" w="med" len="med"/>
+                    </a:lnL>
+                    <a:lnR w="12700" cap="flat" cmpd="sng" algn="ctr">
+                      <a:solidFill>
+                        <a:srgbClr val="334155"/>
+                      </a:solidFill>
+                      <a:prstDash val="solid"/>
+                      <a:round/>
+                      <a:headEnd type="none" w="med" len="med"/>
+                      <a:tailEnd type="none" w="med" len="med"/>
+                    </a:lnR>
+                    <a:lnT w="12700" cap="flat" cmpd="sng" algn="ctr">
+                      <a:solidFill>
+                        <a:srgbClr val="334155"/>
+                      </a:solidFill>
+                      <a:prstDash val="solid"/>
+                      <a:round/>
+                      <a:headEnd type="none" w="med" len="med"/>
+                      <a:tailEnd type="none" w="med" len="med"/>
+                    </a:lnT>
+                    <a:lnB w="12700" cap="flat" cmpd="sng" algn="ctr">
+                      <a:solidFill>
+                        <a:srgbClr val="334155"/>
+                      </a:solidFill>
+                      <a:prstDash val="solid"/>
+                      <a:round/>
+                      <a:headEnd type="none" w="med" len="med"/>
+                      <a:tailEnd type="none" w="med" len="med"/>
+                    </a:lnB>
+                    <a:solidFill>
+                      <a:srgbClr val="1E293B"/>
+                    </a:solidFill>
+                  </a:tcPr>
+                </a:tc>
+                <a:tc>
+                  <a:txBody>
+                    <a:bodyPr/>
+                    <a:lstStyle/>
+                    <a:p>
+                      <a:pPr marL="0" indent="0">
+                        <a:buNone/>
+                      </a:pPr>
+                      <a:r>
+                        <a:rPr lang="en-US" sz="850" dirty="0">
+                          <a:solidFill>
+                            <a:srgbClr val="F87171"/>
+                          </a:solidFill>
+                          <a:latin typeface="Consolas" pitchFamily="34" charset="0"/>
+                          <a:ea typeface="Consolas" pitchFamily="34" charset="-122"/>
+                          <a:cs typeface="Consolas" pitchFamily="34" charset="-120"/>
+                        </a:rPr>
+                        <a:t>a.union(b)</a:t>
+                      </a:r>
+                      <a:endParaRPr lang="en-US" sz="850" dirty="0">
+                        <a:latin typeface="Consolas" charset="0"/>
+                        <a:ea typeface="Consolas" charset="0"/>
+                        <a:cs typeface="Consolas" charset="0"/>
+                      </a:endParaRPr>
+                    </a:p>
+                  </a:txBody>
+                  <a:tcPr>
+                    <a:lnL w="12700" cap="flat" cmpd="sng" algn="ctr">
+                      <a:solidFill>
+                        <a:srgbClr val="334155"/>
+                      </a:solidFill>
+                      <a:prstDash val="solid"/>
+                      <a:round/>
+                      <a:headEnd type="none" w="med" len="med"/>
+                      <a:tailEnd type="none" w="med" len="med"/>
+                    </a:lnL>
+                    <a:lnR w="12700" cap="flat" cmpd="sng" algn="ctr">
+                      <a:solidFill>
+                        <a:srgbClr val="334155"/>
+                      </a:solidFill>
+                      <a:prstDash val="solid"/>
+                      <a:round/>
+                      <a:headEnd type="none" w="med" len="med"/>
+                      <a:tailEnd type="none" w="med" len="med"/>
+                    </a:lnR>
+                    <a:lnT w="12700" cap="flat" cmpd="sng" algn="ctr">
+                      <a:solidFill>
+                        <a:srgbClr val="334155"/>
+                      </a:solidFill>
+                      <a:prstDash val="solid"/>
+                      <a:round/>
+                      <a:headEnd type="none" w="med" len="med"/>
+                      <a:tailEnd type="none" w="med" len="med"/>
+                    </a:lnT>
+                    <a:lnB w="12700" cap="flat" cmpd="sng" algn="ctr">
+                      <a:solidFill>
+                        <a:srgbClr val="334155"/>
+                      </a:solidFill>
+                      <a:prstDash val="solid"/>
+                      <a:round/>
+                      <a:headEnd type="none" w="med" len="med"/>
+                      <a:tailEnd type="none" w="med" len="med"/>
+                    </a:lnB>
+                    <a:solidFill>
+                      <a:srgbClr val="1E293B"/>
+                    </a:solidFill>
+                  </a:tcPr>
+                </a:tc>
+                <a:tc>
+                  <a:txBody>
+                    <a:bodyPr/>
+                    <a:lstStyle/>
+                    <a:p>
+                      <a:pPr marL="0" indent="0">
+                        <a:buNone/>
+                      </a:pPr>
+                      <a:r>
+                        <a:rPr lang="en-US" sz="900" dirty="0">
+                          <a:solidFill>
+                            <a:srgbClr val="64748B"/>
+                          </a:solidFill>
+                        </a:rPr>
+                        <a:t>All elements from both sets</a:t>
+                      </a:r>
+                      <a:endParaRPr lang="en-US" sz="900" dirty="0"/>
+                    </a:p>
+                  </a:txBody>
+                  <a:tcPr>
+                    <a:lnL w="12700" cap="flat" cmpd="sng" algn="ctr">
+                      <a:solidFill>
+                        <a:srgbClr val="334155"/>
+                      </a:solidFill>
+                      <a:prstDash val="solid"/>
+                      <a:round/>
+                      <a:headEnd type="none" w="med" len="med"/>
+                      <a:tailEnd type="none" w="med" len="med"/>
+                    </a:lnL>
+                    <a:lnR w="12700" cap="flat" cmpd="sng" algn="ctr">
+                      <a:solidFill>
+                        <a:srgbClr val="334155"/>
+                      </a:solidFill>
+                      <a:prstDash val="solid"/>
+                      <a:round/>
+                      <a:headEnd type="none" w="med" len="med"/>
+                      <a:tailEnd type="none" w="med" len="med"/>
+                    </a:lnR>
+                    <a:lnT w="12700" cap="flat" cmpd="sng" algn="ctr">
+                      <a:solidFill>
+                        <a:srgbClr val="334155"/>
+                      </a:solidFill>
+                      <a:prstDash val="solid"/>
+                      <a:round/>
+                      <a:headEnd type="none" w="med" len="med"/>
+                      <a:tailEnd type="none" w="med" len="med"/>
+                    </a:lnT>
+                    <a:lnB w="12700" cap="flat" cmpd="sng" algn="ctr">
+                      <a:solidFill>
+                        <a:srgbClr val="334155"/>
+                      </a:solidFill>
+                      <a:prstDash val="solid"/>
+                      <a:round/>
+                      <a:headEnd type="none" w="med" len="med"/>
+                      <a:tailEnd type="none" w="med" len="med"/>
+                    </a:lnB>
+                    <a:solidFill>
+                      <a:srgbClr val="1E293B"/>
+                    </a:solidFill>
+                  </a:tcPr>
+                </a:tc>
+                <a:extLst>
+                  <a:ext uri="{0D108BD9-81ED-4DB2-BD59-A6C34878D82A}">
+                    <a16:rowId xmlns:a16="http://schemas.microsoft.com/office/drawing/2014/main" val="10001"/>
+                  </a:ext>
+                </a:extLst>
+              </a:tr>
+              <a:tr h="336190">
+                <a:tc>
+                  <a:txBody>
+                    <a:bodyPr/>
+                    <a:lstStyle/>
+                    <a:p>
+                      <a:pPr marL="0" indent="0">
+                        <a:buNone/>
+                      </a:pPr>
+                      <a:r>
+                        <a:rPr lang="en-US" sz="900" b="1" dirty="0">
+                          <a:solidFill>
+                            <a:srgbClr val="CBD5E1"/>
+                          </a:solidFill>
+                        </a:rPr>
+                        <a:t>Intersection</a:t>
+                      </a:r>
+                      <a:endParaRPr lang="en-US" sz="900" dirty="0"/>
+                    </a:p>
+                  </a:txBody>
+                  <a:tcPr>
+                    <a:lnL w="12700" cap="flat" cmpd="sng" algn="ctr">
+                      <a:solidFill>
+                        <a:srgbClr val="334155"/>
+                      </a:solidFill>
+                      <a:prstDash val="solid"/>
+                      <a:round/>
+                      <a:headEnd type="none" w="med" len="med"/>
+                      <a:tailEnd type="none" w="med" len="med"/>
+                    </a:lnL>
+                    <a:lnR w="12700" cap="flat" cmpd="sng" algn="ctr">
+                      <a:solidFill>
+                        <a:srgbClr val="334155"/>
+                      </a:solidFill>
+                      <a:prstDash val="solid"/>
+                      <a:round/>
+                      <a:headEnd type="none" w="med" len="med"/>
+                      <a:tailEnd type="none" w="med" len="med"/>
+                    </a:lnR>
+                    <a:lnT w="12700" cap="flat" cmpd="sng" algn="ctr">
+                      <a:solidFill>
+                        <a:srgbClr val="334155"/>
+                      </a:solidFill>
+                      <a:prstDash val="solid"/>
+                      <a:round/>
+                      <a:headEnd type="none" w="med" len="med"/>
+                      <a:tailEnd type="none" w="med" len="med"/>
+                    </a:lnT>
+                    <a:lnB w="12700" cap="flat" cmpd="sng" algn="ctr">
+                      <a:solidFill>
+                        <a:srgbClr val="334155"/>
+                      </a:solidFill>
+                      <a:prstDash val="solid"/>
+                      <a:round/>
+                      <a:headEnd type="none" w="med" len="med"/>
+                      <a:tailEnd type="none" w="med" len="med"/>
+                    </a:lnB>
+                    <a:solidFill>
+                      <a:srgbClr val="162032"/>
+                    </a:solidFill>
+                  </a:tcPr>
+                </a:tc>
+                <a:tc>
+                  <a:txBody>
+                    <a:bodyPr/>
+                    <a:lstStyle/>
+                    <a:p>
+                      <a:pPr marL="0" indent="0" algn="ctr">
+                        <a:buNone/>
+                      </a:pPr>
+                      <a:r>
+                        <a:rPr lang="en-US" sz="900" dirty="0">
+                          <a:solidFill>
+                            <a:srgbClr val="F87171"/>
+                          </a:solidFill>
+                          <a:latin typeface="Consolas" pitchFamily="34" charset="0"/>
+                          <a:ea typeface="Consolas" pitchFamily="34" charset="-122"/>
+                          <a:cs typeface="Consolas" pitchFamily="34" charset="-120"/>
+                        </a:rPr>
+                        <a:t>a &amp; b</a:t>
+                      </a:r>
+                      <a:endParaRPr lang="en-US" sz="900" dirty="0">
+                        <a:latin typeface="Consolas" charset="0"/>
+                        <a:ea typeface="Consolas" charset="0"/>
+                        <a:cs typeface="Consolas" charset="0"/>
+                      </a:endParaRPr>
+                    </a:p>
+                  </a:txBody>
+                  <a:tcPr>
+                    <a:lnL w="12700" cap="flat" cmpd="sng" algn="ctr">
+                      <a:solidFill>
+                        <a:srgbClr val="334155"/>
+                      </a:solidFill>
+                      <a:prstDash val="solid"/>
+                      <a:round/>
+                      <a:headEnd type="none" w="med" len="med"/>
+                      <a:tailEnd type="none" w="med" len="med"/>
+                    </a:lnL>
+                    <a:lnR w="12700" cap="flat" cmpd="sng" algn="ctr">
+                      <a:solidFill>
+                        <a:srgbClr val="334155"/>
+                      </a:solidFill>
+                      <a:prstDash val="solid"/>
+                      <a:round/>
+                      <a:headEnd type="none" w="med" len="med"/>
+                      <a:tailEnd type="none" w="med" len="med"/>
+                    </a:lnR>
+                    <a:lnT w="12700" cap="flat" cmpd="sng" algn="ctr">
+                      <a:solidFill>
+                        <a:srgbClr val="334155"/>
+                      </a:solidFill>
+                      <a:prstDash val="solid"/>
+                      <a:round/>
+                      <a:headEnd type="none" w="med" len="med"/>
+                      <a:tailEnd type="none" w="med" len="med"/>
+                    </a:lnT>
+                    <a:lnB w="12700" cap="flat" cmpd="sng" algn="ctr">
+                      <a:solidFill>
+                        <a:srgbClr val="334155"/>
+                      </a:solidFill>
+                      <a:prstDash val="solid"/>
+                      <a:round/>
+                      <a:headEnd type="none" w="med" len="med"/>
+                      <a:tailEnd type="none" w="med" len="med"/>
+                    </a:lnB>
+                    <a:solidFill>
+                      <a:srgbClr val="162032"/>
+                    </a:solidFill>
+                  </a:tcPr>
+                </a:tc>
+                <a:tc>
+                  <a:txBody>
+                    <a:bodyPr/>
+                    <a:lstStyle/>
+                    <a:p>
+                      <a:pPr marL="0" indent="0">
+                        <a:buNone/>
+                      </a:pPr>
+                      <a:r>
+                        <a:rPr lang="en-US" sz="850" dirty="0">
+                          <a:solidFill>
+                            <a:srgbClr val="F87171"/>
+                          </a:solidFill>
+                          <a:latin typeface="Consolas" pitchFamily="34" charset="0"/>
+                          <a:ea typeface="Consolas" pitchFamily="34" charset="-122"/>
+                          <a:cs typeface="Consolas" pitchFamily="34" charset="-120"/>
+                        </a:rPr>
+                        <a:t>a.intersection(b)</a:t>
+                      </a:r>
+                      <a:endParaRPr lang="en-US" sz="850" dirty="0">
+                        <a:latin typeface="Consolas" charset="0"/>
+                        <a:ea typeface="Consolas" charset="0"/>
+                        <a:cs typeface="Consolas" charset="0"/>
+                      </a:endParaRPr>
+                    </a:p>
+                  </a:txBody>
+                  <a:tcPr>
+                    <a:lnL w="12700" cap="flat" cmpd="sng" algn="ctr">
+                      <a:solidFill>
+                        <a:srgbClr val="334155"/>
+                      </a:solidFill>
+                      <a:prstDash val="solid"/>
+                      <a:round/>
+                      <a:headEnd type="none" w="med" len="med"/>
+                      <a:tailEnd type="none" w="med" len="med"/>
+                    </a:lnL>
+                    <a:lnR w="12700" cap="flat" cmpd="sng" algn="ctr">
+                      <a:solidFill>
+                        <a:srgbClr val="334155"/>
+                      </a:solidFill>
+                      <a:prstDash val="solid"/>
+                      <a:round/>
+                      <a:headEnd type="none" w="med" len="med"/>
+                      <a:tailEnd type="none" w="med" len="med"/>
+                    </a:lnR>
+                    <a:lnT w="12700" cap="flat" cmpd="sng" algn="ctr">
+                      <a:solidFill>
+                        <a:srgbClr val="334155"/>
+                      </a:solidFill>
+                      <a:prstDash val="solid"/>
+                      <a:round/>
+                      <a:headEnd type="none" w="med" len="med"/>
+                      <a:tailEnd type="none" w="med" len="med"/>
+                    </a:lnT>
+                    <a:lnB w="12700" cap="flat" cmpd="sng" algn="ctr">
+                      <a:solidFill>
+                        <a:srgbClr val="334155"/>
+                      </a:solidFill>
+                      <a:prstDash val="solid"/>
+                      <a:round/>
+                      <a:headEnd type="none" w="med" len="med"/>
+                      <a:tailEnd type="none" w="med" len="med"/>
+                    </a:lnB>
+                    <a:solidFill>
+                      <a:srgbClr val="162032"/>
+                    </a:solidFill>
+                  </a:tcPr>
+                </a:tc>
+                <a:tc>
+                  <a:txBody>
+                    <a:bodyPr/>
+                    <a:lstStyle/>
+                    <a:p>
+                      <a:pPr marL="0" indent="0">
+                        <a:buNone/>
+                      </a:pPr>
+                      <a:r>
+                        <a:rPr lang="en-US" sz="900" dirty="0">
+                          <a:solidFill>
+                            <a:srgbClr val="64748B"/>
+                          </a:solidFill>
+                        </a:rPr>
+                        <a:t>Elements in BOTH sets</a:t>
+                      </a:r>
+                      <a:endParaRPr lang="en-US" sz="900" dirty="0"/>
+                    </a:p>
+                  </a:txBody>
+                  <a:tcPr>
+                    <a:lnL w="12700" cap="flat" cmpd="sng" algn="ctr">
+                      <a:solidFill>
+                        <a:srgbClr val="334155"/>
+                      </a:solidFill>
+                      <a:prstDash val="solid"/>
+                      <a:round/>
+                      <a:headEnd type="none" w="med" len="med"/>
+                      <a:tailEnd type="none" w="med" len="med"/>
+                    </a:lnL>
+                    <a:lnR w="12700" cap="flat" cmpd="sng" algn="ctr">
+                      <a:solidFill>
+                        <a:srgbClr val="334155"/>
+                      </a:solidFill>
+                      <a:prstDash val="solid"/>
+                      <a:round/>
+                      <a:headEnd type="none" w="med" len="med"/>
+                      <a:tailEnd type="none" w="med" len="med"/>
+                    </a:lnR>
+                    <a:lnT w="12700" cap="flat" cmpd="sng" algn="ctr">
+                      <a:solidFill>
+                        <a:srgbClr val="334155"/>
+                      </a:solidFill>
+                      <a:prstDash val="solid"/>
+                      <a:round/>
+                      <a:headEnd type="none" w="med" len="med"/>
+                      <a:tailEnd type="none" w="med" len="med"/>
+                    </a:lnT>
+                    <a:lnB w="12700" cap="flat" cmpd="sng" algn="ctr">
+                      <a:solidFill>
+                        <a:srgbClr val="334155"/>
+                      </a:solidFill>
+                      <a:prstDash val="solid"/>
+                      <a:round/>
+                      <a:headEnd type="none" w="med" len="med"/>
+                      <a:tailEnd type="none" w="med" len="med"/>
+                    </a:lnB>
+                    <a:solidFill>
+                      <a:srgbClr val="162032"/>
+                    </a:solidFill>
+                  </a:tcPr>
+                </a:tc>
+                <a:extLst>
+                  <a:ext uri="{0D108BD9-81ED-4DB2-BD59-A6C34878D82A}">
+                    <a16:rowId xmlns:a16="http://schemas.microsoft.com/office/drawing/2014/main" val="10002"/>
+                  </a:ext>
+                </a:extLst>
+              </a:tr>
+              <a:tr h="251848">
+                <a:tc>
+                  <a:txBody>
+                    <a:bodyPr/>
+                    <a:lstStyle/>
+                    <a:p>
+                      <a:pPr marL="0" indent="0">
+                        <a:buNone/>
+                      </a:pPr>
+                      <a:r>
+                        <a:rPr lang="en-US" sz="900" b="1" dirty="0">
+                          <a:solidFill>
+                            <a:srgbClr val="CBD5E1"/>
+                          </a:solidFill>
+                        </a:rPr>
+                        <a:t>Difference</a:t>
+                      </a:r>
+                      <a:endParaRPr lang="en-US" sz="900" dirty="0"/>
+                    </a:p>
+                  </a:txBody>
+                  <a:tcPr>
+                    <a:lnL w="12700" cap="flat" cmpd="sng" algn="ctr">
+                      <a:solidFill>
+                        <a:srgbClr val="334155"/>
+                      </a:solidFill>
+                      <a:prstDash val="solid"/>
+                      <a:round/>
+                      <a:headEnd type="none" w="med" len="med"/>
+                      <a:tailEnd type="none" w="med" len="med"/>
+                    </a:lnL>
+                    <a:lnR w="12700" cap="flat" cmpd="sng" algn="ctr">
+                      <a:solidFill>
+                        <a:srgbClr val="334155"/>
+                      </a:solidFill>
+                      <a:prstDash val="solid"/>
+                      <a:round/>
+                      <a:headEnd type="none" w="med" len="med"/>
+                      <a:tailEnd type="none" w="med" len="med"/>
+                    </a:lnR>
+                    <a:lnT w="12700" cap="flat" cmpd="sng" algn="ctr">
+                      <a:solidFill>
+                        <a:srgbClr val="334155"/>
+                      </a:solidFill>
+                      <a:prstDash val="solid"/>
+                      <a:round/>
+                      <a:headEnd type="none" w="med" len="med"/>
+                      <a:tailEnd type="none" w="med" len="med"/>
+                    </a:lnT>
+                    <a:lnB w="12700" cap="flat" cmpd="sng" algn="ctr">
+                      <a:solidFill>
+                        <a:srgbClr val="334155"/>
+                      </a:solidFill>
+                      <a:prstDash val="solid"/>
+                      <a:round/>
+                      <a:headEnd type="none" w="med" len="med"/>
+                      <a:tailEnd type="none" w="med" len="med"/>
+                    </a:lnB>
+                    <a:solidFill>
+                      <a:srgbClr val="1E293B"/>
+                    </a:solidFill>
+                  </a:tcPr>
+                </a:tc>
+                <a:tc>
+                  <a:txBody>
+                    <a:bodyPr/>
+                    <a:lstStyle/>
+                    <a:p>
+                      <a:pPr marL="0" indent="0" algn="ctr">
+                        <a:buNone/>
+                      </a:pPr>
+                      <a:r>
+                        <a:rPr lang="en-US" sz="900" dirty="0">
+                          <a:solidFill>
+                            <a:srgbClr val="F87171"/>
+                          </a:solidFill>
+                          <a:latin typeface="Consolas" pitchFamily="34" charset="0"/>
+                          <a:ea typeface="Consolas" pitchFamily="34" charset="-122"/>
+                          <a:cs typeface="Consolas" pitchFamily="34" charset="-120"/>
+                        </a:rPr>
+                        <a:t>a - b</a:t>
+                      </a:r>
+                      <a:endParaRPr lang="en-US" sz="900" dirty="0">
+                        <a:latin typeface="Consolas" charset="0"/>
+                        <a:ea typeface="Consolas" charset="0"/>
+                        <a:cs typeface="Consolas" charset="0"/>
+                      </a:endParaRPr>
+                    </a:p>
+                  </a:txBody>
+                  <a:tcPr>
+                    <a:lnL w="12700" cap="flat" cmpd="sng" algn="ctr">
+                      <a:solidFill>
+                        <a:srgbClr val="334155"/>
+                      </a:solidFill>
+                      <a:prstDash val="solid"/>
+                      <a:round/>
+                      <a:headEnd type="none" w="med" len="med"/>
+                      <a:tailEnd type="none" w="med" len="med"/>
+                    </a:lnL>
+                    <a:lnR w="12700" cap="flat" cmpd="sng" algn="ctr">
+                      <a:solidFill>
+                        <a:srgbClr val="334155"/>
+                      </a:solidFill>
+                      <a:prstDash val="solid"/>
+                      <a:round/>
+                      <a:headEnd type="none" w="med" len="med"/>
+                      <a:tailEnd type="none" w="med" len="med"/>
+                    </a:lnR>
+                    <a:lnT w="12700" cap="flat" cmpd="sng" algn="ctr">
+                      <a:solidFill>
+                        <a:srgbClr val="334155"/>
+                      </a:solidFill>
+                      <a:prstDash val="solid"/>
+                      <a:round/>
+                      <a:headEnd type="none" w="med" len="med"/>
+                      <a:tailEnd type="none" w="med" len="med"/>
+                    </a:lnT>
+                    <a:lnB w="12700" cap="flat" cmpd="sng" algn="ctr">
+                      <a:solidFill>
+                        <a:srgbClr val="334155"/>
+                      </a:solidFill>
+                      <a:prstDash val="solid"/>
+                      <a:round/>
+                      <a:headEnd type="none" w="med" len="med"/>
+                      <a:tailEnd type="none" w="med" len="med"/>
+                    </a:lnB>
+                    <a:solidFill>
+                      <a:srgbClr val="1E293B"/>
+                    </a:solidFill>
+                  </a:tcPr>
+                </a:tc>
+                <a:tc>
+                  <a:txBody>
+                    <a:bodyPr/>
+                    <a:lstStyle/>
+                    <a:p>
+                      <a:pPr marL="0" indent="0">
+                        <a:buNone/>
+                      </a:pPr>
+                      <a:r>
+                        <a:rPr lang="en-US" sz="850" dirty="0">
+                          <a:solidFill>
+                            <a:srgbClr val="F87171"/>
+                          </a:solidFill>
+                          <a:latin typeface="Consolas" pitchFamily="34" charset="0"/>
+                          <a:ea typeface="Consolas" pitchFamily="34" charset="-122"/>
+                          <a:cs typeface="Consolas" pitchFamily="34" charset="-120"/>
+                        </a:rPr>
+                        <a:t>a.difference(b)</a:t>
+                      </a:r>
+                      <a:endParaRPr lang="en-US" sz="850" dirty="0">
+                        <a:latin typeface="Consolas" charset="0"/>
+                        <a:ea typeface="Consolas" charset="0"/>
+                        <a:cs typeface="Consolas" charset="0"/>
+                      </a:endParaRPr>
+                    </a:p>
+                  </a:txBody>
+                  <a:tcPr>
+                    <a:lnL w="12700" cap="flat" cmpd="sng" algn="ctr">
+                      <a:solidFill>
+                        <a:srgbClr val="334155"/>
+                      </a:solidFill>
+                      <a:prstDash val="solid"/>
+                      <a:round/>
+                      <a:headEnd type="none" w="med" len="med"/>
+                      <a:tailEnd type="none" w="med" len="med"/>
+                    </a:lnL>
+                    <a:lnR w="12700" cap="flat" cmpd="sng" algn="ctr">
+                      <a:solidFill>
+                        <a:srgbClr val="334155"/>
+                      </a:solidFill>
+                      <a:prstDash val="solid"/>
+                      <a:round/>
+                      <a:headEnd type="none" w="med" len="med"/>
+                      <a:tailEnd type="none" w="med" len="med"/>
+                    </a:lnR>
+                    <a:lnT w="12700" cap="flat" cmpd="sng" algn="ctr">
+                      <a:solidFill>
+                        <a:srgbClr val="334155"/>
+                      </a:solidFill>
+                      <a:prstDash val="solid"/>
+                      <a:round/>
+                      <a:headEnd type="none" w="med" len="med"/>
+                      <a:tailEnd type="none" w="med" len="med"/>
+                    </a:lnT>
+                    <a:lnB w="12700" cap="flat" cmpd="sng" algn="ctr">
+                      <a:solidFill>
+                        <a:srgbClr val="334155"/>
+                      </a:solidFill>
+                      <a:prstDash val="solid"/>
+                      <a:round/>
+                      <a:headEnd type="none" w="med" len="med"/>
+                      <a:tailEnd type="none" w="med" len="med"/>
+                    </a:lnB>
+                    <a:solidFill>
+                      <a:srgbClr val="1E293B"/>
+                    </a:solidFill>
+                  </a:tcPr>
+                </a:tc>
+                <a:tc>
+                  <a:txBody>
+                    <a:bodyPr/>
+                    <a:lstStyle/>
+                    <a:p>
+                      <a:pPr marL="0" indent="0">
+                        <a:buNone/>
+                      </a:pPr>
+                      <a:r>
+                        <a:rPr lang="en-US" sz="900" dirty="0">
+                          <a:solidFill>
+                            <a:srgbClr val="64748B"/>
+                          </a:solidFill>
+                        </a:rPr>
+                        <a:t>In a but NOT in b</a:t>
+                      </a:r>
+                      <a:endParaRPr lang="en-US" sz="900" dirty="0"/>
+                    </a:p>
+                  </a:txBody>
+                  <a:tcPr>
+                    <a:lnL w="12700" cap="flat" cmpd="sng" algn="ctr">
+                      <a:solidFill>
+                        <a:srgbClr val="334155"/>
+                      </a:solidFill>
+                      <a:prstDash val="solid"/>
+                      <a:round/>
+                      <a:headEnd type="none" w="med" len="med"/>
+                      <a:tailEnd type="none" w="med" len="med"/>
+                    </a:lnL>
+                    <a:lnR w="12700" cap="flat" cmpd="sng" algn="ctr">
+                      <a:solidFill>
+                        <a:srgbClr val="334155"/>
+                      </a:solidFill>
+                      <a:prstDash val="solid"/>
+                      <a:round/>
+                      <a:headEnd type="none" w="med" len="med"/>
+                      <a:tailEnd type="none" w="med" len="med"/>
+                    </a:lnR>
+                    <a:lnT w="12700" cap="flat" cmpd="sng" algn="ctr">
+                      <a:solidFill>
+                        <a:srgbClr val="334155"/>
+                      </a:solidFill>
+                      <a:prstDash val="solid"/>
+                      <a:round/>
+                      <a:headEnd type="none" w="med" len="med"/>
+                      <a:tailEnd type="none" w="med" len="med"/>
+                    </a:lnT>
+                    <a:lnB w="12700" cap="flat" cmpd="sng" algn="ctr">
+                      <a:solidFill>
+                        <a:srgbClr val="334155"/>
+                      </a:solidFill>
+                      <a:prstDash val="solid"/>
+                      <a:round/>
+                      <a:headEnd type="none" w="med" len="med"/>
+                      <a:tailEnd type="none" w="med" len="med"/>
+                    </a:lnB>
+                    <a:solidFill>
+                      <a:srgbClr val="1E293B"/>
+                    </a:solidFill>
+                  </a:tcPr>
+                </a:tc>
+                <a:extLst>
+                  <a:ext uri="{0D108BD9-81ED-4DB2-BD59-A6C34878D82A}">
+                    <a16:rowId xmlns:a16="http://schemas.microsoft.com/office/drawing/2014/main" val="10003"/>
+                  </a:ext>
+                </a:extLst>
+              </a:tr>
+              <a:tr h="336190">
+                <a:tc>
+                  <a:txBody>
+                    <a:bodyPr/>
+                    <a:lstStyle/>
+                    <a:p>
+                      <a:pPr marL="0" indent="0">
+                        <a:buNone/>
+                      </a:pPr>
+                      <a:r>
+                        <a:rPr lang="en-US" sz="900" b="1" dirty="0">
+                          <a:solidFill>
+                            <a:srgbClr val="CBD5E1"/>
+                          </a:solidFill>
+                        </a:rPr>
+                        <a:t>Sym. Difference</a:t>
+                      </a:r>
+                      <a:endParaRPr lang="en-US" sz="900" dirty="0"/>
+                    </a:p>
+                  </a:txBody>
+                  <a:tcPr>
+                    <a:lnL w="12700" cap="flat" cmpd="sng" algn="ctr">
+                      <a:solidFill>
+                        <a:srgbClr val="334155"/>
+                      </a:solidFill>
+                      <a:prstDash val="solid"/>
+                      <a:round/>
+                      <a:headEnd type="none" w="med" len="med"/>
+                      <a:tailEnd type="none" w="med" len="med"/>
+                    </a:lnL>
+                    <a:lnR w="12700" cap="flat" cmpd="sng" algn="ctr">
+                      <a:solidFill>
+                        <a:srgbClr val="334155"/>
+                      </a:solidFill>
+                      <a:prstDash val="solid"/>
+                      <a:round/>
+                      <a:headEnd type="none" w="med" len="med"/>
+                      <a:tailEnd type="none" w="med" len="med"/>
+                    </a:lnR>
+                    <a:lnT w="12700" cap="flat" cmpd="sng" algn="ctr">
+                      <a:solidFill>
+                        <a:srgbClr val="334155"/>
+                      </a:solidFill>
+                      <a:prstDash val="solid"/>
+                      <a:round/>
+                      <a:headEnd type="none" w="med" len="med"/>
+                      <a:tailEnd type="none" w="med" len="med"/>
+                    </a:lnT>
+                    <a:lnB w="12700" cap="flat" cmpd="sng" algn="ctr">
+                      <a:solidFill>
+                        <a:srgbClr val="334155"/>
+                      </a:solidFill>
+                      <a:prstDash val="solid"/>
+                      <a:round/>
+                      <a:headEnd type="none" w="med" len="med"/>
+                      <a:tailEnd type="none" w="med" len="med"/>
+                    </a:lnB>
+                    <a:solidFill>
+                      <a:srgbClr val="162032"/>
+                    </a:solidFill>
+                  </a:tcPr>
+                </a:tc>
+                <a:tc>
+                  <a:txBody>
+                    <a:bodyPr/>
+                    <a:lstStyle/>
+                    <a:p>
+                      <a:pPr marL="0" indent="0" algn="ctr">
+                        <a:buNone/>
+                      </a:pPr>
+                      <a:r>
+                        <a:rPr lang="en-US" sz="900" dirty="0">
+                          <a:solidFill>
+                            <a:srgbClr val="F87171"/>
+                          </a:solidFill>
+                          <a:latin typeface="Consolas" pitchFamily="34" charset="0"/>
+                          <a:ea typeface="Consolas" pitchFamily="34" charset="-122"/>
+                          <a:cs typeface="Consolas" pitchFamily="34" charset="-120"/>
+                        </a:rPr>
+                        <a:t>a ^ b</a:t>
+                      </a:r>
+                      <a:endParaRPr lang="en-US" sz="900" dirty="0">
+                        <a:latin typeface="Consolas" charset="0"/>
+                        <a:ea typeface="Consolas" charset="0"/>
+                        <a:cs typeface="Consolas" charset="0"/>
+                      </a:endParaRPr>
+                    </a:p>
+                  </a:txBody>
+                  <a:tcPr>
+                    <a:lnL w="12700" cap="flat" cmpd="sng" algn="ctr">
+                      <a:solidFill>
+                        <a:srgbClr val="334155"/>
+                      </a:solidFill>
+                      <a:prstDash val="solid"/>
+                      <a:round/>
+                      <a:headEnd type="none" w="med" len="med"/>
+                      <a:tailEnd type="none" w="med" len="med"/>
+                    </a:lnL>
+                    <a:lnR w="12700" cap="flat" cmpd="sng" algn="ctr">
+                      <a:solidFill>
+                        <a:srgbClr val="334155"/>
+                      </a:solidFill>
+                      <a:prstDash val="solid"/>
+                      <a:round/>
+                      <a:headEnd type="none" w="med" len="med"/>
+                      <a:tailEnd type="none" w="med" len="med"/>
+                    </a:lnR>
+                    <a:lnT w="12700" cap="flat" cmpd="sng" algn="ctr">
+                      <a:solidFill>
+                        <a:srgbClr val="334155"/>
+                      </a:solidFill>
+                      <a:prstDash val="solid"/>
+                      <a:round/>
+                      <a:headEnd type="none" w="med" len="med"/>
+                      <a:tailEnd type="none" w="med" len="med"/>
+                    </a:lnT>
+                    <a:lnB w="12700" cap="flat" cmpd="sng" algn="ctr">
+                      <a:solidFill>
+                        <a:srgbClr val="334155"/>
+                      </a:solidFill>
+                      <a:prstDash val="solid"/>
+                      <a:round/>
+                      <a:headEnd type="none" w="med" len="med"/>
+                      <a:tailEnd type="none" w="med" len="med"/>
+                    </a:lnB>
+                    <a:solidFill>
+                      <a:srgbClr val="162032"/>
+                    </a:solidFill>
+                  </a:tcPr>
+                </a:tc>
+                <a:tc>
+                  <a:txBody>
+                    <a:bodyPr/>
+                    <a:lstStyle/>
+                    <a:p>
+                      <a:pPr marL="0" indent="0">
+                        <a:buNone/>
+                      </a:pPr>
+                      <a:r>
+                        <a:rPr lang="en-US" sz="850" dirty="0">
+                          <a:solidFill>
+                            <a:srgbClr val="F87171"/>
+                          </a:solidFill>
+                          <a:latin typeface="Consolas" pitchFamily="34" charset="0"/>
+                          <a:ea typeface="Consolas" pitchFamily="34" charset="-122"/>
+                          <a:cs typeface="Consolas" pitchFamily="34" charset="-120"/>
+                        </a:rPr>
+                        <a:t>a.symmetric_difference(b)</a:t>
+                      </a:r>
+                      <a:endParaRPr lang="en-US" sz="850" dirty="0">
+                        <a:latin typeface="Consolas" charset="0"/>
+                        <a:ea typeface="Consolas" charset="0"/>
+                        <a:cs typeface="Consolas" charset="0"/>
+                      </a:endParaRPr>
+                    </a:p>
+                  </a:txBody>
+                  <a:tcPr>
+                    <a:lnL w="12700" cap="flat" cmpd="sng" algn="ctr">
+                      <a:solidFill>
+                        <a:srgbClr val="334155"/>
+                      </a:solidFill>
+                      <a:prstDash val="solid"/>
+                      <a:round/>
+                      <a:headEnd type="none" w="med" len="med"/>
+                      <a:tailEnd type="none" w="med" len="med"/>
+                    </a:lnL>
+                    <a:lnR w="12700" cap="flat" cmpd="sng" algn="ctr">
+                      <a:solidFill>
+                        <a:srgbClr val="334155"/>
+                      </a:solidFill>
+                      <a:prstDash val="solid"/>
+                      <a:round/>
+                      <a:headEnd type="none" w="med" len="med"/>
+                      <a:tailEnd type="none" w="med" len="med"/>
+                    </a:lnR>
+                    <a:lnT w="12700" cap="flat" cmpd="sng" algn="ctr">
+                      <a:solidFill>
+                        <a:srgbClr val="334155"/>
+                      </a:solidFill>
+                      <a:prstDash val="solid"/>
+                      <a:round/>
+                      <a:headEnd type="none" w="med" len="med"/>
+                      <a:tailEnd type="none" w="med" len="med"/>
+                    </a:lnT>
+                    <a:lnB w="12700" cap="flat" cmpd="sng" algn="ctr">
+                      <a:solidFill>
+                        <a:srgbClr val="334155"/>
+                      </a:solidFill>
+                      <a:prstDash val="solid"/>
+                      <a:round/>
+                      <a:headEnd type="none" w="med" len="med"/>
+                      <a:tailEnd type="none" w="med" len="med"/>
+                    </a:lnB>
+                    <a:solidFill>
+                      <a:srgbClr val="162032"/>
+                    </a:solidFill>
+                  </a:tcPr>
+                </a:tc>
+                <a:tc>
+                  <a:txBody>
+                    <a:bodyPr/>
+                    <a:lstStyle/>
+                    <a:p>
+                      <a:pPr marL="0" indent="0">
+                        <a:buNone/>
+                      </a:pPr>
+                      <a:r>
+                        <a:rPr lang="en-US" sz="900" dirty="0">
+                          <a:solidFill>
+                            <a:srgbClr val="64748B"/>
+                          </a:solidFill>
+                        </a:rPr>
+                        <a:t>In either but NOT both</a:t>
+                      </a:r>
+                      <a:endParaRPr lang="en-US" sz="900" dirty="0"/>
+                    </a:p>
+                  </a:txBody>
+                  <a:tcPr>
+                    <a:lnL w="12700" cap="flat" cmpd="sng" algn="ctr">
+                      <a:solidFill>
+                        <a:srgbClr val="334155"/>
+                      </a:solidFill>
+                      <a:prstDash val="solid"/>
+                      <a:round/>
+                      <a:headEnd type="none" w="med" len="med"/>
+                      <a:tailEnd type="none" w="med" len="med"/>
+                    </a:lnL>
+                    <a:lnR w="12700" cap="flat" cmpd="sng" algn="ctr">
+                      <a:solidFill>
+                        <a:srgbClr val="334155"/>
+                      </a:solidFill>
+                      <a:prstDash val="solid"/>
+                      <a:round/>
+                      <a:headEnd type="none" w="med" len="med"/>
+                      <a:tailEnd type="none" w="med" len="med"/>
+                    </a:lnR>
+                    <a:lnT w="12700" cap="flat" cmpd="sng" algn="ctr">
+                      <a:solidFill>
+                        <a:srgbClr val="334155"/>
+                      </a:solidFill>
+                      <a:prstDash val="solid"/>
+                      <a:round/>
+                      <a:headEnd type="none" w="med" len="med"/>
+                      <a:tailEnd type="none" w="med" len="med"/>
+                    </a:lnT>
+                    <a:lnB w="12700" cap="flat" cmpd="sng" algn="ctr">
+                      <a:solidFill>
+                        <a:srgbClr val="334155"/>
+                      </a:solidFill>
+                      <a:prstDash val="solid"/>
+                      <a:round/>
+                      <a:headEnd type="none" w="med" len="med"/>
+                      <a:tailEnd type="none" w="med" len="med"/>
+                    </a:lnB>
+                    <a:solidFill>
+                      <a:srgbClr val="162032"/>
+                    </a:solidFill>
+                  </a:tcPr>
+                </a:tc>
+                <a:extLst>
+                  <a:ext uri="{0D108BD9-81ED-4DB2-BD59-A6C34878D82A}">
+                    <a16:rowId xmlns:a16="http://schemas.microsoft.com/office/drawing/2014/main" val="10004"/>
+                  </a:ext>
+                </a:extLst>
+              </a:tr>
+              <a:tr h="251848">
+                <a:tc>
+                  <a:txBody>
+                    <a:bodyPr/>
+                    <a:lstStyle/>
+                    <a:p>
+                      <a:pPr marL="0" indent="0">
+                        <a:buNone/>
+                      </a:pPr>
+                      <a:r>
+                        <a:rPr lang="en-US" sz="900" b="1" dirty="0">
+                          <a:solidFill>
+                            <a:srgbClr val="CBD5E1"/>
+                          </a:solidFill>
+                        </a:rPr>
+                        <a:t>Subset</a:t>
+                      </a:r>
+                      <a:endParaRPr lang="en-US" sz="900" dirty="0"/>
+                    </a:p>
+                  </a:txBody>
+                  <a:tcPr>
+                    <a:lnL w="12700" cap="flat" cmpd="sng" algn="ctr">
+                      <a:solidFill>
+                        <a:srgbClr val="334155"/>
+                      </a:solidFill>
+                      <a:prstDash val="solid"/>
+                      <a:round/>
+                      <a:headEnd type="none" w="med" len="med"/>
+                      <a:tailEnd type="none" w="med" len="med"/>
+                    </a:lnL>
+                    <a:lnR w="12700" cap="flat" cmpd="sng" algn="ctr">
+                      <a:solidFill>
+                        <a:srgbClr val="334155"/>
+                      </a:solidFill>
+                      <a:prstDash val="solid"/>
+                      <a:round/>
+                      <a:headEnd type="none" w="med" len="med"/>
+                      <a:tailEnd type="none" w="med" len="med"/>
+                    </a:lnR>
+                    <a:lnT w="12700" cap="flat" cmpd="sng" algn="ctr">
+                      <a:solidFill>
+                        <a:srgbClr val="334155"/>
+                      </a:solidFill>
+                      <a:prstDash val="solid"/>
+                      <a:round/>
+                      <a:headEnd type="none" w="med" len="med"/>
+                      <a:tailEnd type="none" w="med" len="med"/>
+                    </a:lnT>
+                    <a:lnB w="12700" cap="flat" cmpd="sng" algn="ctr">
+                      <a:solidFill>
+                        <a:srgbClr val="334155"/>
+                      </a:solidFill>
+                      <a:prstDash val="solid"/>
+                      <a:round/>
+                      <a:headEnd type="none" w="med" len="med"/>
+                      <a:tailEnd type="none" w="med" len="med"/>
+                    </a:lnB>
+                    <a:solidFill>
+                      <a:srgbClr val="1E293B"/>
+                    </a:solidFill>
+                  </a:tcPr>
+                </a:tc>
+                <a:tc>
+                  <a:txBody>
+                    <a:bodyPr/>
+                    <a:lstStyle/>
+                    <a:p>
+                      <a:pPr marL="0" indent="0" algn="ctr">
+                        <a:buNone/>
+                      </a:pPr>
+                      <a:r>
+                        <a:rPr lang="en-US" sz="900" dirty="0">
+                          <a:solidFill>
+                            <a:srgbClr val="F87171"/>
+                          </a:solidFill>
+                          <a:latin typeface="Consolas" pitchFamily="34" charset="0"/>
+                          <a:ea typeface="Consolas" pitchFamily="34" charset="-122"/>
+                          <a:cs typeface="Consolas" pitchFamily="34" charset="-120"/>
+                        </a:rPr>
+                        <a:t>a &lt;= b</a:t>
+                      </a:r>
+                      <a:endParaRPr lang="en-US" sz="900" dirty="0">
+                        <a:latin typeface="Consolas" charset="0"/>
+                        <a:ea typeface="Consolas" charset="0"/>
+                        <a:cs typeface="Consolas" charset="0"/>
+                      </a:endParaRPr>
+                    </a:p>
+                  </a:txBody>
+                  <a:tcPr>
+                    <a:lnL w="12700" cap="flat" cmpd="sng" algn="ctr">
+                      <a:solidFill>
+                        <a:srgbClr val="334155"/>
+                      </a:solidFill>
+                      <a:prstDash val="solid"/>
+                      <a:round/>
+                      <a:headEnd type="none" w="med" len="med"/>
+                      <a:tailEnd type="none" w="med" len="med"/>
+                    </a:lnL>
+                    <a:lnR w="12700" cap="flat" cmpd="sng" algn="ctr">
+                      <a:solidFill>
+                        <a:srgbClr val="334155"/>
+                      </a:solidFill>
+                      <a:prstDash val="solid"/>
+                      <a:round/>
+                      <a:headEnd type="none" w="med" len="med"/>
+                      <a:tailEnd type="none" w="med" len="med"/>
+                    </a:lnR>
+                    <a:lnT w="12700" cap="flat" cmpd="sng" algn="ctr">
+                      <a:solidFill>
+                        <a:srgbClr val="334155"/>
+                      </a:solidFill>
+                      <a:prstDash val="solid"/>
+                      <a:round/>
+                      <a:headEnd type="none" w="med" len="med"/>
+                      <a:tailEnd type="none" w="med" len="med"/>
+                    </a:lnT>
+                    <a:lnB w="12700" cap="flat" cmpd="sng" algn="ctr">
+                      <a:solidFill>
+                        <a:srgbClr val="334155"/>
+                      </a:solidFill>
+                      <a:prstDash val="solid"/>
+                      <a:round/>
+                      <a:headEnd type="none" w="med" len="med"/>
+                      <a:tailEnd type="none" w="med" len="med"/>
+                    </a:lnB>
+                    <a:solidFill>
+                      <a:srgbClr val="1E293B"/>
+                    </a:solidFill>
+                  </a:tcPr>
+                </a:tc>
+                <a:tc>
+                  <a:txBody>
+                    <a:bodyPr/>
+                    <a:lstStyle/>
+                    <a:p>
+                      <a:pPr marL="0" indent="0">
+                        <a:buNone/>
+                      </a:pPr>
+                      <a:r>
+                        <a:rPr lang="en-US" sz="850" dirty="0">
+                          <a:solidFill>
+                            <a:srgbClr val="F87171"/>
+                          </a:solidFill>
+                          <a:latin typeface="Consolas" pitchFamily="34" charset="0"/>
+                          <a:ea typeface="Consolas" pitchFamily="34" charset="-122"/>
+                          <a:cs typeface="Consolas" pitchFamily="34" charset="-120"/>
+                        </a:rPr>
+                        <a:t>a.issubset(b)</a:t>
+                      </a:r>
+                      <a:endParaRPr lang="en-US" sz="850" dirty="0">
+                        <a:latin typeface="Consolas" charset="0"/>
+                        <a:ea typeface="Consolas" charset="0"/>
+                        <a:cs typeface="Consolas" charset="0"/>
+                      </a:endParaRPr>
+                    </a:p>
+                  </a:txBody>
+                  <a:tcPr>
+                    <a:lnL w="12700" cap="flat" cmpd="sng" algn="ctr">
+                      <a:solidFill>
+                        <a:srgbClr val="334155"/>
+                      </a:solidFill>
+                      <a:prstDash val="solid"/>
+                      <a:round/>
+                      <a:headEnd type="none" w="med" len="med"/>
+                      <a:tailEnd type="none" w="med" len="med"/>
+                    </a:lnL>
+                    <a:lnR w="12700" cap="flat" cmpd="sng" algn="ctr">
+                      <a:solidFill>
+                        <a:srgbClr val="334155"/>
+                      </a:solidFill>
+                      <a:prstDash val="solid"/>
+                      <a:round/>
+                      <a:headEnd type="none" w="med" len="med"/>
+                      <a:tailEnd type="none" w="med" len="med"/>
+                    </a:lnR>
+                    <a:lnT w="12700" cap="flat" cmpd="sng" algn="ctr">
+                      <a:solidFill>
+                        <a:srgbClr val="334155"/>
+                      </a:solidFill>
+                      <a:prstDash val="solid"/>
+                      <a:round/>
+                      <a:headEnd type="none" w="med" len="med"/>
+                      <a:tailEnd type="none" w="med" len="med"/>
+                    </a:lnT>
+                    <a:lnB w="12700" cap="flat" cmpd="sng" algn="ctr">
+                      <a:solidFill>
+                        <a:srgbClr val="334155"/>
+                      </a:solidFill>
+                      <a:prstDash val="solid"/>
+                      <a:round/>
+                      <a:headEnd type="none" w="med" len="med"/>
+                      <a:tailEnd type="none" w="med" len="med"/>
+                    </a:lnB>
+                    <a:solidFill>
+                      <a:srgbClr val="1E293B"/>
+                    </a:solidFill>
+                  </a:tcPr>
+                </a:tc>
+                <a:tc>
+                  <a:txBody>
+                    <a:bodyPr/>
+                    <a:lstStyle/>
+                    <a:p>
+                      <a:pPr marL="0" indent="0">
+                        <a:buNone/>
+                      </a:pPr>
+                      <a:r>
+                        <a:rPr lang="en-US" sz="900" dirty="0">
+                          <a:solidFill>
+                            <a:srgbClr val="64748B"/>
+                          </a:solidFill>
+                        </a:rPr>
+                        <a:t>True if every a ∈ b</a:t>
+                      </a:r>
+                      <a:endParaRPr lang="en-US" sz="900" dirty="0"/>
+                    </a:p>
+                  </a:txBody>
+                  <a:tcPr>
+                    <a:lnL w="12700" cap="flat" cmpd="sng" algn="ctr">
+                      <a:solidFill>
+                        <a:srgbClr val="334155"/>
+                      </a:solidFill>
+                      <a:prstDash val="solid"/>
+                      <a:round/>
+                      <a:headEnd type="none" w="med" len="med"/>
+                      <a:tailEnd type="none" w="med" len="med"/>
+                    </a:lnL>
+                    <a:lnR w="12700" cap="flat" cmpd="sng" algn="ctr">
+                      <a:solidFill>
+                        <a:srgbClr val="334155"/>
+                      </a:solidFill>
+                      <a:prstDash val="solid"/>
+                      <a:round/>
+                      <a:headEnd type="none" w="med" len="med"/>
+                      <a:tailEnd type="none" w="med" len="med"/>
+                    </a:lnR>
+                    <a:lnT w="12700" cap="flat" cmpd="sng" algn="ctr">
+                      <a:solidFill>
+                        <a:srgbClr val="334155"/>
+                      </a:solidFill>
+                      <a:prstDash val="solid"/>
+                      <a:round/>
+                      <a:headEnd type="none" w="med" len="med"/>
+                      <a:tailEnd type="none" w="med" len="med"/>
+                    </a:lnT>
+                    <a:lnB w="12700" cap="flat" cmpd="sng" algn="ctr">
+                      <a:solidFill>
+                        <a:srgbClr val="334155"/>
+                      </a:solidFill>
+                      <a:prstDash val="solid"/>
+                      <a:round/>
+                      <a:headEnd type="none" w="med" len="med"/>
+                      <a:tailEnd type="none" w="med" len="med"/>
+                    </a:lnB>
+                    <a:solidFill>
+                      <a:srgbClr val="1E293B"/>
+                    </a:solidFill>
+                  </a:tcPr>
+                </a:tc>
+                <a:extLst>
+                  <a:ext uri="{0D108BD9-81ED-4DB2-BD59-A6C34878D82A}">
+                    <a16:rowId xmlns:a16="http://schemas.microsoft.com/office/drawing/2014/main" val="10005"/>
+                  </a:ext>
+                </a:extLst>
+              </a:tr>
+              <a:tr h="336190">
+                <a:tc>
+                  <a:txBody>
+                    <a:bodyPr/>
+                    <a:lstStyle/>
+                    <a:p>
+                      <a:pPr marL="0" indent="0">
+                        <a:buNone/>
+                      </a:pPr>
+                      <a:r>
+                        <a:rPr lang="en-US" sz="900" b="1" dirty="0">
+                          <a:solidFill>
+                            <a:srgbClr val="CBD5E1"/>
+                          </a:solidFill>
+                        </a:rPr>
+                        <a:t>Proper Subset</a:t>
+                      </a:r>
+                      <a:endParaRPr lang="en-US" sz="900" dirty="0"/>
+                    </a:p>
+                  </a:txBody>
+                  <a:tcPr>
+                    <a:lnL w="12700" cap="flat" cmpd="sng" algn="ctr">
+                      <a:solidFill>
+                        <a:srgbClr val="334155"/>
+                      </a:solidFill>
+                      <a:prstDash val="solid"/>
+                      <a:round/>
+                      <a:headEnd type="none" w="med" len="med"/>
+                      <a:tailEnd type="none" w="med" len="med"/>
+                    </a:lnL>
+                    <a:lnR w="12700" cap="flat" cmpd="sng" algn="ctr">
+                      <a:solidFill>
+                        <a:srgbClr val="334155"/>
+                      </a:solidFill>
+                      <a:prstDash val="solid"/>
+                      <a:round/>
+                      <a:headEnd type="none" w="med" len="med"/>
+                      <a:tailEnd type="none" w="med" len="med"/>
+                    </a:lnR>
+                    <a:lnT w="12700" cap="flat" cmpd="sng" algn="ctr">
+                      <a:solidFill>
+                        <a:srgbClr val="334155"/>
+                      </a:solidFill>
+                      <a:prstDash val="solid"/>
+                      <a:round/>
+                      <a:headEnd type="none" w="med" len="med"/>
+                      <a:tailEnd type="none" w="med" len="med"/>
+                    </a:lnT>
+                    <a:lnB w="12700" cap="flat" cmpd="sng" algn="ctr">
+                      <a:solidFill>
+                        <a:srgbClr val="334155"/>
+                      </a:solidFill>
+                      <a:prstDash val="solid"/>
+                      <a:round/>
+                      <a:headEnd type="none" w="med" len="med"/>
+                      <a:tailEnd type="none" w="med" len="med"/>
+                    </a:lnB>
+                    <a:solidFill>
+                      <a:srgbClr val="162032"/>
+                    </a:solidFill>
+                  </a:tcPr>
+                </a:tc>
+                <a:tc>
+                  <a:txBody>
+                    <a:bodyPr/>
+                    <a:lstStyle/>
+                    <a:p>
+                      <a:pPr marL="0" indent="0" algn="ctr">
+                        <a:buNone/>
+                      </a:pPr>
+                      <a:r>
+                        <a:rPr lang="en-US" sz="900" dirty="0">
+                          <a:solidFill>
+                            <a:srgbClr val="F87171"/>
+                          </a:solidFill>
+                          <a:latin typeface="Consolas" pitchFamily="34" charset="0"/>
+                          <a:ea typeface="Consolas" pitchFamily="34" charset="-122"/>
+                          <a:cs typeface="Consolas" pitchFamily="34" charset="-120"/>
+                        </a:rPr>
+                        <a:t>a &lt; b</a:t>
+                      </a:r>
+                      <a:endParaRPr lang="en-US" sz="900" dirty="0">
+                        <a:latin typeface="Consolas" charset="0"/>
+                        <a:ea typeface="Consolas" charset="0"/>
+                        <a:cs typeface="Consolas" charset="0"/>
+                      </a:endParaRPr>
+                    </a:p>
+                  </a:txBody>
+                  <a:tcPr>
+                    <a:lnL w="12700" cap="flat" cmpd="sng" algn="ctr">
+                      <a:solidFill>
+                        <a:srgbClr val="334155"/>
+                      </a:solidFill>
+                      <a:prstDash val="solid"/>
+                      <a:round/>
+                      <a:headEnd type="none" w="med" len="med"/>
+                      <a:tailEnd type="none" w="med" len="med"/>
+                    </a:lnL>
+                    <a:lnR w="12700" cap="flat" cmpd="sng" algn="ctr">
+                      <a:solidFill>
+                        <a:srgbClr val="334155"/>
+                      </a:solidFill>
+                      <a:prstDash val="solid"/>
+                      <a:round/>
+                      <a:headEnd type="none" w="med" len="med"/>
+                      <a:tailEnd type="none" w="med" len="med"/>
+                    </a:lnR>
+                    <a:lnT w="12700" cap="flat" cmpd="sng" algn="ctr">
+                      <a:solidFill>
+                        <a:srgbClr val="334155"/>
+                      </a:solidFill>
+                      <a:prstDash val="solid"/>
+                      <a:round/>
+                      <a:headEnd type="none" w="med" len="med"/>
+                      <a:tailEnd type="none" w="med" len="med"/>
+                    </a:lnT>
+                    <a:lnB w="12700" cap="flat" cmpd="sng" algn="ctr">
+                      <a:solidFill>
+                        <a:srgbClr val="334155"/>
+                      </a:solidFill>
+                      <a:prstDash val="solid"/>
+                      <a:round/>
+                      <a:headEnd type="none" w="med" len="med"/>
+                      <a:tailEnd type="none" w="med" len="med"/>
+                    </a:lnB>
+                    <a:solidFill>
+                      <a:srgbClr val="162032"/>
+                    </a:solidFill>
+                  </a:tcPr>
+                </a:tc>
+                <a:tc>
+                  <a:txBody>
+                    <a:bodyPr/>
+                    <a:lstStyle/>
+                    <a:p>
+                      <a:pPr marL="0" indent="0">
+                        <a:buNone/>
+                      </a:pPr>
+                      <a:r>
+                        <a:rPr lang="en-US" sz="850" dirty="0">
+                          <a:solidFill>
+                            <a:srgbClr val="F87171"/>
+                          </a:solidFill>
+                          <a:latin typeface="Consolas" pitchFamily="34" charset="0"/>
+                          <a:ea typeface="Consolas" pitchFamily="34" charset="-122"/>
+                          <a:cs typeface="Consolas" pitchFamily="34" charset="-120"/>
+                        </a:rPr>
+                        <a:t>—</a:t>
+                      </a:r>
+                      <a:endParaRPr lang="en-US" sz="850" dirty="0">
+                        <a:latin typeface="Consolas" charset="0"/>
+                        <a:ea typeface="Consolas" charset="0"/>
+                        <a:cs typeface="Consolas" charset="0"/>
+                      </a:endParaRPr>
+                    </a:p>
+                  </a:txBody>
+                  <a:tcPr>
+                    <a:lnL w="12700" cap="flat" cmpd="sng" algn="ctr">
+                      <a:solidFill>
+                        <a:srgbClr val="334155"/>
+                      </a:solidFill>
+                      <a:prstDash val="solid"/>
+                      <a:round/>
+                      <a:headEnd type="none" w="med" len="med"/>
+                      <a:tailEnd type="none" w="med" len="med"/>
+                    </a:lnL>
+                    <a:lnR w="12700" cap="flat" cmpd="sng" algn="ctr">
+                      <a:solidFill>
+                        <a:srgbClr val="334155"/>
+                      </a:solidFill>
+                      <a:prstDash val="solid"/>
+                      <a:round/>
+                      <a:headEnd type="none" w="med" len="med"/>
+                      <a:tailEnd type="none" w="med" len="med"/>
+                    </a:lnR>
+                    <a:lnT w="12700" cap="flat" cmpd="sng" algn="ctr">
+                      <a:solidFill>
+                        <a:srgbClr val="334155"/>
+                      </a:solidFill>
+                      <a:prstDash val="solid"/>
+                      <a:round/>
+                      <a:headEnd type="none" w="med" len="med"/>
+                      <a:tailEnd type="none" w="med" len="med"/>
+                    </a:lnT>
+                    <a:lnB w="12700" cap="flat" cmpd="sng" algn="ctr">
+                      <a:solidFill>
+                        <a:srgbClr val="334155"/>
+                      </a:solidFill>
+                      <a:prstDash val="solid"/>
+                      <a:round/>
+                      <a:headEnd type="none" w="med" len="med"/>
+                      <a:tailEnd type="none" w="med" len="med"/>
+                    </a:lnB>
+                    <a:solidFill>
+                      <a:srgbClr val="162032"/>
+                    </a:solidFill>
+                  </a:tcPr>
+                </a:tc>
+                <a:tc>
+                  <a:txBody>
+                    <a:bodyPr/>
+                    <a:lstStyle/>
+                    <a:p>
+                      <a:pPr marL="0" indent="0">
+                        <a:buNone/>
+                      </a:pPr>
+                      <a:r>
+                        <a:rPr lang="en-US" sz="900" dirty="0">
+                          <a:solidFill>
+                            <a:srgbClr val="64748B"/>
+                          </a:solidFill>
+                        </a:rPr>
+                        <a:t>True if a ⊂ b  and  a ≠ b</a:t>
+                      </a:r>
+                      <a:endParaRPr lang="en-US" sz="900" dirty="0"/>
+                    </a:p>
+                  </a:txBody>
+                  <a:tcPr>
+                    <a:lnL w="12700" cap="flat" cmpd="sng" algn="ctr">
+                      <a:solidFill>
+                        <a:srgbClr val="334155"/>
+                      </a:solidFill>
+                      <a:prstDash val="solid"/>
+                      <a:round/>
+                      <a:headEnd type="none" w="med" len="med"/>
+                      <a:tailEnd type="none" w="med" len="med"/>
+                    </a:lnL>
+                    <a:lnR w="12700" cap="flat" cmpd="sng" algn="ctr">
+                      <a:solidFill>
+                        <a:srgbClr val="334155"/>
+                      </a:solidFill>
+                      <a:prstDash val="solid"/>
+                      <a:round/>
+                      <a:headEnd type="none" w="med" len="med"/>
+                      <a:tailEnd type="none" w="med" len="med"/>
+                    </a:lnR>
+                    <a:lnT w="12700" cap="flat" cmpd="sng" algn="ctr">
+                      <a:solidFill>
+                        <a:srgbClr val="334155"/>
+                      </a:solidFill>
+                      <a:prstDash val="solid"/>
+                      <a:round/>
+                      <a:headEnd type="none" w="med" len="med"/>
+                      <a:tailEnd type="none" w="med" len="med"/>
+                    </a:lnT>
+                    <a:lnB w="12700" cap="flat" cmpd="sng" algn="ctr">
+                      <a:solidFill>
+                        <a:srgbClr val="334155"/>
+                      </a:solidFill>
+                      <a:prstDash val="solid"/>
+                      <a:round/>
+                      <a:headEnd type="none" w="med" len="med"/>
+                      <a:tailEnd type="none" w="med" len="med"/>
+                    </a:lnB>
+                    <a:solidFill>
+                      <a:srgbClr val="162032"/>
+                    </a:solidFill>
+                  </a:tcPr>
+                </a:tc>
+                <a:extLst>
+                  <a:ext uri="{0D108BD9-81ED-4DB2-BD59-A6C34878D82A}">
+                    <a16:rowId xmlns:a16="http://schemas.microsoft.com/office/drawing/2014/main" val="10006"/>
+                  </a:ext>
+                </a:extLst>
+              </a:tr>
+              <a:tr h="251848">
+                <a:tc>
+                  <a:txBody>
+                    <a:bodyPr/>
+                    <a:lstStyle/>
+                    <a:p>
+                      <a:pPr marL="0" indent="0">
+                        <a:buNone/>
+                      </a:pPr>
+                      <a:r>
+                        <a:rPr lang="en-US" sz="900" b="1" dirty="0">
+                          <a:solidFill>
+                            <a:srgbClr val="CBD5E1"/>
+                          </a:solidFill>
+                        </a:rPr>
+                        <a:t>Superset</a:t>
+                      </a:r>
+                      <a:endParaRPr lang="en-US" sz="900" dirty="0"/>
+                    </a:p>
+                  </a:txBody>
+                  <a:tcPr>
+                    <a:lnL w="12700" cap="flat" cmpd="sng" algn="ctr">
+                      <a:solidFill>
+                        <a:srgbClr val="334155"/>
+                      </a:solidFill>
+                      <a:prstDash val="solid"/>
+                      <a:round/>
+                      <a:headEnd type="none" w="med" len="med"/>
+                      <a:tailEnd type="none" w="med" len="med"/>
+                    </a:lnL>
+                    <a:lnR w="12700" cap="flat" cmpd="sng" algn="ctr">
+                      <a:solidFill>
+                        <a:srgbClr val="334155"/>
+                      </a:solidFill>
+                      <a:prstDash val="solid"/>
+                      <a:round/>
+                      <a:headEnd type="none" w="med" len="med"/>
+                      <a:tailEnd type="none" w="med" len="med"/>
+                    </a:lnR>
+                    <a:lnT w="12700" cap="flat" cmpd="sng" algn="ctr">
+                      <a:solidFill>
+                        <a:srgbClr val="334155"/>
+                      </a:solidFill>
+                      <a:prstDash val="solid"/>
+                      <a:round/>
+                      <a:headEnd type="none" w="med" len="med"/>
+                      <a:tailEnd type="none" w="med" len="med"/>
+                    </a:lnT>
+                    <a:lnB w="12700" cap="flat" cmpd="sng" algn="ctr">
+                      <a:solidFill>
+                        <a:srgbClr val="334155"/>
+                      </a:solidFill>
+                      <a:prstDash val="solid"/>
+                      <a:round/>
+                      <a:headEnd type="none" w="med" len="med"/>
+                      <a:tailEnd type="none" w="med" len="med"/>
+                    </a:lnB>
+                    <a:solidFill>
+                      <a:srgbClr val="1E293B"/>
+                    </a:solidFill>
+                  </a:tcPr>
+                </a:tc>
+                <a:tc>
+                  <a:txBody>
+                    <a:bodyPr/>
+                    <a:lstStyle/>
+                    <a:p>
+                      <a:pPr marL="0" indent="0" algn="ctr">
+                        <a:buNone/>
+                      </a:pPr>
+                      <a:r>
+                        <a:rPr lang="en-US" sz="900" dirty="0">
+                          <a:solidFill>
+                            <a:srgbClr val="F87171"/>
+                          </a:solidFill>
+                          <a:latin typeface="Consolas" pitchFamily="34" charset="0"/>
+                          <a:ea typeface="Consolas" pitchFamily="34" charset="-122"/>
+                          <a:cs typeface="Consolas" pitchFamily="34" charset="-120"/>
+                        </a:rPr>
+                        <a:t>a &gt;= b</a:t>
+                      </a:r>
+                      <a:endParaRPr lang="en-US" sz="900" dirty="0">
+                        <a:latin typeface="Consolas" charset="0"/>
+                        <a:ea typeface="Consolas" charset="0"/>
+                        <a:cs typeface="Consolas" charset="0"/>
+                      </a:endParaRPr>
+                    </a:p>
+                  </a:txBody>
+                  <a:tcPr>
+                    <a:lnL w="12700" cap="flat" cmpd="sng" algn="ctr">
+                      <a:solidFill>
+                        <a:srgbClr val="334155"/>
+                      </a:solidFill>
+                      <a:prstDash val="solid"/>
+                      <a:round/>
+                      <a:headEnd type="none" w="med" len="med"/>
+                      <a:tailEnd type="none" w="med" len="med"/>
+                    </a:lnL>
+                    <a:lnR w="12700" cap="flat" cmpd="sng" algn="ctr">
+                      <a:solidFill>
+                        <a:srgbClr val="334155"/>
+                      </a:solidFill>
+                      <a:prstDash val="solid"/>
+                      <a:round/>
+                      <a:headEnd type="none" w="med" len="med"/>
+                      <a:tailEnd type="none" w="med" len="med"/>
+                    </a:lnR>
+                    <a:lnT w="12700" cap="flat" cmpd="sng" algn="ctr">
+                      <a:solidFill>
+                        <a:srgbClr val="334155"/>
+                      </a:solidFill>
+                      <a:prstDash val="solid"/>
+                      <a:round/>
+                      <a:headEnd type="none" w="med" len="med"/>
+                      <a:tailEnd type="none" w="med" len="med"/>
+                    </a:lnT>
+                    <a:lnB w="12700" cap="flat" cmpd="sng" algn="ctr">
+                      <a:solidFill>
+                        <a:srgbClr val="334155"/>
+                      </a:solidFill>
+                      <a:prstDash val="solid"/>
+                      <a:round/>
+                      <a:headEnd type="none" w="med" len="med"/>
+                      <a:tailEnd type="none" w="med" len="med"/>
+                    </a:lnB>
+                    <a:solidFill>
+                      <a:srgbClr val="1E293B"/>
+                    </a:solidFill>
+                  </a:tcPr>
+                </a:tc>
+                <a:tc>
+                  <a:txBody>
+                    <a:bodyPr/>
+                    <a:lstStyle/>
+                    <a:p>
+                      <a:pPr marL="0" indent="0">
+                        <a:buNone/>
+                      </a:pPr>
+                      <a:r>
+                        <a:rPr lang="en-US" sz="850" dirty="0">
+                          <a:solidFill>
+                            <a:srgbClr val="F87171"/>
+                          </a:solidFill>
+                          <a:latin typeface="Consolas" pitchFamily="34" charset="0"/>
+                          <a:ea typeface="Consolas" pitchFamily="34" charset="-122"/>
+                          <a:cs typeface="Consolas" pitchFamily="34" charset="-120"/>
+                        </a:rPr>
+                        <a:t>a.issuperset(b)</a:t>
+                      </a:r>
+                      <a:endParaRPr lang="en-US" sz="850" dirty="0">
+                        <a:latin typeface="Consolas" charset="0"/>
+                        <a:ea typeface="Consolas" charset="0"/>
+                        <a:cs typeface="Consolas" charset="0"/>
+                      </a:endParaRPr>
+                    </a:p>
+                  </a:txBody>
+                  <a:tcPr>
+                    <a:lnL w="12700" cap="flat" cmpd="sng" algn="ctr">
+                      <a:solidFill>
+                        <a:srgbClr val="334155"/>
+                      </a:solidFill>
+                      <a:prstDash val="solid"/>
+                      <a:round/>
+                      <a:headEnd type="none" w="med" len="med"/>
+                      <a:tailEnd type="none" w="med" len="med"/>
+                    </a:lnL>
+                    <a:lnR w="12700" cap="flat" cmpd="sng" algn="ctr">
+                      <a:solidFill>
+                        <a:srgbClr val="334155"/>
+                      </a:solidFill>
+                      <a:prstDash val="solid"/>
+                      <a:round/>
+                      <a:headEnd type="none" w="med" len="med"/>
+                      <a:tailEnd type="none" w="med" len="med"/>
+                    </a:lnR>
+                    <a:lnT w="12700" cap="flat" cmpd="sng" algn="ctr">
+                      <a:solidFill>
+                        <a:srgbClr val="334155"/>
+                      </a:solidFill>
+                      <a:prstDash val="solid"/>
+                      <a:round/>
+                      <a:headEnd type="none" w="med" len="med"/>
+                      <a:tailEnd type="none" w="med" len="med"/>
+                    </a:lnT>
+                    <a:lnB w="12700" cap="flat" cmpd="sng" algn="ctr">
+                      <a:solidFill>
+                        <a:srgbClr val="334155"/>
+                      </a:solidFill>
+                      <a:prstDash val="solid"/>
+                      <a:round/>
+                      <a:headEnd type="none" w="med" len="med"/>
+                      <a:tailEnd type="none" w="med" len="med"/>
+                    </a:lnB>
+                    <a:solidFill>
+                      <a:srgbClr val="1E293B"/>
+                    </a:solidFill>
+                  </a:tcPr>
+                </a:tc>
+                <a:tc>
+                  <a:txBody>
+                    <a:bodyPr/>
+                    <a:lstStyle/>
+                    <a:p>
+                      <a:pPr marL="0" indent="0">
+                        <a:buNone/>
+                      </a:pPr>
+                      <a:r>
+                        <a:rPr lang="en-US" sz="900" dirty="0">
+                          <a:solidFill>
+                            <a:srgbClr val="64748B"/>
+                          </a:solidFill>
+                        </a:rPr>
+                        <a:t>True if b ⊆ a</a:t>
+                      </a:r>
+                      <a:endParaRPr lang="en-US" sz="900" dirty="0"/>
+                    </a:p>
+                  </a:txBody>
+                  <a:tcPr>
+                    <a:lnL w="12700" cap="flat" cmpd="sng" algn="ctr">
+                      <a:solidFill>
+                        <a:srgbClr val="334155"/>
+                      </a:solidFill>
+                      <a:prstDash val="solid"/>
+                      <a:round/>
+                      <a:headEnd type="none" w="med" len="med"/>
+                      <a:tailEnd type="none" w="med" len="med"/>
+                    </a:lnL>
+                    <a:lnR w="12700" cap="flat" cmpd="sng" algn="ctr">
+                      <a:solidFill>
+                        <a:srgbClr val="334155"/>
+                      </a:solidFill>
+                      <a:prstDash val="solid"/>
+                      <a:round/>
+                      <a:headEnd type="none" w="med" len="med"/>
+                      <a:tailEnd type="none" w="med" len="med"/>
+                    </a:lnR>
+                    <a:lnT w="12700" cap="flat" cmpd="sng" algn="ctr">
+                      <a:solidFill>
+                        <a:srgbClr val="334155"/>
+                      </a:solidFill>
+                      <a:prstDash val="solid"/>
+                      <a:round/>
+                      <a:headEnd type="none" w="med" len="med"/>
+                      <a:tailEnd type="none" w="med" len="med"/>
+                    </a:lnT>
+                    <a:lnB w="12700" cap="flat" cmpd="sng" algn="ctr">
+                      <a:solidFill>
+                        <a:srgbClr val="334155"/>
+                      </a:solidFill>
+                      <a:prstDash val="solid"/>
+                      <a:round/>
+                      <a:headEnd type="none" w="med" len="med"/>
+                      <a:tailEnd type="none" w="med" len="med"/>
+                    </a:lnB>
+                    <a:solidFill>
+                      <a:srgbClr val="1E293B"/>
+                    </a:solidFill>
+                  </a:tcPr>
+                </a:tc>
+                <a:extLst>
+                  <a:ext uri="{0D108BD9-81ED-4DB2-BD59-A6C34878D82A}">
+                    <a16:rowId xmlns:a16="http://schemas.microsoft.com/office/drawing/2014/main" val="10007"/>
+                  </a:ext>
+                </a:extLst>
+              </a:tr>
+              <a:tr h="336190">
+                <a:tc>
+                  <a:txBody>
+                    <a:bodyPr/>
+                    <a:lstStyle/>
+                    <a:p>
+                      <a:pPr marL="0" indent="0">
+                        <a:buNone/>
+                      </a:pPr>
+                      <a:r>
+                        <a:rPr lang="en-US" sz="900" b="1" dirty="0">
+                          <a:solidFill>
+                            <a:srgbClr val="CBD5E1"/>
+                          </a:solidFill>
+                        </a:rPr>
+                        <a:t>Disjoint</a:t>
+                      </a:r>
+                      <a:endParaRPr lang="en-US" sz="900" dirty="0"/>
+                    </a:p>
+                  </a:txBody>
+                  <a:tcPr>
+                    <a:lnL w="12700" cap="flat" cmpd="sng" algn="ctr">
+                      <a:solidFill>
+                        <a:srgbClr val="334155"/>
+                      </a:solidFill>
+                      <a:prstDash val="solid"/>
+                      <a:round/>
+                      <a:headEnd type="none" w="med" len="med"/>
+                      <a:tailEnd type="none" w="med" len="med"/>
+                    </a:lnL>
+                    <a:lnR w="12700" cap="flat" cmpd="sng" algn="ctr">
+                      <a:solidFill>
+                        <a:srgbClr val="334155"/>
+                      </a:solidFill>
+                      <a:prstDash val="solid"/>
+                      <a:round/>
+                      <a:headEnd type="none" w="med" len="med"/>
+                      <a:tailEnd type="none" w="med" len="med"/>
+                    </a:lnR>
+                    <a:lnT w="12700" cap="flat" cmpd="sng" algn="ctr">
+                      <a:solidFill>
+                        <a:srgbClr val="334155"/>
+                      </a:solidFill>
+                      <a:prstDash val="solid"/>
+                      <a:round/>
+                      <a:headEnd type="none" w="med" len="med"/>
+                      <a:tailEnd type="none" w="med" len="med"/>
+                    </a:lnT>
+                    <a:lnB w="12700" cap="flat" cmpd="sng" algn="ctr">
+                      <a:solidFill>
+                        <a:srgbClr val="334155"/>
+                      </a:solidFill>
+                      <a:prstDash val="solid"/>
+                      <a:round/>
+                      <a:headEnd type="none" w="med" len="med"/>
+                      <a:tailEnd type="none" w="med" len="med"/>
+                    </a:lnB>
+                    <a:solidFill>
+                      <a:srgbClr val="162032"/>
+                    </a:solidFill>
+                  </a:tcPr>
+                </a:tc>
+                <a:tc>
+                  <a:txBody>
+                    <a:bodyPr/>
+                    <a:lstStyle/>
+                    <a:p>
+                      <a:pPr marL="0" indent="0" algn="ctr">
+                        <a:buNone/>
+                      </a:pPr>
+                      <a:r>
+                        <a:rPr lang="en-US" sz="900" dirty="0">
+                          <a:solidFill>
+                            <a:srgbClr val="F87171"/>
+                          </a:solidFill>
+                          <a:latin typeface="Consolas" pitchFamily="34" charset="0"/>
+                          <a:ea typeface="Consolas" pitchFamily="34" charset="-122"/>
+                          <a:cs typeface="Consolas" pitchFamily="34" charset="-120"/>
+                        </a:rPr>
+                        <a:t>—</a:t>
+                      </a:r>
+                      <a:endParaRPr lang="en-US" sz="900" dirty="0">
+                        <a:latin typeface="Consolas" charset="0"/>
+                        <a:ea typeface="Consolas" charset="0"/>
+                        <a:cs typeface="Consolas" charset="0"/>
+                      </a:endParaRPr>
+                    </a:p>
+                  </a:txBody>
+                  <a:tcPr>
+                    <a:lnL w="12700" cap="flat" cmpd="sng" algn="ctr">
+                      <a:solidFill>
+                        <a:srgbClr val="334155"/>
+                      </a:solidFill>
+                      <a:prstDash val="solid"/>
+                      <a:round/>
+                      <a:headEnd type="none" w="med" len="med"/>
+                      <a:tailEnd type="none" w="med" len="med"/>
+                    </a:lnL>
+                    <a:lnR w="12700" cap="flat" cmpd="sng" algn="ctr">
+                      <a:solidFill>
+                        <a:srgbClr val="334155"/>
+                      </a:solidFill>
+                      <a:prstDash val="solid"/>
+                      <a:round/>
+                      <a:headEnd type="none" w="med" len="med"/>
+                      <a:tailEnd type="none" w="med" len="med"/>
+                    </a:lnR>
+                    <a:lnT w="12700" cap="flat" cmpd="sng" algn="ctr">
+                      <a:solidFill>
+                        <a:srgbClr val="334155"/>
+                      </a:solidFill>
+                      <a:prstDash val="solid"/>
+                      <a:round/>
+                      <a:headEnd type="none" w="med" len="med"/>
+                      <a:tailEnd type="none" w="med" len="med"/>
+                    </a:lnT>
+                    <a:lnB w="12700" cap="flat" cmpd="sng" algn="ctr">
+                      <a:solidFill>
+                        <a:srgbClr val="334155"/>
+                      </a:solidFill>
+                      <a:prstDash val="solid"/>
+                      <a:round/>
+                      <a:headEnd type="none" w="med" len="med"/>
+                      <a:tailEnd type="none" w="med" len="med"/>
+                    </a:lnB>
+                    <a:solidFill>
+                      <a:srgbClr val="162032"/>
+                    </a:solidFill>
+                  </a:tcPr>
+                </a:tc>
+                <a:tc>
+                  <a:txBody>
+                    <a:bodyPr/>
+                    <a:lstStyle/>
+                    <a:p>
+                      <a:pPr marL="0" indent="0">
+                        <a:buNone/>
+                      </a:pPr>
+                      <a:r>
+                        <a:rPr lang="en-US" sz="850" dirty="0">
+                          <a:solidFill>
+                            <a:srgbClr val="F87171"/>
+                          </a:solidFill>
+                          <a:latin typeface="Consolas" pitchFamily="34" charset="0"/>
+                          <a:ea typeface="Consolas" pitchFamily="34" charset="-122"/>
+                          <a:cs typeface="Consolas" pitchFamily="34" charset="-120"/>
+                        </a:rPr>
+                        <a:t>a.isdisjoint(b)</a:t>
+                      </a:r>
+                      <a:endParaRPr lang="en-US" sz="850" dirty="0">
+                        <a:latin typeface="Consolas" charset="0"/>
+                        <a:ea typeface="Consolas" charset="0"/>
+                        <a:cs typeface="Consolas" charset="0"/>
+                      </a:endParaRPr>
+                    </a:p>
+                  </a:txBody>
+                  <a:tcPr>
+                    <a:lnL w="12700" cap="flat" cmpd="sng" algn="ctr">
+                      <a:solidFill>
+                        <a:srgbClr val="334155"/>
+                      </a:solidFill>
+                      <a:prstDash val="solid"/>
+                      <a:round/>
+                      <a:headEnd type="none" w="med" len="med"/>
+                      <a:tailEnd type="none" w="med" len="med"/>
+                    </a:lnL>
+                    <a:lnR w="12700" cap="flat" cmpd="sng" algn="ctr">
+                      <a:solidFill>
+                        <a:srgbClr val="334155"/>
+                      </a:solidFill>
+                      <a:prstDash val="solid"/>
+                      <a:round/>
+                      <a:headEnd type="none" w="med" len="med"/>
+                      <a:tailEnd type="none" w="med" len="med"/>
+                    </a:lnR>
+                    <a:lnT w="12700" cap="flat" cmpd="sng" algn="ctr">
+                      <a:solidFill>
+                        <a:srgbClr val="334155"/>
+                      </a:solidFill>
+                      <a:prstDash val="solid"/>
+                      <a:round/>
+                      <a:headEnd type="none" w="med" len="med"/>
+                      <a:tailEnd type="none" w="med" len="med"/>
+                    </a:lnT>
+                    <a:lnB w="12700" cap="flat" cmpd="sng" algn="ctr">
+                      <a:solidFill>
+                        <a:srgbClr val="334155"/>
+                      </a:solidFill>
+                      <a:prstDash val="solid"/>
+                      <a:round/>
+                      <a:headEnd type="none" w="med" len="med"/>
+                      <a:tailEnd type="none" w="med" len="med"/>
+                    </a:lnB>
+                    <a:solidFill>
+                      <a:srgbClr val="162032"/>
+                    </a:solidFill>
+                  </a:tcPr>
+                </a:tc>
+                <a:tc>
+                  <a:txBody>
+                    <a:bodyPr/>
+                    <a:lstStyle/>
+                    <a:p>
+                      <a:pPr marL="0" indent="0">
+                        <a:buNone/>
+                      </a:pPr>
+                      <a:r>
+                        <a:rPr lang="en-US" sz="900" dirty="0">
+                          <a:solidFill>
+                            <a:srgbClr val="64748B"/>
+                          </a:solidFill>
+                        </a:rPr>
+                        <a:t>True if a ∩ b = ∅  (no shared)</a:t>
+                      </a:r>
+                      <a:endParaRPr lang="en-US" sz="900" dirty="0"/>
+                    </a:p>
+                  </a:txBody>
+                  <a:tcPr>
+                    <a:lnL w="12700" cap="flat" cmpd="sng" algn="ctr">
+                      <a:solidFill>
+                        <a:srgbClr val="334155"/>
+                      </a:solidFill>
+                      <a:prstDash val="solid"/>
+                      <a:round/>
+                      <a:headEnd type="none" w="med" len="med"/>
+                      <a:tailEnd type="none" w="med" len="med"/>
+                    </a:lnL>
+                    <a:lnR w="12700" cap="flat" cmpd="sng" algn="ctr">
+                      <a:solidFill>
+                        <a:srgbClr val="334155"/>
+                      </a:solidFill>
+                      <a:prstDash val="solid"/>
+                      <a:round/>
+                      <a:headEnd type="none" w="med" len="med"/>
+                      <a:tailEnd type="none" w="med" len="med"/>
+                    </a:lnR>
+                    <a:lnT w="12700" cap="flat" cmpd="sng" algn="ctr">
+                      <a:solidFill>
+                        <a:srgbClr val="334155"/>
+                      </a:solidFill>
+                      <a:prstDash val="solid"/>
+                      <a:round/>
+                      <a:headEnd type="none" w="med" len="med"/>
+                      <a:tailEnd type="none" w="med" len="med"/>
+                    </a:lnT>
+                    <a:lnB w="12700" cap="flat" cmpd="sng" algn="ctr">
+                      <a:solidFill>
+                        <a:srgbClr val="334155"/>
+                      </a:solidFill>
+                      <a:prstDash val="solid"/>
+                      <a:round/>
+                      <a:headEnd type="none" w="med" len="med"/>
+                      <a:tailEnd type="none" w="med" len="med"/>
+                    </a:lnB>
+                    <a:solidFill>
+                      <a:srgbClr val="162032"/>
+                    </a:solidFill>
+                  </a:tcPr>
+                </a:tc>
+                <a:extLst>
+                  <a:ext uri="{0D108BD9-81ED-4DB2-BD59-A6C34878D82A}">
+                    <a16:rowId xmlns:a16="http://schemas.microsoft.com/office/drawing/2014/main" val="10008"/>
+                  </a:ext>
+                </a:extLst>
+              </a:tr>
+            </a:tbl>
+          </a:graphicData>
+        </a:graphic>
+      </p:graphicFrame>
+      <p:sp>
+        <p:nvSpPr>
+          <p:cNvPr id="11" name="Shape 8"/>
+          <p:cNvSpPr/>
+          <p:nvPr/>
+        </p:nvSpPr>
+        <p:spPr>
+          <a:xfrm>
+            <a:off x="214467" y="3768992"/>
+            <a:ext cx="1645920" cy="246888"/>
+          </a:xfrm>
+          <a:prstGeom prst="rect">
+            <a:avLst/>
+          </a:prstGeom>
+          <a:solidFill>
+            <a:srgbClr val="F87171"/>
+          </a:solidFill>
+          <a:ln w="12700">
+            <a:solidFill>
+              <a:srgbClr val="F87171"/>
+            </a:solidFill>
+            <a:prstDash val="solid"/>
+          </a:ln>
+        </p:spPr>
+      </p:sp>
+      <p:sp>
+        <p:nvSpPr>
+          <p:cNvPr id="12" name="Text 9"/>
+          <p:cNvSpPr/>
+          <p:nvPr/>
+        </p:nvSpPr>
+        <p:spPr>
+          <a:xfrm>
+            <a:off x="214467" y="3768992"/>
+            <a:ext cx="1645920" cy="246888"/>
+          </a:xfrm>
+          <a:prstGeom prst="rect">
+            <a:avLst/>
+          </a:prstGeom>
+          <a:noFill/>
+          <a:ln/>
+        </p:spPr>
+        <p:txBody>
+          <a:bodyPr wrap="square" lIns="0" tIns="0" rIns="0" bIns="0" rtlCol="0" anchor="ctr"/>
+          <a:lstStyle/>
+          <a:p>
+            <a:pPr marL="0" indent="0" algn="ctr">
+              <a:buNone/>
+            </a:pPr>
+            <a:r>
+              <a:rPr lang="en-US" sz="850" b="1" dirty="0">
+                <a:solidFill>
+                  <a:srgbClr val="0F172A"/>
+                </a:solidFill>
+                <a:latin typeface="Calibri" pitchFamily="34" charset="0"/>
+                <a:ea typeface="Calibri" pitchFamily="34" charset="-122"/>
+                <a:cs typeface="Calibri" pitchFamily="34" charset="-120"/>
+              </a:rPr>
+              <a:t>EXAMPLE</a:t>
+            </a:r>
+            <a:endParaRPr lang="en-US" sz="850" dirty="0"/>
+          </a:p>
+        </p:txBody>
+      </p:sp>
+      <p:sp>
+        <p:nvSpPr>
+          <p:cNvPr id="13" name="Shape 10"/>
+          <p:cNvSpPr/>
+          <p:nvPr/>
+        </p:nvSpPr>
+        <p:spPr>
+          <a:xfrm>
+            <a:off x="214467" y="4076564"/>
+            <a:ext cx="4074069" cy="861196"/>
+          </a:xfrm>
+          <a:prstGeom prst="rect">
+            <a:avLst/>
+          </a:prstGeom>
+          <a:solidFill>
+            <a:srgbClr val="0D1B2A"/>
+          </a:solidFill>
+          <a:ln w="12700">
+            <a:solidFill>
+              <a:srgbClr val="1E3A5F"/>
+            </a:solidFill>
+            <a:prstDash val="solid"/>
+          </a:ln>
+        </p:spPr>
+      </p:sp>
+      <p:sp>
+        <p:nvSpPr>
+          <p:cNvPr id="14" name="Text 11"/>
+          <p:cNvSpPr/>
+          <p:nvPr/>
+        </p:nvSpPr>
+        <p:spPr>
+          <a:xfrm>
+            <a:off x="342483" y="4134752"/>
+            <a:ext cx="3822192" cy="566928"/>
+          </a:xfrm>
+          <a:prstGeom prst="rect">
+            <a:avLst/>
+          </a:prstGeom>
+          <a:noFill/>
+          <a:ln/>
+        </p:spPr>
+        <p:txBody>
+          <a:bodyPr wrap="square" lIns="0" tIns="0" rIns="0" bIns="0" rtlCol="0" anchor="t"/>
+          <a:lstStyle/>
+          <a:p>
+            <a:pPr marL="0" indent="0">
+              <a:buNone/>
+            </a:pPr>
+            <a:r>
+              <a:rPr lang="en-US" sz="980" dirty="0">
+                <a:solidFill>
+                  <a:srgbClr val="7DD3FC"/>
+                </a:solidFill>
+                <a:latin typeface="Consolas" pitchFamily="34" charset="0"/>
+                <a:ea typeface="Consolas" pitchFamily="34" charset="-122"/>
+                <a:cs typeface="Consolas" pitchFamily="34" charset="-120"/>
+              </a:rPr>
+              <a:t>a={1,2,3,4}; b={3,4,5,6}</a:t>
+            </a:r>
+            <a:endParaRPr lang="en-US" sz="980" dirty="0"/>
+          </a:p>
+          <a:p>
+            <a:pPr marL="0" indent="0">
+              <a:buNone/>
+            </a:pPr>
+            <a:r>
+              <a:rPr lang="en-US" sz="980" dirty="0">
+                <a:solidFill>
+                  <a:srgbClr val="7DD3FC"/>
+                </a:solidFill>
+                <a:latin typeface="Consolas" pitchFamily="34" charset="0"/>
+                <a:ea typeface="Consolas" pitchFamily="34" charset="-122"/>
+                <a:cs typeface="Consolas" pitchFamily="34" charset="-120"/>
+              </a:rPr>
+              <a:t>print(a|b)  # {1,2,3,4,5,6} union</a:t>
+            </a:r>
+            <a:endParaRPr lang="en-US" sz="980" dirty="0"/>
+          </a:p>
+          <a:p>
+            <a:pPr marL="0" indent="0">
+              <a:buNone/>
+            </a:pPr>
+            <a:r>
+              <a:rPr lang="en-US" sz="980" dirty="0">
+                <a:solidFill>
+                  <a:srgbClr val="7DD3FC"/>
+                </a:solidFill>
+                <a:latin typeface="Consolas" pitchFamily="34" charset="0"/>
+                <a:ea typeface="Consolas" pitchFamily="34" charset="-122"/>
+                <a:cs typeface="Consolas" pitchFamily="34" charset="-120"/>
+              </a:rPr>
+              <a:t>print(a&amp;b)  # {3,4}  intersection</a:t>
+            </a:r>
+            <a:endParaRPr lang="en-US" sz="980" dirty="0"/>
+          </a:p>
+          <a:p>
+            <a:pPr marL="0" indent="0">
+              <a:buNone/>
+            </a:pPr>
+            <a:r>
+              <a:rPr lang="en-US" sz="980" dirty="0">
+                <a:solidFill>
+                  <a:srgbClr val="7DD3FC"/>
+                </a:solidFill>
+                <a:latin typeface="Consolas" pitchFamily="34" charset="0"/>
+                <a:ea typeface="Consolas" pitchFamily="34" charset="-122"/>
+                <a:cs typeface="Consolas" pitchFamily="34" charset="-120"/>
+              </a:rPr>
+              <a:t>print(a-b)  # {1,2}  difference</a:t>
+            </a:r>
+            <a:endParaRPr lang="en-US" sz="980" dirty="0"/>
+          </a:p>
+          <a:p>
+            <a:pPr marL="0" indent="0">
+              <a:buNone/>
+            </a:pPr>
+            <a:r>
+              <a:rPr lang="en-US" sz="980" dirty="0">
+                <a:solidFill>
+                  <a:srgbClr val="7DD3FC"/>
+                </a:solidFill>
+                <a:latin typeface="Consolas" pitchFamily="34" charset="0"/>
+                <a:ea typeface="Consolas" pitchFamily="34" charset="-122"/>
+                <a:cs typeface="Consolas" pitchFamily="34" charset="-120"/>
+              </a:rPr>
+              <a:t>print(a^b)  # {1,2,5,6} sym diff</a:t>
+            </a:r>
+            <a:endParaRPr lang="en-US" sz="980" dirty="0"/>
+          </a:p>
+        </p:txBody>
+      </p:sp>
+      <p:sp>
+        <p:nvSpPr>
+          <p:cNvPr id="15" name="Shape 12"/>
+          <p:cNvSpPr/>
+          <p:nvPr/>
+        </p:nvSpPr>
+        <p:spPr>
+          <a:xfrm>
+            <a:off x="4462272" y="804672"/>
+            <a:ext cx="27432" cy="4133088"/>
+          </a:xfrm>
+          <a:prstGeom prst="rect">
+            <a:avLst/>
+          </a:prstGeom>
+          <a:solidFill>
+            <a:srgbClr val="334155"/>
+          </a:solidFill>
+          <a:ln w="12700">
+            <a:solidFill>
+              <a:srgbClr val="334155"/>
+            </a:solidFill>
+            <a:prstDash val="solid"/>
+          </a:ln>
+        </p:spPr>
+      </p:sp>
+      <p:sp>
+        <p:nvSpPr>
+          <p:cNvPr id="16" name="Shape 13"/>
+          <p:cNvSpPr/>
+          <p:nvPr/>
+        </p:nvSpPr>
+        <p:spPr>
+          <a:xfrm>
+            <a:off x="4663440" y="106403"/>
+            <a:ext cx="3291840" cy="246888"/>
+          </a:xfrm>
+          <a:prstGeom prst="rect">
+            <a:avLst/>
+          </a:prstGeom>
+          <a:solidFill>
+            <a:srgbClr val="F87171"/>
+          </a:solidFill>
+          <a:ln w="12700">
+            <a:solidFill>
+              <a:srgbClr val="F87171"/>
+            </a:solidFill>
+            <a:prstDash val="solid"/>
+          </a:ln>
+        </p:spPr>
+      </p:sp>
+      <p:sp>
+        <p:nvSpPr>
+          <p:cNvPr id="17" name="Text 14"/>
+          <p:cNvSpPr/>
+          <p:nvPr/>
+        </p:nvSpPr>
+        <p:spPr>
+          <a:xfrm>
+            <a:off x="4663440" y="106403"/>
+            <a:ext cx="3291840" cy="246888"/>
+          </a:xfrm>
+          <a:prstGeom prst="rect">
+            <a:avLst/>
+          </a:prstGeom>
+          <a:noFill/>
+          <a:ln/>
+        </p:spPr>
+        <p:txBody>
+          <a:bodyPr wrap="square" lIns="0" tIns="0" rIns="0" bIns="0" rtlCol="0" anchor="ctr"/>
+          <a:lstStyle/>
+          <a:p>
+            <a:pPr marL="0" indent="0" algn="ctr">
+              <a:buNone/>
+            </a:pPr>
+            <a:r>
+              <a:rPr lang="en-US" sz="850" b="1" dirty="0">
+                <a:solidFill>
+                  <a:srgbClr val="0F172A"/>
+                </a:solidFill>
+                <a:latin typeface="Calibri" pitchFamily="34" charset="0"/>
+                <a:ea typeface="Calibri" pitchFamily="34" charset="-122"/>
+                <a:cs typeface="Calibri" pitchFamily="34" charset="-120"/>
+              </a:rPr>
+              <a:t>FROZENSET — immutable, hashable set</a:t>
+            </a:r>
+            <a:endParaRPr lang="en-US" sz="850" dirty="0"/>
+          </a:p>
+        </p:txBody>
+      </p:sp>
+      <p:sp>
+        <p:nvSpPr>
+          <p:cNvPr id="18" name="Shape 15"/>
+          <p:cNvSpPr/>
+          <p:nvPr/>
+        </p:nvSpPr>
+        <p:spPr>
+          <a:xfrm>
+            <a:off x="4663440" y="380723"/>
+            <a:ext cx="4178808" cy="1627632"/>
+          </a:xfrm>
+          <a:prstGeom prst="rect">
+            <a:avLst/>
+          </a:prstGeom>
+          <a:solidFill>
+            <a:srgbClr val="0D1B2A"/>
+          </a:solidFill>
+          <a:ln w="12700">
+            <a:solidFill>
+              <a:srgbClr val="1E3A5F"/>
+            </a:solidFill>
+            <a:prstDash val="solid"/>
+          </a:ln>
+        </p:spPr>
+      </p:sp>
+      <p:sp>
+        <p:nvSpPr>
+          <p:cNvPr id="19" name="Text 16"/>
+          <p:cNvSpPr/>
+          <p:nvPr/>
+        </p:nvSpPr>
+        <p:spPr>
+          <a:xfrm>
+            <a:off x="4714149" y="472163"/>
+            <a:ext cx="4045803" cy="1536192"/>
+          </a:xfrm>
+          <a:prstGeom prst="rect">
+            <a:avLst/>
+          </a:prstGeom>
+          <a:noFill/>
+          <a:ln/>
+        </p:spPr>
+        <p:txBody>
+          <a:bodyPr wrap="square" lIns="0" tIns="0" rIns="0" bIns="0" rtlCol="0" anchor="t"/>
+          <a:lstStyle/>
+          <a:p>
+            <a:pPr marL="0" indent="0">
+              <a:buNone/>
+            </a:pPr>
+            <a:r>
+              <a:rPr lang="en-US" sz="800" dirty="0">
+                <a:solidFill>
+                  <a:srgbClr val="7DD3FC"/>
+                </a:solidFill>
+                <a:latin typeface="Consolas" pitchFamily="34" charset="0"/>
+                <a:ea typeface="Consolas" pitchFamily="34" charset="-122"/>
+                <a:cs typeface="Consolas" pitchFamily="34" charset="-120"/>
+              </a:rPr>
+              <a:t>fs = frozenset({1, 2, 3})</a:t>
+            </a:r>
+            <a:endParaRPr lang="en-US" sz="800" dirty="0"/>
+          </a:p>
+          <a:p>
+            <a:pPr marL="0" indent="0">
+              <a:buNone/>
+            </a:pPr>
+            <a:endParaRPr lang="en-US" sz="800" dirty="0"/>
+          </a:p>
+          <a:p>
+            <a:pPr marL="0" indent="0">
+              <a:buNone/>
+            </a:pPr>
+            <a:r>
+              <a:rPr lang="en-US" sz="800" dirty="0">
+                <a:solidFill>
+                  <a:srgbClr val="7DD3FC"/>
+                </a:solidFill>
+                <a:latin typeface="Consolas" pitchFamily="34" charset="0"/>
+                <a:ea typeface="Consolas" pitchFamily="34" charset="-122"/>
+                <a:cs typeface="Consolas" pitchFamily="34" charset="-120"/>
+              </a:rPr>
+              <a:t># Immutable → hashable → usable as dict key</a:t>
+            </a:r>
+            <a:endParaRPr lang="en-US" sz="800" dirty="0"/>
+          </a:p>
+          <a:p>
+            <a:pPr marL="0" indent="0">
+              <a:buNone/>
+            </a:pPr>
+            <a:r>
+              <a:rPr lang="en-US" sz="800" dirty="0">
+                <a:solidFill>
+                  <a:srgbClr val="7DD3FC"/>
+                </a:solidFill>
+                <a:latin typeface="Consolas" pitchFamily="34" charset="0"/>
+                <a:ea typeface="Consolas" pitchFamily="34" charset="-122"/>
+                <a:cs typeface="Consolas" pitchFamily="34" charset="-120"/>
+              </a:rPr>
+              <a:t>d = {frozenset({1,2}): "a pair"}</a:t>
+            </a:r>
+            <a:endParaRPr lang="en-US" sz="800" dirty="0"/>
+          </a:p>
+          <a:p>
+            <a:pPr marL="0" indent="0">
+              <a:buNone/>
+            </a:pPr>
+            <a:r>
+              <a:rPr lang="en-US" sz="800" dirty="0">
+                <a:solidFill>
+                  <a:srgbClr val="7DD3FC"/>
+                </a:solidFill>
+                <a:latin typeface="Consolas" pitchFamily="34" charset="0"/>
+                <a:ea typeface="Consolas" pitchFamily="34" charset="-122"/>
+                <a:cs typeface="Consolas" pitchFamily="34" charset="-120"/>
+              </a:rPr>
+              <a:t>nested_set = {frozenset({1,2}), frozenset({3,4})}</a:t>
+            </a:r>
+            <a:endParaRPr lang="en-US" sz="800" dirty="0"/>
+          </a:p>
+          <a:p>
+            <a:pPr marL="0" indent="0">
+              <a:buNone/>
+            </a:pPr>
+            <a:endParaRPr lang="en-US" sz="800" dirty="0"/>
+          </a:p>
+          <a:p>
+            <a:pPr marL="0" indent="0">
+              <a:buNone/>
+            </a:pPr>
+            <a:r>
+              <a:rPr lang="en-US" sz="800" dirty="0">
+                <a:solidFill>
+                  <a:srgbClr val="7DD3FC"/>
+                </a:solidFill>
+                <a:latin typeface="Consolas" pitchFamily="34" charset="0"/>
+                <a:ea typeface="Consolas" pitchFamily="34" charset="-122"/>
+                <a:cs typeface="Consolas" pitchFamily="34" charset="-120"/>
+              </a:rPr>
+              <a:t># All read operations still work:</a:t>
+            </a:r>
+            <a:endParaRPr lang="en-US" sz="800" dirty="0"/>
+          </a:p>
+          <a:p>
+            <a:pPr marL="0" indent="0">
+              <a:buNone/>
+            </a:pPr>
+            <a:r>
+              <a:rPr lang="en-US" sz="800" dirty="0">
+                <a:solidFill>
+                  <a:srgbClr val="7DD3FC"/>
+                </a:solidFill>
+                <a:latin typeface="Consolas" pitchFamily="34" charset="0"/>
+                <a:ea typeface="Consolas" pitchFamily="34" charset="-122"/>
+                <a:cs typeface="Consolas" pitchFamily="34" charset="-120"/>
+              </a:rPr>
+              <a:t>print(1 in fs)         # True</a:t>
+            </a:r>
+            <a:endParaRPr lang="en-US" sz="800" dirty="0"/>
+          </a:p>
+          <a:p>
+            <a:pPr marL="0" indent="0">
+              <a:buNone/>
+            </a:pPr>
+            <a:r>
+              <a:rPr lang="en-US" sz="800" dirty="0">
+                <a:solidFill>
+                  <a:srgbClr val="7DD3FC"/>
+                </a:solidFill>
+                <a:latin typeface="Consolas" pitchFamily="34" charset="0"/>
+                <a:ea typeface="Consolas" pitchFamily="34" charset="-122"/>
+                <a:cs typeface="Consolas" pitchFamily="34" charset="-120"/>
+              </a:rPr>
+              <a:t>print(fs | {4,5})      # frozenset({1,2,3,4,5})</a:t>
+            </a:r>
+            <a:endParaRPr lang="en-US" sz="800" dirty="0"/>
+          </a:p>
+          <a:p>
+            <a:pPr marL="0" indent="0">
+              <a:buNone/>
+            </a:pPr>
+            <a:endParaRPr lang="en-US" sz="800" dirty="0"/>
+          </a:p>
+          <a:p>
+            <a:pPr marL="0" indent="0">
+              <a:buNone/>
+            </a:pPr>
+            <a:r>
+              <a:rPr lang="en-US" sz="800" dirty="0">
+                <a:solidFill>
+                  <a:srgbClr val="7DD3FC"/>
+                </a:solidFill>
+                <a:latin typeface="Consolas" pitchFamily="34" charset="0"/>
+                <a:ea typeface="Consolas" pitchFamily="34" charset="-122"/>
+                <a:cs typeface="Consolas" pitchFamily="34" charset="-120"/>
+              </a:rPr>
+              <a:t># But mutation is blocked:</a:t>
+            </a:r>
+            <a:endParaRPr lang="en-US" sz="800" dirty="0"/>
+          </a:p>
+          <a:p>
+            <a:pPr marL="0" indent="0">
+              <a:buNone/>
+            </a:pPr>
+            <a:r>
+              <a:rPr lang="en-US" sz="800" dirty="0">
+                <a:solidFill>
+                  <a:srgbClr val="7DD3FC"/>
+                </a:solidFill>
+                <a:latin typeface="Consolas" pitchFamily="34" charset="0"/>
+                <a:ea typeface="Consolas" pitchFamily="34" charset="-122"/>
+                <a:cs typeface="Consolas" pitchFamily="34" charset="-120"/>
+              </a:rPr>
+              <a:t># fs.add(4)  →  AttributeError!</a:t>
+            </a:r>
+            <a:endParaRPr lang="en-US" sz="800" dirty="0"/>
+          </a:p>
+        </p:txBody>
+      </p:sp>
+      <p:sp>
+        <p:nvSpPr>
+          <p:cNvPr id="20" name="Shape 17"/>
+          <p:cNvSpPr/>
+          <p:nvPr/>
+        </p:nvSpPr>
+        <p:spPr>
+          <a:xfrm>
+            <a:off x="4663440" y="2079844"/>
+            <a:ext cx="2377440" cy="246888"/>
+          </a:xfrm>
+          <a:prstGeom prst="rect">
+            <a:avLst/>
+          </a:prstGeom>
+          <a:solidFill>
+            <a:srgbClr val="F87171"/>
+          </a:solidFill>
+          <a:ln w="12700">
+            <a:solidFill>
+              <a:srgbClr val="F87171"/>
+            </a:solidFill>
+            <a:prstDash val="solid"/>
+          </a:ln>
+        </p:spPr>
+      </p:sp>
+      <p:sp>
+        <p:nvSpPr>
+          <p:cNvPr id="21" name="Text 18"/>
+          <p:cNvSpPr/>
+          <p:nvPr/>
+        </p:nvSpPr>
+        <p:spPr>
+          <a:xfrm>
+            <a:off x="4663440" y="2079844"/>
+            <a:ext cx="2377440" cy="246888"/>
+          </a:xfrm>
+          <a:prstGeom prst="rect">
+            <a:avLst/>
+          </a:prstGeom>
+          <a:noFill/>
+          <a:ln/>
+        </p:spPr>
+        <p:txBody>
+          <a:bodyPr wrap="square" lIns="0" tIns="0" rIns="0" bIns="0" rtlCol="0" anchor="ctr"/>
+          <a:lstStyle/>
+          <a:p>
+            <a:pPr marL="0" indent="0" algn="ctr">
+              <a:buNone/>
+            </a:pPr>
+            <a:r>
+              <a:rPr lang="en-US" sz="850" b="1" dirty="0">
+                <a:solidFill>
+                  <a:srgbClr val="0F172A"/>
+                </a:solidFill>
+                <a:latin typeface="Calibri" pitchFamily="34" charset="0"/>
+                <a:ea typeface="Calibri" pitchFamily="34" charset="-122"/>
+                <a:cs typeface="Calibri" pitchFamily="34" charset="-120"/>
+              </a:rPr>
+              <a:t>SET COMPREHENSION</a:t>
+            </a:r>
+            <a:endParaRPr lang="en-US" sz="850" dirty="0"/>
+          </a:p>
+        </p:txBody>
+      </p:sp>
+      <p:sp>
+        <p:nvSpPr>
+          <p:cNvPr id="22" name="Shape 19"/>
+          <p:cNvSpPr/>
+          <p:nvPr/>
+        </p:nvSpPr>
+        <p:spPr>
+          <a:xfrm>
+            <a:off x="4663440" y="2354164"/>
+            <a:ext cx="4206240" cy="1095618"/>
+          </a:xfrm>
+          <a:prstGeom prst="rect">
+            <a:avLst/>
+          </a:prstGeom>
+          <a:solidFill>
+            <a:srgbClr val="0D1B2A"/>
+          </a:solidFill>
+          <a:ln w="12700">
+            <a:solidFill>
+              <a:srgbClr val="1E3A5F"/>
+            </a:solidFill>
+            <a:prstDash val="solid"/>
+          </a:ln>
+        </p:spPr>
+      </p:sp>
+      <p:sp>
+        <p:nvSpPr>
+          <p:cNvPr id="23" name="Text 20"/>
+          <p:cNvSpPr/>
+          <p:nvPr/>
+        </p:nvSpPr>
+        <p:spPr>
+          <a:xfrm>
+            <a:off x="4791456" y="2445604"/>
+            <a:ext cx="3968496" cy="749808"/>
+          </a:xfrm>
+          <a:prstGeom prst="rect">
+            <a:avLst/>
+          </a:prstGeom>
+          <a:noFill/>
+          <a:ln/>
+        </p:spPr>
+        <p:txBody>
+          <a:bodyPr wrap="square" lIns="0" tIns="0" rIns="0" bIns="0" rtlCol="0" anchor="t"/>
+          <a:lstStyle/>
+          <a:p>
+            <a:pPr marL="0" indent="0">
+              <a:buNone/>
+            </a:pPr>
+            <a:r>
+              <a:rPr lang="en-US" sz="800" dirty="0">
+                <a:solidFill>
+                  <a:srgbClr val="7DD3FC"/>
+                </a:solidFill>
+                <a:latin typeface="Consolas" pitchFamily="34" charset="0"/>
+                <a:ea typeface="Consolas" pitchFamily="34" charset="-122"/>
+                <a:cs typeface="Consolas" pitchFamily="34" charset="-120"/>
+              </a:rPr>
+              <a:t># Unique squares — negatives collapse</a:t>
+            </a:r>
+            <a:endParaRPr lang="en-US" sz="800" dirty="0"/>
+          </a:p>
+          <a:p>
+            <a:pPr marL="0" indent="0">
+              <a:buNone/>
+            </a:pPr>
+            <a:r>
+              <a:rPr lang="en-US" sz="800" dirty="0">
+                <a:solidFill>
+                  <a:srgbClr val="7DD3FC"/>
+                </a:solidFill>
+                <a:latin typeface="Consolas" pitchFamily="34" charset="0"/>
+                <a:ea typeface="Consolas" pitchFamily="34" charset="-122"/>
+                <a:cs typeface="Consolas" pitchFamily="34" charset="-120"/>
+              </a:rPr>
+              <a:t>sq = {x**2 for x in range(-3, 4)}</a:t>
+            </a:r>
+            <a:endParaRPr lang="en-US" sz="800" dirty="0"/>
+          </a:p>
+          <a:p>
+            <a:pPr marL="0" indent="0">
+              <a:buNone/>
+            </a:pPr>
+            <a:r>
+              <a:rPr lang="en-US" sz="800" dirty="0">
+                <a:solidFill>
+                  <a:srgbClr val="7DD3FC"/>
+                </a:solidFill>
+                <a:latin typeface="Consolas" pitchFamily="34" charset="0"/>
+                <a:ea typeface="Consolas" pitchFamily="34" charset="-122"/>
+                <a:cs typeface="Consolas" pitchFamily="34" charset="-120"/>
+              </a:rPr>
+              <a:t># {0, 1, 4, 9}</a:t>
+            </a:r>
+            <a:endParaRPr lang="en-US" sz="800" dirty="0"/>
+          </a:p>
+          <a:p>
+            <a:pPr marL="0" indent="0">
+              <a:buNone/>
+            </a:pPr>
+            <a:endParaRPr lang="en-US" sz="800" dirty="0"/>
+          </a:p>
+          <a:p>
+            <a:pPr marL="0" indent="0">
+              <a:buNone/>
+            </a:pPr>
+            <a:r>
+              <a:rPr lang="en-US" sz="800" dirty="0">
+                <a:solidFill>
+                  <a:srgbClr val="7DD3FC"/>
+                </a:solidFill>
+                <a:latin typeface="Consolas" pitchFamily="34" charset="0"/>
+                <a:ea typeface="Consolas" pitchFamily="34" charset="-122"/>
+                <a:cs typeface="Consolas" pitchFamily="34" charset="-120"/>
+              </a:rPr>
+              <a:t># Unique first letters from a word list</a:t>
+            </a:r>
+            <a:endParaRPr lang="en-US" sz="800" dirty="0"/>
+          </a:p>
+          <a:p>
+            <a:pPr marL="0" indent="0">
+              <a:buNone/>
+            </a:pPr>
+            <a:r>
+              <a:rPr lang="en-US" sz="800" dirty="0">
+                <a:solidFill>
+                  <a:srgbClr val="7DD3FC"/>
+                </a:solidFill>
+                <a:latin typeface="Consolas" pitchFamily="34" charset="0"/>
+                <a:ea typeface="Consolas" pitchFamily="34" charset="-122"/>
+                <a:cs typeface="Consolas" pitchFamily="34" charset="-120"/>
+              </a:rPr>
+              <a:t>words = ['apple','avocado','banana','berry']</a:t>
+            </a:r>
+            <a:endParaRPr lang="en-US" sz="800" dirty="0"/>
+          </a:p>
+          <a:p>
+            <a:pPr marL="0" indent="0">
+              <a:buNone/>
+            </a:pPr>
+            <a:r>
+              <a:rPr lang="en-US" sz="800" dirty="0">
+                <a:solidFill>
+                  <a:srgbClr val="7DD3FC"/>
+                </a:solidFill>
+                <a:latin typeface="Consolas" pitchFamily="34" charset="0"/>
+                <a:ea typeface="Consolas" pitchFamily="34" charset="-122"/>
+                <a:cs typeface="Consolas" pitchFamily="34" charset="-120"/>
+              </a:rPr>
+              <a:t>initials = {w[0] for w in words}</a:t>
+            </a:r>
+            <a:endParaRPr lang="en-US" sz="800" dirty="0"/>
+          </a:p>
+          <a:p>
+            <a:pPr marL="0" indent="0">
+              <a:buNone/>
+            </a:pPr>
+            <a:r>
+              <a:rPr lang="en-US" sz="800" dirty="0">
+                <a:solidFill>
+                  <a:srgbClr val="7DD3FC"/>
+                </a:solidFill>
+                <a:latin typeface="Consolas" pitchFamily="34" charset="0"/>
+                <a:ea typeface="Consolas" pitchFamily="34" charset="-122"/>
+                <a:cs typeface="Consolas" pitchFamily="34" charset="-120"/>
+              </a:rPr>
+              <a:t># {'a', 'b'}</a:t>
+            </a:r>
+            <a:endParaRPr lang="en-US" sz="800" dirty="0"/>
+          </a:p>
+        </p:txBody>
+      </p:sp>
+      <p:sp>
+        <p:nvSpPr>
+          <p:cNvPr id="24" name="Shape 21"/>
+          <p:cNvSpPr/>
+          <p:nvPr/>
+        </p:nvSpPr>
+        <p:spPr>
+          <a:xfrm>
+            <a:off x="4663440" y="3499657"/>
+            <a:ext cx="2377440" cy="246888"/>
+          </a:xfrm>
+          <a:prstGeom prst="rect">
+            <a:avLst/>
+          </a:prstGeom>
+          <a:solidFill>
+            <a:srgbClr val="F87171"/>
+          </a:solidFill>
+          <a:ln w="12700">
+            <a:solidFill>
+              <a:srgbClr val="F87171"/>
+            </a:solidFill>
+            <a:prstDash val="solid"/>
+          </a:ln>
+        </p:spPr>
+      </p:sp>
+      <p:sp>
+        <p:nvSpPr>
+          <p:cNvPr id="25" name="Text 22"/>
+          <p:cNvSpPr/>
+          <p:nvPr/>
+        </p:nvSpPr>
+        <p:spPr>
+          <a:xfrm>
+            <a:off x="4663440" y="3499657"/>
+            <a:ext cx="2377440" cy="246888"/>
+          </a:xfrm>
+          <a:prstGeom prst="rect">
+            <a:avLst/>
+          </a:prstGeom>
+          <a:noFill/>
+          <a:ln/>
+        </p:spPr>
+        <p:txBody>
+          <a:bodyPr wrap="square" lIns="0" tIns="0" rIns="0" bIns="0" rtlCol="0" anchor="ctr"/>
+          <a:lstStyle/>
+          <a:p>
+            <a:pPr marL="0" indent="0" algn="ctr">
+              <a:buNone/>
+            </a:pPr>
+            <a:r>
+              <a:rPr lang="en-US" sz="850" b="1" dirty="0">
+                <a:solidFill>
+                  <a:srgbClr val="0F172A"/>
+                </a:solidFill>
+                <a:latin typeface="Calibri" pitchFamily="34" charset="0"/>
+                <a:ea typeface="Calibri" pitchFamily="34" charset="-122"/>
+                <a:cs typeface="Calibri" pitchFamily="34" charset="-120"/>
+              </a:rPr>
+              <a:t>PRACTICAL PATTERNS</a:t>
+            </a:r>
+            <a:endParaRPr lang="en-US" sz="850" dirty="0"/>
+          </a:p>
+        </p:txBody>
+      </p:sp>
+      <p:sp>
+        <p:nvSpPr>
+          <p:cNvPr id="26" name="Shape 23"/>
+          <p:cNvSpPr/>
+          <p:nvPr/>
+        </p:nvSpPr>
+        <p:spPr>
+          <a:xfrm>
+            <a:off x="4663439" y="3773976"/>
+            <a:ext cx="4266094" cy="1217401"/>
+          </a:xfrm>
+          <a:prstGeom prst="rect">
+            <a:avLst/>
+          </a:prstGeom>
+          <a:solidFill>
+            <a:srgbClr val="0D1B2A"/>
+          </a:solidFill>
+          <a:ln w="12700">
+            <a:solidFill>
+              <a:srgbClr val="1E3A5F"/>
+            </a:solidFill>
+            <a:prstDash val="solid"/>
+          </a:ln>
+        </p:spPr>
+      </p:sp>
+      <p:sp>
+        <p:nvSpPr>
+          <p:cNvPr id="27" name="Text 24"/>
+          <p:cNvSpPr/>
+          <p:nvPr/>
+        </p:nvSpPr>
+        <p:spPr>
+          <a:xfrm>
+            <a:off x="4791456" y="3865417"/>
+            <a:ext cx="3968496" cy="585216"/>
+          </a:xfrm>
+          <a:prstGeom prst="rect">
+            <a:avLst/>
+          </a:prstGeom>
+          <a:noFill/>
+          <a:ln/>
+        </p:spPr>
+        <p:txBody>
+          <a:bodyPr wrap="square" lIns="0" tIns="0" rIns="0" bIns="0" rtlCol="0" anchor="t"/>
+          <a:lstStyle/>
+          <a:p>
+            <a:pPr marL="0" indent="0">
+              <a:buNone/>
+            </a:pPr>
+            <a:r>
+              <a:rPr lang="en-US" sz="800" dirty="0">
+                <a:solidFill>
+                  <a:srgbClr val="7DD3FC"/>
+                </a:solidFill>
+                <a:latin typeface="Consolas" pitchFamily="34" charset="0"/>
+                <a:ea typeface="Consolas" pitchFamily="34" charset="-122"/>
+                <a:cs typeface="Consolas" pitchFamily="34" charset="-120"/>
+              </a:rPr>
+              <a:t># 1  Deduplicate a list</a:t>
+            </a:r>
+            <a:endParaRPr lang="en-US" sz="800" dirty="0"/>
+          </a:p>
+          <a:p>
+            <a:pPr marL="0" indent="0">
+              <a:buNone/>
+            </a:pPr>
+            <a:r>
+              <a:rPr lang="en-US" sz="800" dirty="0">
+                <a:solidFill>
+                  <a:srgbClr val="7DD3FC"/>
+                </a:solidFill>
+                <a:latin typeface="Consolas" pitchFamily="34" charset="0"/>
+                <a:ea typeface="Consolas" pitchFamily="34" charset="-122"/>
+                <a:cs typeface="Consolas" pitchFamily="34" charset="-120"/>
+              </a:rPr>
+              <a:t>unique = list(set([1,2,2,3,3]))  # [1,2,3]</a:t>
+            </a:r>
+            <a:endParaRPr lang="en-US" sz="800" dirty="0"/>
+          </a:p>
+          <a:p>
+            <a:pPr marL="0" indent="0">
+              <a:buNone/>
+            </a:pPr>
+            <a:endParaRPr lang="en-US" sz="800" dirty="0"/>
+          </a:p>
+          <a:p>
+            <a:pPr marL="0" indent="0">
+              <a:buNone/>
+            </a:pPr>
+            <a:r>
+              <a:rPr lang="en-US" sz="800" dirty="0">
+                <a:solidFill>
+                  <a:srgbClr val="7DD3FC"/>
+                </a:solidFill>
+                <a:latin typeface="Consolas" pitchFamily="34" charset="0"/>
+                <a:ea typeface="Consolas" pitchFamily="34" charset="-122"/>
+                <a:cs typeface="Consolas" pitchFamily="34" charset="-120"/>
+              </a:rPr>
+              <a:t># 2  Fast membership check</a:t>
+            </a:r>
+            <a:endParaRPr lang="en-US" sz="800" dirty="0"/>
+          </a:p>
+          <a:p>
+            <a:pPr marL="0" indent="0">
+              <a:buNone/>
+            </a:pPr>
+            <a:r>
+              <a:rPr lang="en-US" sz="800" dirty="0">
+                <a:solidFill>
+                  <a:srgbClr val="7DD3FC"/>
+                </a:solidFill>
+                <a:latin typeface="Consolas" pitchFamily="34" charset="0"/>
+                <a:ea typeface="Consolas" pitchFamily="34" charset="-122"/>
+                <a:cs typeface="Consolas" pitchFamily="34" charset="-120"/>
+              </a:rPr>
+              <a:t>valid = {'admin','editor','viewer'}</a:t>
+            </a:r>
+            <a:endParaRPr lang="en-US" sz="800" dirty="0"/>
+          </a:p>
+          <a:p>
+            <a:pPr marL="0" indent="0">
+              <a:buNone/>
+            </a:pPr>
+            <a:r>
+              <a:rPr lang="en-US" sz="800" dirty="0">
+                <a:solidFill>
+                  <a:srgbClr val="7DD3FC"/>
+                </a:solidFill>
+                <a:latin typeface="Consolas" pitchFamily="34" charset="0"/>
+                <a:ea typeface="Consolas" pitchFamily="34" charset="-122"/>
+                <a:cs typeface="Consolas" pitchFamily="34" charset="-120"/>
+              </a:rPr>
+              <a:t>if user_role in valid: ...       # O(1)</a:t>
+            </a:r>
+            <a:endParaRPr lang="en-US" sz="800" dirty="0"/>
+          </a:p>
+          <a:p>
+            <a:pPr marL="0" indent="0">
+              <a:buNone/>
+            </a:pPr>
+            <a:endParaRPr lang="en-US" sz="800" dirty="0"/>
+          </a:p>
+          <a:p>
+            <a:pPr marL="0" indent="0">
+              <a:buNone/>
+            </a:pPr>
+            <a:r>
+              <a:rPr lang="en-US" sz="800" dirty="0">
+                <a:solidFill>
+                  <a:srgbClr val="7DD3FC"/>
+                </a:solidFill>
+                <a:latin typeface="Consolas" pitchFamily="34" charset="0"/>
+                <a:ea typeface="Consolas" pitchFamily="34" charset="-122"/>
+                <a:cs typeface="Consolas" pitchFamily="34" charset="-120"/>
+              </a:rPr>
+              <a:t># 3  Common elements between two lists</a:t>
+            </a:r>
+            <a:endParaRPr lang="en-US" sz="800" dirty="0"/>
+          </a:p>
+          <a:p>
+            <a:pPr marL="0" indent="0">
+              <a:buNone/>
+            </a:pPr>
+            <a:r>
+              <a:rPr lang="en-US" sz="800" dirty="0">
+                <a:solidFill>
+                  <a:srgbClr val="7DD3FC"/>
+                </a:solidFill>
+                <a:latin typeface="Consolas" pitchFamily="34" charset="0"/>
+                <a:ea typeface="Consolas" pitchFamily="34" charset="-122"/>
+                <a:cs typeface="Consolas" pitchFamily="34" charset="-120"/>
+              </a:rPr>
+              <a:t>common = set([1,2,3]) &amp; set([2,3,4])  # {2,3}</a:t>
+            </a:r>
+            <a:endParaRPr lang="en-US" sz="800" dirty="0"/>
+          </a:p>
+        </p:txBody>
+      </p:sp>
+    </p:spTree>
+  </p:cSld>
+  <p:clrMapOvr>
+    <a:masterClrMapping/>
+  </p:clrMapOvr>
+</p:sld>
+</file>
+
 <file path=ppt/slides/slide2.xml><?xml version="1.0" encoding="utf-8"?>
 <p:sld xmlns:a="http://schemas.openxmlformats.org/drawingml/2006/main" xmlns:r="http://schemas.openxmlformats.org/officeDocument/2006/relationships" xmlns:p="http://schemas.openxmlformats.org/presentationml/2006/main">
   <p:cSld>
@@ -16796,45 +23896,6 @@
       </p:sp>
       <p:sp>
         <p:nvSpPr>
-          <p:cNvPr id="5" name="Text 3"/>
-          <p:cNvSpPr/>
-          <p:nvPr/>
-        </p:nvSpPr>
-        <p:spPr>
-          <a:xfrm>
-            <a:off x="8275320" y="0"/>
-            <a:ext cx="731520" cy="658368"/>
-          </a:xfrm>
-          <a:prstGeom prst="rect">
-            <a:avLst/>
-          </a:prstGeom>
-          <a:noFill/>
-          <a:ln/>
-        </p:spPr>
-        <p:txBody>
-          <a:bodyPr wrap="square" lIns="0" tIns="0" rIns="0" bIns="0" rtlCol="0" anchor="ctr"/>
-          <a:lstStyle/>
-          <a:p>
-            <a:pPr marL="0" indent="0" algn="r">
-              <a:buNone/>
-            </a:pPr>
-            <a:r>
-              <a:rPr lang="en-US" sz="1300" dirty="0">
-                <a:solidFill>
-                  <a:srgbClr val="FBBF24"/>
-                </a:solidFill>
-                <a:latin typeface="Calibri" pitchFamily="34" charset="0"/>
-                <a:ea typeface="Calibri" pitchFamily="34" charset="-122"/>
-                <a:cs typeface="Calibri" pitchFamily="34" charset="-120"/>
-              </a:rPr>
-              <a:t>2</a:t>
-            </a:r>
-            <a:endParaRPr lang="en-US" sz="1300" dirty="0"/>
-          </a:p>
-        </p:txBody>
-      </p:sp>
-      <p:sp>
-        <p:nvSpPr>
           <p:cNvPr id="6" name="Shape 4"/>
           <p:cNvSpPr/>
           <p:nvPr/>
@@ -17790,7 +24851,7 @@
         </p:nvSpPr>
         <p:spPr>
           <a:xfrm>
-            <a:off x="4736592" y="1060704"/>
+            <a:off x="4736592" y="1027452"/>
             <a:ext cx="4151376" cy="246888"/>
           </a:xfrm>
           <a:prstGeom prst="rect">
@@ -17815,7 +24876,7 @@
         </p:nvSpPr>
         <p:spPr>
           <a:xfrm>
-            <a:off x="4736592" y="1060704"/>
+            <a:off x="4736592" y="1027452"/>
             <a:ext cx="4151376" cy="246888"/>
           </a:xfrm>
           <a:prstGeom prst="rect">
@@ -17854,7 +24915,7 @@
         </p:nvSpPr>
         <p:spPr>
           <a:xfrm>
-            <a:off x="4736592" y="1389888"/>
+            <a:off x="4736592" y="1348323"/>
             <a:ext cx="4151376" cy="237744"/>
           </a:xfrm>
           <a:prstGeom prst="rect">
@@ -17879,7 +24940,7 @@
         </p:nvSpPr>
         <p:spPr>
           <a:xfrm>
-            <a:off x="4773168" y="1389888"/>
+            <a:off x="4773168" y="1348323"/>
             <a:ext cx="4078224" cy="237744"/>
           </a:xfrm>
           <a:prstGeom prst="rect">
@@ -21672,45 +28733,6 @@
       </p:sp>
       <p:sp>
         <p:nvSpPr>
-          <p:cNvPr id="5" name="Text 3"/>
-          <p:cNvSpPr/>
-          <p:nvPr/>
-        </p:nvSpPr>
-        <p:spPr>
-          <a:xfrm>
-            <a:off x="8275320" y="0"/>
-            <a:ext cx="731520" cy="658368"/>
-          </a:xfrm>
-          <a:prstGeom prst="rect">
-            <a:avLst/>
-          </a:prstGeom>
-          <a:noFill/>
-          <a:ln/>
-        </p:spPr>
-        <p:txBody>
-          <a:bodyPr wrap="square" lIns="0" tIns="0" rIns="0" bIns="0" rtlCol="0" anchor="ctr"/>
-          <a:lstStyle/>
-          <a:p>
-            <a:pPr marL="0" indent="0" algn="r">
-              <a:buNone/>
-            </a:pPr>
-            <a:r>
-              <a:rPr lang="en-US" sz="1300" dirty="0">
-                <a:solidFill>
-                  <a:srgbClr val="FBBF24"/>
-                </a:solidFill>
-                <a:latin typeface="Calibri" pitchFamily="34" charset="0"/>
-                <a:ea typeface="Calibri" pitchFamily="34" charset="-122"/>
-                <a:cs typeface="Calibri" pitchFamily="34" charset="-120"/>
-              </a:rPr>
-              <a:t>2</a:t>
-            </a:r>
-            <a:endParaRPr lang="en-US" sz="1300" dirty="0"/>
-          </a:p>
-        </p:txBody>
-      </p:sp>
-      <p:sp>
-        <p:nvSpPr>
           <p:cNvPr id="6" name="Shape 4"/>
           <p:cNvSpPr/>
           <p:nvPr/>
@@ -22961,45 +29983,6 @@
       </p:sp>
       <p:sp>
         <p:nvSpPr>
-          <p:cNvPr id="5" name="Text 3"/>
-          <p:cNvSpPr/>
-          <p:nvPr/>
-        </p:nvSpPr>
-        <p:spPr>
-          <a:xfrm>
-            <a:off x="8275320" y="0"/>
-            <a:ext cx="731520" cy="658368"/>
-          </a:xfrm>
-          <a:prstGeom prst="rect">
-            <a:avLst/>
-          </a:prstGeom>
-          <a:noFill/>
-          <a:ln/>
-        </p:spPr>
-        <p:txBody>
-          <a:bodyPr wrap="square" lIns="0" tIns="0" rIns="0" bIns="0" rtlCol="0" anchor="ctr"/>
-          <a:lstStyle/>
-          <a:p>
-            <a:pPr marL="0" indent="0" algn="r">
-              <a:buNone/>
-            </a:pPr>
-            <a:r>
-              <a:rPr lang="en-US" sz="1300" dirty="0">
-                <a:solidFill>
-                  <a:srgbClr val="FBBF24"/>
-                </a:solidFill>
-                <a:latin typeface="Calibri" pitchFamily="34" charset="0"/>
-                <a:ea typeface="Calibri" pitchFamily="34" charset="-122"/>
-                <a:cs typeface="Calibri" pitchFamily="34" charset="-120"/>
-              </a:rPr>
-              <a:t>3</a:t>
-            </a:r>
-            <a:endParaRPr lang="en-US" sz="1300" dirty="0"/>
-          </a:p>
-        </p:txBody>
-      </p:sp>
-      <p:sp>
-        <p:nvSpPr>
           <p:cNvPr id="6" name="Shape 4"/>
           <p:cNvSpPr/>
           <p:nvPr/>
@@ -23062,45 +30045,6 @@
           </a:p>
         </p:txBody>
       </p:sp>
-      <p:sp>
-        <p:nvSpPr>
-          <p:cNvPr id="8" name="Text 6"/>
-          <p:cNvSpPr/>
-          <p:nvPr/>
-        </p:nvSpPr>
-        <p:spPr>
-          <a:xfrm>
-            <a:off x="256032" y="786384"/>
-            <a:ext cx="8631936" cy="237744"/>
-          </a:xfrm>
-          <a:prstGeom prst="rect">
-            <a:avLst/>
-          </a:prstGeom>
-          <a:noFill/>
-          <a:ln/>
-        </p:spPr>
-        <p:txBody>
-          <a:bodyPr wrap="square" lIns="0" tIns="0" rIns="0" bIns="0" rtlCol="0" anchor="ctr"/>
-          <a:lstStyle/>
-          <a:p>
-            <a:pPr marL="0" indent="0">
-              <a:buNone/>
-            </a:pPr>
-            <a:r>
-              <a:rPr lang="en-US" sz="1050" dirty="0">
-                <a:solidFill>
-                  <a:srgbClr val="64748B"/>
-                </a:solidFill>
-                <a:latin typeface="Calibri" pitchFamily="34" charset="0"/>
-                <a:ea typeface="Calibri" pitchFamily="34" charset="-122"/>
-                <a:cs typeface="Calibri" pitchFamily="34" charset="-120"/>
-              </a:rPr>
-              <a:t>Python provides 14 built-in types, grouped into 5 categories  (source: DataTypes.md)</a:t>
-            </a:r>
-            <a:endParaRPr lang="en-US" sz="1050" dirty="0"/>
-          </a:p>
-        </p:txBody>
-      </p:sp>
       <p:graphicFrame>
         <p:nvGraphicFramePr>
           <p:cNvPr id="9" name="Table 0"/>
@@ -23110,13 +30054,13 @@
           <p:nvPr>
             <p:extLst>
               <p:ext uri="{D42A27DB-BD31-4B8C-83A1-F6EECF244321}">
-                <p14:modId xmlns:p14="http://schemas.microsoft.com/office/powerpoint/2010/main" val="1579011935"/>
+                <p14:modId xmlns:p14="http://schemas.microsoft.com/office/powerpoint/2010/main" val="3524835045"/>
               </p:ext>
             </p:extLst>
           </p:nvPr>
         </p:nvGraphicFramePr>
         <p:xfrm>
-          <a:off x="256032" y="1060704"/>
+          <a:off x="256032" y="861198"/>
           <a:ext cx="8631936" cy="3922776"/>
         </p:xfrm>
         <a:graphic>
@@ -23145,14 +30089,14 @@
                     </a:ext>
                   </a:extLst>
                 </a:gridCol>
-                <a:gridCol w="1591056">
+                <a:gridCol w="1714084">
                   <a:extLst>
                     <a:ext uri="{9D8B030D-6E8A-4147-A177-3AD203B41FA5}">
                       <a16:colId xmlns:a16="http://schemas.microsoft.com/office/drawing/2014/main" val="20003"/>
                     </a:ext>
                   </a:extLst>
                 </a:gridCol>
-                <a:gridCol w="4206240">
+                <a:gridCol w="4083212">
                   <a:extLst>
                     <a:ext uri="{9D8B030D-6E8A-4147-A177-3AD203B41FA5}">
                       <a16:colId xmlns:a16="http://schemas.microsoft.com/office/drawing/2014/main" val="20004"/>
@@ -26288,7 +33232,7 @@
                           <a:ea typeface="Consolas" pitchFamily="34" charset="-122"/>
                           <a:cs typeface="Consolas" pitchFamily="34" charset="-120"/>
                         </a:rPr>
-                        <a:t>{1, 2, 3}</a:t>
+                        <a:t>{1, 2, 3} or s = set()</a:t>
                       </a:r>
                       <a:endParaRPr lang="en-US" sz="950" dirty="0">
                         <a:latin typeface="Consolas" charset="0"/>
@@ -27512,45 +34456,6 @@
       </p:sp>
       <p:sp>
         <p:nvSpPr>
-          <p:cNvPr id="5" name="Text 3"/>
-          <p:cNvSpPr/>
-          <p:nvPr/>
-        </p:nvSpPr>
-        <p:spPr>
-          <a:xfrm>
-            <a:off x="8275320" y="0"/>
-            <a:ext cx="731520" cy="658368"/>
-          </a:xfrm>
-          <a:prstGeom prst="rect">
-            <a:avLst/>
-          </a:prstGeom>
-          <a:noFill/>
-          <a:ln/>
-        </p:spPr>
-        <p:txBody>
-          <a:bodyPr wrap="square" lIns="0" tIns="0" rIns="0" bIns="0" rtlCol="0" anchor="ctr"/>
-          <a:lstStyle/>
-          <a:p>
-            <a:pPr marL="0" indent="0" algn="r">
-              <a:buNone/>
-            </a:pPr>
-            <a:r>
-              <a:rPr lang="en-US" sz="1300" dirty="0">
-                <a:solidFill>
-                  <a:srgbClr val="FBBF24"/>
-                </a:solidFill>
-                <a:latin typeface="Calibri" pitchFamily="34" charset="0"/>
-                <a:ea typeface="Calibri" pitchFamily="34" charset="-122"/>
-                <a:cs typeface="Calibri" pitchFamily="34" charset="-120"/>
-              </a:rPr>
-              <a:t>4</a:t>
-            </a:r>
-            <a:endParaRPr lang="en-US" sz="1300" dirty="0"/>
-          </a:p>
-        </p:txBody>
-      </p:sp>
-      <p:sp>
-        <p:nvSpPr>
           <p:cNvPr id="6" name="Shape 4"/>
           <p:cNvSpPr/>
           <p:nvPr/>
@@ -28743,45 +35648,6 @@
               <a:t>📝  String  (str)</a:t>
             </a:r>
             <a:endParaRPr lang="en-US" sz="2100" dirty="0"/>
-          </a:p>
-        </p:txBody>
-      </p:sp>
-      <p:sp>
-        <p:nvSpPr>
-          <p:cNvPr id="5" name="Text 3"/>
-          <p:cNvSpPr/>
-          <p:nvPr/>
-        </p:nvSpPr>
-        <p:spPr>
-          <a:xfrm>
-            <a:off x="8275320" y="0"/>
-            <a:ext cx="731520" cy="658368"/>
-          </a:xfrm>
-          <a:prstGeom prst="rect">
-            <a:avLst/>
-          </a:prstGeom>
-          <a:noFill/>
-          <a:ln/>
-        </p:spPr>
-        <p:txBody>
-          <a:bodyPr wrap="square" lIns="0" tIns="0" rIns="0" bIns="0" rtlCol="0" anchor="ctr"/>
-          <a:lstStyle/>
-          <a:p>
-            <a:pPr marL="0" indent="0" algn="r">
-              <a:buNone/>
-            </a:pPr>
-            <a:r>
-              <a:rPr lang="en-US" sz="1300" dirty="0">
-                <a:solidFill>
-                  <a:srgbClr val="34D399"/>
-                </a:solidFill>
-                <a:latin typeface="Calibri" pitchFamily="34" charset="0"/>
-                <a:ea typeface="Calibri" pitchFamily="34" charset="-122"/>
-                <a:cs typeface="Calibri" pitchFamily="34" charset="-120"/>
-              </a:rPr>
-              <a:t>1</a:t>
-            </a:r>
-            <a:endParaRPr lang="en-US" sz="1300" dirty="0"/>
           </a:p>
         </p:txBody>
       </p:sp>
@@ -32104,7 +38970,7 @@
                 <a:ea typeface="Calibri" pitchFamily="34" charset="-122"/>
                 <a:cs typeface="Calibri" pitchFamily="34" charset="-120"/>
               </a:rPr>
-              <a:t>📌  Tuple  (tuple)</a:t>
+              <a:t>  Tuple  (tuple)</a:t>
             </a:r>
             <a:endParaRPr lang="en-US" sz="2100" dirty="0"/>
           </a:p>
